--- a/docs/Restaurant_OS_FSD.pptx
+++ b/docs/Restaurant_OS_FSD.pptx
@@ -596,7 +596,7 @@
           <a:lstStyle/>
           <a:p>
             <a:r>
-              <a:t>Level 1 decomposes process 0 into seven processes. Orders (D2) drive the kitchen, delivery, billing and stock; invoices (D3) drive loyalty points and FBR; stock (D4) and reviews (D5) feed analytics.</a:t>
+              <a:t>Level 1 decomposes process 0 into seven processes. Orders (D2) drive the kitchen, delivery, billing and stock; invoices (D3) drive loyalty points and FBR; stock (D4) and reviews (D5) feed analytics. Customer ratings arrive through the tracking page and the WhatsApp link.</a:t>
             </a:r>
           </a:p>
         </p:txBody>
@@ -3630,22 +3630,7 @@
           <a:ln>
             <a:noFill/>
           </a:ln>
-          <a:effectLst/>
-        </p:spPr>
-        <p:style>
-          <a:lnRef idx="1">
-            <a:schemeClr val="accent1"/>
-          </a:lnRef>
-          <a:fillRef idx="3">
-            <a:schemeClr val="accent1"/>
-          </a:fillRef>
-          <a:effectRef idx="2">
-            <a:schemeClr val="accent1"/>
-          </a:effectRef>
-          <a:fontRef idx="minor">
-            <a:schemeClr val="lt1"/>
-          </a:fontRef>
-        </p:style>
+        </p:spPr>
         <p:txBody>
           <a:bodyPr rtlCol="0" anchor="ctr" wrap="square" lIns="54864" rIns="54864" tIns="27432" bIns="27432"/>
           <a:lstStyle/>
@@ -3946,22 +3931,7 @@
           <a:ln>
             <a:noFill/>
           </a:ln>
-          <a:effectLst/>
-        </p:spPr>
-        <p:style>
-          <a:lnRef idx="1">
-            <a:schemeClr val="accent1"/>
-          </a:lnRef>
-          <a:fillRef idx="3">
-            <a:schemeClr val="accent1"/>
-          </a:fillRef>
-          <a:effectRef idx="2">
-            <a:schemeClr val="accent1"/>
-          </a:effectRef>
-          <a:fontRef idx="minor">
-            <a:schemeClr val="lt1"/>
-          </a:fontRef>
-        </p:style>
+        </p:spPr>
         <p:txBody>
           <a:bodyPr rtlCol="0" anchor="ctr" wrap="square" lIns="54864" rIns="54864" tIns="27432" bIns="27432"/>
           <a:lstStyle/>
@@ -4904,22 +4874,7 @@
           <a:ln>
             <a:noFill/>
           </a:ln>
-          <a:effectLst/>
-        </p:spPr>
-        <p:style>
-          <a:lnRef idx="1">
-            <a:schemeClr val="accent1"/>
-          </a:lnRef>
-          <a:fillRef idx="3">
-            <a:schemeClr val="accent1"/>
-          </a:fillRef>
-          <a:effectRef idx="2">
-            <a:schemeClr val="accent1"/>
-          </a:effectRef>
-          <a:fontRef idx="minor">
-            <a:schemeClr val="lt1"/>
-          </a:fontRef>
-        </p:style>
+        </p:spPr>
         <p:txBody>
           <a:bodyPr rtlCol="0" anchor="ctr" wrap="square" lIns="54864" rIns="54864" tIns="27432" bIns="27432"/>
           <a:lstStyle/>
@@ -5617,22 +5572,7 @@
           <a:ln>
             <a:noFill/>
           </a:ln>
-          <a:effectLst/>
-        </p:spPr>
-        <p:style>
-          <a:lnRef idx="1">
-            <a:schemeClr val="accent1"/>
-          </a:lnRef>
-          <a:fillRef idx="3">
-            <a:schemeClr val="accent1"/>
-          </a:fillRef>
-          <a:effectRef idx="2">
-            <a:schemeClr val="accent1"/>
-          </a:effectRef>
-          <a:fontRef idx="minor">
-            <a:schemeClr val="lt1"/>
-          </a:fontRef>
-        </p:style>
+        </p:spPr>
         <p:txBody>
           <a:bodyPr rtlCol="0" anchor="ctr" wrap="square" lIns="54864" rIns="54864" tIns="27432" bIns="27432"/>
           <a:lstStyle/>
@@ -6122,22 +6062,7 @@
           <a:ln>
             <a:noFill/>
           </a:ln>
-          <a:effectLst/>
-        </p:spPr>
-        <p:style>
-          <a:lnRef idx="1">
-            <a:schemeClr val="accent1"/>
-          </a:lnRef>
-          <a:fillRef idx="3">
-            <a:schemeClr val="accent1"/>
-          </a:fillRef>
-          <a:effectRef idx="2">
-            <a:schemeClr val="accent1"/>
-          </a:effectRef>
-          <a:fontRef idx="minor">
-            <a:schemeClr val="lt1"/>
-          </a:fontRef>
-        </p:style>
+        </p:spPr>
         <p:txBody>
           <a:bodyPr rtlCol="0" anchor="ctr" wrap="square" lIns="54864" rIns="54864" tIns="27432" bIns="27432"/>
           <a:lstStyle/>
@@ -6627,22 +6552,7 @@
           <a:ln>
             <a:noFill/>
           </a:ln>
-          <a:effectLst/>
-        </p:spPr>
-        <p:style>
-          <a:lnRef idx="1">
-            <a:schemeClr val="accent1"/>
-          </a:lnRef>
-          <a:fillRef idx="3">
-            <a:schemeClr val="accent1"/>
-          </a:fillRef>
-          <a:effectRef idx="2">
-            <a:schemeClr val="accent1"/>
-          </a:effectRef>
-          <a:fontRef idx="minor">
-            <a:schemeClr val="lt1"/>
-          </a:fontRef>
-        </p:style>
+        </p:spPr>
         <p:txBody>
           <a:bodyPr rtlCol="0" anchor="ctr" wrap="square" lIns="54864" rIns="54864" tIns="27432" bIns="27432"/>
           <a:lstStyle/>
@@ -7030,22 +6940,7 @@
           <a:ln>
             <a:noFill/>
           </a:ln>
-          <a:effectLst/>
-        </p:spPr>
-        <p:style>
-          <a:lnRef idx="1">
-            <a:schemeClr val="accent1"/>
-          </a:lnRef>
-          <a:fillRef idx="3">
-            <a:schemeClr val="accent1"/>
-          </a:fillRef>
-          <a:effectRef idx="2">
-            <a:schemeClr val="accent1"/>
-          </a:effectRef>
-          <a:fontRef idx="minor">
-            <a:schemeClr val="lt1"/>
-          </a:fontRef>
-        </p:style>
+        </p:spPr>
         <p:txBody>
           <a:bodyPr rtlCol="0" anchor="ctr" wrap="square" lIns="54864" rIns="54864" tIns="27432" bIns="27432"/>
           <a:lstStyle/>
@@ -7501,22 +7396,7 @@
           <a:ln>
             <a:noFill/>
           </a:ln>
-          <a:effectLst/>
-        </p:spPr>
-        <p:style>
-          <a:lnRef idx="1">
-            <a:schemeClr val="accent1"/>
-          </a:lnRef>
-          <a:fillRef idx="3">
-            <a:schemeClr val="accent1"/>
-          </a:fillRef>
-          <a:effectRef idx="2">
-            <a:schemeClr val="accent1"/>
-          </a:effectRef>
-          <a:fontRef idx="minor">
-            <a:schemeClr val="lt1"/>
-          </a:fontRef>
-        </p:style>
+        </p:spPr>
         <p:txBody>
           <a:bodyPr rtlCol="0" anchor="ctr" wrap="square" lIns="54864" rIns="54864" tIns="27432" bIns="27432"/>
           <a:lstStyle/>
@@ -7972,22 +7852,7 @@
           <a:ln>
             <a:noFill/>
           </a:ln>
-          <a:effectLst/>
-        </p:spPr>
-        <p:style>
-          <a:lnRef idx="1">
-            <a:schemeClr val="accent1"/>
-          </a:lnRef>
-          <a:fillRef idx="3">
-            <a:schemeClr val="accent1"/>
-          </a:fillRef>
-          <a:effectRef idx="2">
-            <a:schemeClr val="accent1"/>
-          </a:effectRef>
-          <a:fontRef idx="minor">
-            <a:schemeClr val="lt1"/>
-          </a:fontRef>
-        </p:style>
+        </p:spPr>
         <p:txBody>
           <a:bodyPr rtlCol="0" anchor="ctr" wrap="square" lIns="54864" rIns="54864" tIns="27432" bIns="27432"/>
           <a:lstStyle/>
@@ -8443,22 +8308,7 @@
           <a:ln>
             <a:noFill/>
           </a:ln>
-          <a:effectLst/>
-        </p:spPr>
-        <p:style>
-          <a:lnRef idx="1">
-            <a:schemeClr val="accent1"/>
-          </a:lnRef>
-          <a:fillRef idx="3">
-            <a:schemeClr val="accent1"/>
-          </a:fillRef>
-          <a:effectRef idx="2">
-            <a:schemeClr val="accent1"/>
-          </a:effectRef>
-          <a:fontRef idx="minor">
-            <a:schemeClr val="lt1"/>
-          </a:fontRef>
-        </p:style>
+        </p:spPr>
         <p:txBody>
           <a:bodyPr rtlCol="0" anchor="ctr" wrap="square" lIns="54864" rIns="54864" tIns="27432" bIns="27432"/>
           <a:lstStyle/>
@@ -8846,22 +8696,7 @@
           <a:ln>
             <a:noFill/>
           </a:ln>
-          <a:effectLst/>
-        </p:spPr>
-        <p:style>
-          <a:lnRef idx="1">
-            <a:schemeClr val="accent1"/>
-          </a:lnRef>
-          <a:fillRef idx="3">
-            <a:schemeClr val="accent1"/>
-          </a:fillRef>
-          <a:effectRef idx="2">
-            <a:schemeClr val="accent1"/>
-          </a:effectRef>
-          <a:fontRef idx="minor">
-            <a:schemeClr val="lt1"/>
-          </a:fontRef>
-        </p:style>
+        </p:spPr>
         <p:txBody>
           <a:bodyPr rtlCol="0" anchor="ctr" wrap="square" lIns="54864" rIns="54864" tIns="27432" bIns="27432"/>
           <a:lstStyle/>
@@ -9032,22 +8867,7 @@
               <a:srgbClr val="0B5E57"/>
             </a:solidFill>
           </a:ln>
-          <a:effectLst/>
-        </p:spPr>
-        <p:style>
-          <a:lnRef idx="1">
-            <a:schemeClr val="accent1"/>
-          </a:lnRef>
-          <a:fillRef idx="3">
-            <a:schemeClr val="accent1"/>
-          </a:fillRef>
-          <a:effectRef idx="2">
-            <a:schemeClr val="accent1"/>
-          </a:effectRef>
-          <a:fontRef idx="minor">
-            <a:schemeClr val="lt1"/>
-          </a:fontRef>
-        </p:style>
+        </p:spPr>
         <p:txBody>
           <a:bodyPr rtlCol="0" anchor="ctr" wrap="square" lIns="54864" rIns="54864" tIns="27432" bIns="27432"/>
           <a:lstStyle/>
@@ -9087,22 +8907,7 @@
               <a:srgbClr val="0B5E57"/>
             </a:solidFill>
           </a:ln>
-          <a:effectLst/>
-        </p:spPr>
-        <p:style>
-          <a:lnRef idx="1">
-            <a:schemeClr val="accent1"/>
-          </a:lnRef>
-          <a:fillRef idx="3">
-            <a:schemeClr val="accent1"/>
-          </a:fillRef>
-          <a:effectRef idx="2">
-            <a:schemeClr val="accent1"/>
-          </a:effectRef>
-          <a:fontRef idx="minor">
-            <a:schemeClr val="lt1"/>
-          </a:fontRef>
-        </p:style>
+        </p:spPr>
         <p:txBody>
           <a:bodyPr rtlCol="0" anchor="ctr" wrap="square" lIns="54864" rIns="54864" tIns="27432" bIns="27432"/>
           <a:lstStyle/>
@@ -9142,22 +8947,7 @@
               <a:srgbClr val="0B5E57"/>
             </a:solidFill>
           </a:ln>
-          <a:effectLst/>
-        </p:spPr>
-        <p:style>
-          <a:lnRef idx="1">
-            <a:schemeClr val="accent1"/>
-          </a:lnRef>
-          <a:fillRef idx="3">
-            <a:schemeClr val="accent1"/>
-          </a:fillRef>
-          <a:effectRef idx="2">
-            <a:schemeClr val="accent1"/>
-          </a:effectRef>
-          <a:fontRef idx="minor">
-            <a:schemeClr val="lt1"/>
-          </a:fontRef>
-        </p:style>
+        </p:spPr>
         <p:txBody>
           <a:bodyPr rtlCol="0" anchor="ctr" wrap="square" lIns="54864" rIns="54864" tIns="27432" bIns="27432"/>
           <a:lstStyle/>
@@ -9197,22 +8987,7 @@
               <a:srgbClr val="0B5E57"/>
             </a:solidFill>
           </a:ln>
-          <a:effectLst/>
-        </p:spPr>
-        <p:style>
-          <a:lnRef idx="1">
-            <a:schemeClr val="accent1"/>
-          </a:lnRef>
-          <a:fillRef idx="3">
-            <a:schemeClr val="accent1"/>
-          </a:fillRef>
-          <a:effectRef idx="2">
-            <a:schemeClr val="accent1"/>
-          </a:effectRef>
-          <a:fontRef idx="minor">
-            <a:schemeClr val="lt1"/>
-          </a:fontRef>
-        </p:style>
+        </p:spPr>
         <p:txBody>
           <a:bodyPr rtlCol="0" anchor="ctr" wrap="square" lIns="54864" rIns="54864" tIns="27432" bIns="27432"/>
           <a:lstStyle/>
@@ -9251,20 +9026,6 @@
             <a:tailEnd type="triangle" w="med" len="med"/>
           </a:ln>
         </p:spPr>
-        <p:style>
-          <a:lnRef idx="2">
-            <a:schemeClr val="accent1"/>
-          </a:lnRef>
-          <a:fillRef idx="0">
-            <a:schemeClr val="accent1"/>
-          </a:fillRef>
-          <a:effectRef idx="1">
-            <a:schemeClr val="accent1"/>
-          </a:effectRef>
-          <a:fontRef idx="minor">
-            <a:schemeClr val="tx1"/>
-          </a:fontRef>
-        </p:style>
       </p:cxnSp>
       <p:cxnSp>
         <p:nvCxnSpPr>
@@ -9287,20 +9048,6 @@
             <a:tailEnd type="triangle" w="med" len="med"/>
           </a:ln>
         </p:spPr>
-        <p:style>
-          <a:lnRef idx="2">
-            <a:schemeClr val="accent1"/>
-          </a:lnRef>
-          <a:fillRef idx="0">
-            <a:schemeClr val="accent1"/>
-          </a:fillRef>
-          <a:effectRef idx="1">
-            <a:schemeClr val="accent1"/>
-          </a:effectRef>
-          <a:fontRef idx="minor">
-            <a:schemeClr val="tx1"/>
-          </a:fontRef>
-        </p:style>
       </p:cxnSp>
       <p:cxnSp>
         <p:nvCxnSpPr>
@@ -9323,20 +9070,6 @@
             <a:tailEnd type="triangle" w="med" len="med"/>
           </a:ln>
         </p:spPr>
-        <p:style>
-          <a:lnRef idx="2">
-            <a:schemeClr val="accent1"/>
-          </a:lnRef>
-          <a:fillRef idx="0">
-            <a:schemeClr val="accent1"/>
-          </a:fillRef>
-          <a:effectRef idx="1">
-            <a:schemeClr val="accent1"/>
-          </a:effectRef>
-          <a:fontRef idx="minor">
-            <a:schemeClr val="tx1"/>
-          </a:fontRef>
-        </p:style>
       </p:cxnSp>
       <p:sp>
         <p:nvSpPr>
@@ -9358,22 +9091,7 @@
           <a:ln>
             <a:noFill/>
           </a:ln>
-          <a:effectLst/>
-        </p:spPr>
-        <p:style>
-          <a:lnRef idx="1">
-            <a:schemeClr val="accent1"/>
-          </a:lnRef>
-          <a:fillRef idx="3">
-            <a:schemeClr val="accent1"/>
-          </a:fillRef>
-          <a:effectRef idx="2">
-            <a:schemeClr val="accent1"/>
-          </a:effectRef>
-          <a:fontRef idx="minor">
-            <a:schemeClr val="lt1"/>
-          </a:fontRef>
-        </p:style>
+        </p:spPr>
         <p:txBody>
           <a:bodyPr rtlCol="0" anchor="ctr" wrap="square" lIns="54864" rIns="54864" tIns="27432" bIns="27432"/>
           <a:lstStyle/>
@@ -9413,22 +9131,7 @@
               <a:srgbClr val="0B5E57"/>
             </a:solidFill>
           </a:ln>
-          <a:effectLst/>
-        </p:spPr>
-        <p:style>
-          <a:lnRef idx="1">
-            <a:schemeClr val="accent1"/>
-          </a:lnRef>
-          <a:fillRef idx="3">
-            <a:schemeClr val="accent1"/>
-          </a:fillRef>
-          <a:effectRef idx="2">
-            <a:schemeClr val="accent1"/>
-          </a:effectRef>
-          <a:fontRef idx="minor">
-            <a:schemeClr val="lt1"/>
-          </a:fontRef>
-        </p:style>
+        </p:spPr>
         <p:txBody>
           <a:bodyPr rtlCol="0" anchor="ctr" wrap="square" lIns="54864" rIns="54864" tIns="27432" bIns="27432"/>
           <a:lstStyle/>
@@ -9468,22 +9171,7 @@
               <a:srgbClr val="0B5E57"/>
             </a:solidFill>
           </a:ln>
-          <a:effectLst/>
-        </p:spPr>
-        <p:style>
-          <a:lnRef idx="1">
-            <a:schemeClr val="accent1"/>
-          </a:lnRef>
-          <a:fillRef idx="3">
-            <a:schemeClr val="accent1"/>
-          </a:fillRef>
-          <a:effectRef idx="2">
-            <a:schemeClr val="accent1"/>
-          </a:effectRef>
-          <a:fontRef idx="minor">
-            <a:schemeClr val="lt1"/>
-          </a:fontRef>
-        </p:style>
+        </p:spPr>
         <p:txBody>
           <a:bodyPr rtlCol="0" anchor="ctr" wrap="square" lIns="54864" rIns="54864" tIns="27432" bIns="27432"/>
           <a:lstStyle/>
@@ -9521,22 +9209,7 @@
           <a:ln>
             <a:noFill/>
           </a:ln>
-          <a:effectLst/>
-        </p:spPr>
-        <p:style>
-          <a:lnRef idx="1">
-            <a:schemeClr val="accent1"/>
-          </a:lnRef>
-          <a:fillRef idx="3">
-            <a:schemeClr val="accent1"/>
-          </a:fillRef>
-          <a:effectRef idx="2">
-            <a:schemeClr val="accent1"/>
-          </a:effectRef>
-          <a:fontRef idx="minor">
-            <a:schemeClr val="lt1"/>
-          </a:fontRef>
-        </p:style>
+        </p:spPr>
         <p:txBody>
           <a:bodyPr rtlCol="0" anchor="ctr" wrap="square" lIns="54864" rIns="54864" tIns="27432" bIns="27432"/>
           <a:lstStyle/>
@@ -9575,20 +9248,6 @@
             <a:tailEnd type="triangle" w="med" len="med"/>
           </a:ln>
         </p:spPr>
-        <p:style>
-          <a:lnRef idx="2">
-            <a:schemeClr val="accent1"/>
-          </a:lnRef>
-          <a:fillRef idx="0">
-            <a:schemeClr val="accent1"/>
-          </a:fillRef>
-          <a:effectRef idx="1">
-            <a:schemeClr val="accent1"/>
-          </a:effectRef>
-          <a:fontRef idx="minor">
-            <a:schemeClr val="tx1"/>
-          </a:fontRef>
-        </p:style>
       </p:cxnSp>
       <p:sp>
         <p:nvSpPr>
@@ -9648,20 +9307,6 @@
             <a:tailEnd type="triangle" w="med" len="med"/>
           </a:ln>
         </p:spPr>
-        <p:style>
-          <a:lnRef idx="2">
-            <a:schemeClr val="accent1"/>
-          </a:lnRef>
-          <a:fillRef idx="0">
-            <a:schemeClr val="accent1"/>
-          </a:fillRef>
-          <a:effectRef idx="1">
-            <a:schemeClr val="accent1"/>
-          </a:effectRef>
-          <a:fontRef idx="minor">
-            <a:schemeClr val="tx1"/>
-          </a:fontRef>
-        </p:style>
       </p:cxnSp>
       <p:sp>
         <p:nvSpPr>
@@ -9721,20 +9366,6 @@
             <a:tailEnd type="triangle" w="med" len="med"/>
           </a:ln>
         </p:spPr>
-        <p:style>
-          <a:lnRef idx="2">
-            <a:schemeClr val="accent1"/>
-          </a:lnRef>
-          <a:fillRef idx="0">
-            <a:schemeClr val="accent1"/>
-          </a:fillRef>
-          <a:effectRef idx="1">
-            <a:schemeClr val="accent1"/>
-          </a:effectRef>
-          <a:fontRef idx="minor">
-            <a:schemeClr val="tx1"/>
-          </a:fontRef>
-        </p:style>
       </p:cxnSp>
       <p:cxnSp>
         <p:nvCxnSpPr>
@@ -9757,20 +9388,6 @@
             <a:tailEnd type="triangle" w="med" len="med"/>
           </a:ln>
         </p:spPr>
-        <p:style>
-          <a:lnRef idx="2">
-            <a:schemeClr val="accent1"/>
-          </a:lnRef>
-          <a:fillRef idx="0">
-            <a:schemeClr val="accent1"/>
-          </a:fillRef>
-          <a:effectRef idx="1">
-            <a:schemeClr val="accent1"/>
-          </a:effectRef>
-          <a:fontRef idx="minor">
-            <a:schemeClr val="tx1"/>
-          </a:fontRef>
-        </p:style>
       </p:cxnSp>
       <p:sp>
         <p:nvSpPr>
@@ -9830,20 +9447,6 @@
             <a:tailEnd type="triangle" w="med" len="med"/>
           </a:ln>
         </p:spPr>
-        <p:style>
-          <a:lnRef idx="2">
-            <a:schemeClr val="accent1"/>
-          </a:lnRef>
-          <a:fillRef idx="0">
-            <a:schemeClr val="accent1"/>
-          </a:fillRef>
-          <a:effectRef idx="1">
-            <a:schemeClr val="accent1"/>
-          </a:effectRef>
-          <a:fontRef idx="minor">
-            <a:schemeClr val="tx1"/>
-          </a:fontRef>
-        </p:style>
       </p:cxnSp>
       <p:sp>
         <p:nvSpPr>
@@ -9904,22 +9507,7 @@
               <a:srgbClr val="EA6834"/>
             </a:solidFill>
           </a:ln>
-          <a:effectLst/>
-        </p:spPr>
-        <p:style>
-          <a:lnRef idx="1">
-            <a:schemeClr val="accent1"/>
-          </a:lnRef>
-          <a:fillRef idx="3">
-            <a:schemeClr val="accent1"/>
-          </a:fillRef>
-          <a:effectRef idx="2">
-            <a:schemeClr val="accent1"/>
-          </a:effectRef>
-          <a:fontRef idx="minor">
-            <a:schemeClr val="lt1"/>
-          </a:fontRef>
-        </p:style>
+        </p:spPr>
         <p:txBody>
           <a:bodyPr rtlCol="0" anchor="ctr" wrap="square" lIns="54864" rIns="54864" tIns="27432" bIns="27432"/>
           <a:lstStyle/>
@@ -9970,20 +9558,6 @@
             <a:tailEnd type="triangle" w="med" len="med"/>
           </a:ln>
         </p:spPr>
-        <p:style>
-          <a:lnRef idx="2">
-            <a:schemeClr val="accent1"/>
-          </a:lnRef>
-          <a:fillRef idx="0">
-            <a:schemeClr val="accent1"/>
-          </a:fillRef>
-          <a:effectRef idx="1">
-            <a:schemeClr val="accent1"/>
-          </a:effectRef>
-          <a:fontRef idx="minor">
-            <a:schemeClr val="tx1"/>
-          </a:fontRef>
-        </p:style>
       </p:cxnSp>
       <p:sp>
         <p:nvSpPr>
@@ -10044,22 +9618,7 @@
               <a:srgbClr val="64748B"/>
             </a:solidFill>
           </a:ln>
-          <a:effectLst/>
-        </p:spPr>
-        <p:style>
-          <a:lnRef idx="1">
-            <a:schemeClr val="accent1"/>
-          </a:lnRef>
-          <a:fillRef idx="3">
-            <a:schemeClr val="accent1"/>
-          </a:fillRef>
-          <a:effectRef idx="2">
-            <a:schemeClr val="accent1"/>
-          </a:effectRef>
-          <a:fontRef idx="minor">
-            <a:schemeClr val="lt1"/>
-          </a:fontRef>
-        </p:style>
+        </p:spPr>
         <p:txBody>
           <a:bodyPr rtlCol="0" anchor="ctr" wrap="square" lIns="54864" rIns="54864" tIns="27432" bIns="27432"/>
           <a:lstStyle/>
@@ -10379,22 +9938,7 @@
           <a:ln>
             <a:noFill/>
           </a:ln>
-          <a:effectLst/>
-        </p:spPr>
-        <p:style>
-          <a:lnRef idx="1">
-            <a:schemeClr val="accent1"/>
-          </a:lnRef>
-          <a:fillRef idx="3">
-            <a:schemeClr val="accent1"/>
-          </a:fillRef>
-          <a:effectRef idx="2">
-            <a:schemeClr val="accent1"/>
-          </a:effectRef>
-          <a:fontRef idx="minor">
-            <a:schemeClr val="lt1"/>
-          </a:fontRef>
-        </p:style>
+        </p:spPr>
         <p:txBody>
           <a:bodyPr rtlCol="0" anchor="ctr" wrap="square" lIns="54864" rIns="54864" tIns="27432" bIns="27432"/>
           <a:lstStyle/>
@@ -11312,22 +10856,7 @@
           <a:ln>
             <a:noFill/>
           </a:ln>
-          <a:effectLst/>
-        </p:spPr>
-        <p:style>
-          <a:lnRef idx="1">
-            <a:schemeClr val="accent1"/>
-          </a:lnRef>
-          <a:fillRef idx="3">
-            <a:schemeClr val="accent1"/>
-          </a:fillRef>
-          <a:effectRef idx="2">
-            <a:schemeClr val="accent1"/>
-          </a:effectRef>
-          <a:fontRef idx="minor">
-            <a:schemeClr val="lt1"/>
-          </a:fontRef>
-        </p:style>
+        </p:spPr>
         <p:txBody>
           <a:bodyPr rtlCol="0" anchor="ctr" wrap="square" lIns="54864" rIns="54864" tIns="27432" bIns="27432"/>
           <a:lstStyle/>
@@ -12297,22 +11826,7 @@
           <a:ln>
             <a:noFill/>
           </a:ln>
-          <a:effectLst/>
-        </p:spPr>
-        <p:style>
-          <a:lnRef idx="1">
-            <a:schemeClr val="accent1"/>
-          </a:lnRef>
-          <a:fillRef idx="3">
-            <a:schemeClr val="accent1"/>
-          </a:fillRef>
-          <a:effectRef idx="2">
-            <a:schemeClr val="accent1"/>
-          </a:effectRef>
-          <a:fontRef idx="minor">
-            <a:schemeClr val="lt1"/>
-          </a:fontRef>
-        </p:style>
+        </p:spPr>
         <p:txBody>
           <a:bodyPr rtlCol="0" anchor="ctr" wrap="square" lIns="54864" rIns="54864" tIns="27432" bIns="27432"/>
           <a:lstStyle/>
@@ -13110,22 +12624,7 @@
           <a:ln>
             <a:noFill/>
           </a:ln>
-          <a:effectLst/>
-        </p:spPr>
-        <p:style>
-          <a:lnRef idx="1">
-            <a:schemeClr val="accent1"/>
-          </a:lnRef>
-          <a:fillRef idx="3">
-            <a:schemeClr val="accent1"/>
-          </a:fillRef>
-          <a:effectRef idx="2">
-            <a:schemeClr val="accent1"/>
-          </a:effectRef>
-          <a:fontRef idx="minor">
-            <a:schemeClr val="lt1"/>
-          </a:fontRef>
-        </p:style>
+        </p:spPr>
         <p:txBody>
           <a:bodyPr rtlCol="0" anchor="ctr" wrap="square" lIns="54864" rIns="54864" tIns="27432" bIns="27432"/>
           <a:lstStyle/>
@@ -13914,22 +13413,7 @@
           <a:ln>
             <a:noFill/>
           </a:ln>
-          <a:effectLst/>
-        </p:spPr>
-        <p:style>
-          <a:lnRef idx="1">
-            <a:schemeClr val="accent1"/>
-          </a:lnRef>
-          <a:fillRef idx="3">
-            <a:schemeClr val="accent1"/>
-          </a:fillRef>
-          <a:effectRef idx="2">
-            <a:schemeClr val="accent1"/>
-          </a:effectRef>
-          <a:fontRef idx="minor">
-            <a:schemeClr val="lt1"/>
-          </a:fontRef>
-        </p:style>
+        </p:spPr>
         <p:txBody>
           <a:bodyPr rtlCol="0" anchor="ctr" wrap="square" lIns="54864" rIns="54864" tIns="27432" bIns="27432"/>
           <a:lstStyle/>
@@ -14476,22 +13960,7 @@
           <a:ln>
             <a:noFill/>
           </a:ln>
-          <a:effectLst/>
-        </p:spPr>
-        <p:style>
-          <a:lnRef idx="1">
-            <a:schemeClr val="accent1"/>
-          </a:lnRef>
-          <a:fillRef idx="3">
-            <a:schemeClr val="accent1"/>
-          </a:fillRef>
-          <a:effectRef idx="2">
-            <a:schemeClr val="accent1"/>
-          </a:effectRef>
-          <a:fontRef idx="minor">
-            <a:schemeClr val="lt1"/>
-          </a:fontRef>
-        </p:style>
+        </p:spPr>
         <p:txBody>
           <a:bodyPr rtlCol="0" anchor="ctr" wrap="square" lIns="54864" rIns="54864" tIns="27432" bIns="27432"/>
           <a:lstStyle/>
@@ -15161,22 +14630,7 @@
           <a:ln>
             <a:noFill/>
           </a:ln>
-          <a:effectLst/>
-        </p:spPr>
-        <p:style>
-          <a:lnRef idx="1">
-            <a:schemeClr val="accent1"/>
-          </a:lnRef>
-          <a:fillRef idx="3">
-            <a:schemeClr val="accent1"/>
-          </a:fillRef>
-          <a:effectRef idx="2">
-            <a:schemeClr val="accent1"/>
-          </a:effectRef>
-          <a:fontRef idx="minor">
-            <a:schemeClr val="lt1"/>
-          </a:fontRef>
-        </p:style>
+        </p:spPr>
         <p:txBody>
           <a:bodyPr rtlCol="0" anchor="ctr" wrap="square" lIns="54864" rIns="54864" tIns="27432" bIns="27432"/>
           <a:lstStyle/>
@@ -15621,22 +15075,7 @@
           <a:ln>
             <a:noFill/>
           </a:ln>
-          <a:effectLst/>
-        </p:spPr>
-        <p:style>
-          <a:lnRef idx="1">
-            <a:schemeClr val="accent1"/>
-          </a:lnRef>
-          <a:fillRef idx="3">
-            <a:schemeClr val="accent1"/>
-          </a:fillRef>
-          <a:effectRef idx="2">
-            <a:schemeClr val="accent1"/>
-          </a:effectRef>
-          <a:fontRef idx="minor">
-            <a:schemeClr val="lt1"/>
-          </a:fontRef>
-        </p:style>
+        </p:spPr>
         <p:txBody>
           <a:bodyPr rtlCol="0" anchor="ctr" wrap="square" lIns="54864" rIns="54864" tIns="27432" bIns="27432"/>
           <a:lstStyle/>
@@ -15840,22 +15279,7 @@
           <a:ln>
             <a:noFill/>
           </a:ln>
-          <a:effectLst/>
-        </p:spPr>
-        <p:style>
-          <a:lnRef idx="1">
-            <a:schemeClr val="accent1"/>
-          </a:lnRef>
-          <a:fillRef idx="3">
-            <a:schemeClr val="accent1"/>
-          </a:fillRef>
-          <a:effectRef idx="2">
-            <a:schemeClr val="accent1"/>
-          </a:effectRef>
-          <a:fontRef idx="minor">
-            <a:schemeClr val="lt1"/>
-          </a:fontRef>
-        </p:style>
+        </p:spPr>
         <p:txBody>
           <a:bodyPr rtlCol="0" anchor="ctr" wrap="square" lIns="54864" rIns="54864" tIns="27432" bIns="27432"/>
           <a:lstStyle/>
@@ -16091,22 +15515,7 @@
           <a:ln>
             <a:noFill/>
           </a:ln>
-          <a:effectLst/>
-        </p:spPr>
-        <p:style>
-          <a:lnRef idx="1">
-            <a:schemeClr val="accent1"/>
-          </a:lnRef>
-          <a:fillRef idx="3">
-            <a:schemeClr val="accent1"/>
-          </a:fillRef>
-          <a:effectRef idx="2">
-            <a:schemeClr val="accent1"/>
-          </a:effectRef>
-          <a:fontRef idx="minor">
-            <a:schemeClr val="lt1"/>
-          </a:fontRef>
-        </p:style>
+        </p:spPr>
         <p:txBody>
           <a:bodyPr rtlCol="0" anchor="ctr" wrap="square" lIns="54864" rIns="54864" tIns="27432" bIns="27432"/>
           <a:lstStyle/>
@@ -16318,22 +15727,7 @@
           <a:ln>
             <a:noFill/>
           </a:ln>
-          <a:effectLst/>
-        </p:spPr>
-        <p:style>
-          <a:lnRef idx="1">
-            <a:schemeClr val="accent1"/>
-          </a:lnRef>
-          <a:fillRef idx="3">
-            <a:schemeClr val="accent1"/>
-          </a:fillRef>
-          <a:effectRef idx="2">
-            <a:schemeClr val="accent1"/>
-          </a:effectRef>
-          <a:fontRef idx="minor">
-            <a:schemeClr val="lt1"/>
-          </a:fontRef>
-        </p:style>
+        </p:spPr>
         <p:txBody>
           <a:bodyPr rtlCol="0" anchor="ctr" wrap="square" lIns="54864" rIns="54864" tIns="27432" bIns="27432"/>
           <a:lstStyle/>
@@ -16502,22 +15896,7 @@
           <a:ln>
             <a:noFill/>
           </a:ln>
-          <a:effectLst/>
-        </p:spPr>
-        <p:style>
-          <a:lnRef idx="1">
-            <a:schemeClr val="accent1"/>
-          </a:lnRef>
-          <a:fillRef idx="3">
-            <a:schemeClr val="accent1"/>
-          </a:fillRef>
-          <a:effectRef idx="2">
-            <a:schemeClr val="accent1"/>
-          </a:effectRef>
-          <a:fontRef idx="minor">
-            <a:schemeClr val="lt1"/>
-          </a:fontRef>
-        </p:style>
+        </p:spPr>
         <p:txBody>
           <a:bodyPr rtlCol="0" anchor="ctr" wrap="square" lIns="54864" rIns="54864" tIns="27432" bIns="27432"/>
           <a:lstStyle/>
@@ -16628,22 +16007,7 @@
           <a:ln>
             <a:noFill/>
           </a:ln>
-          <a:effectLst/>
-        </p:spPr>
-        <p:style>
-          <a:lnRef idx="1">
-            <a:schemeClr val="accent1"/>
-          </a:lnRef>
-          <a:fillRef idx="3">
-            <a:schemeClr val="accent1"/>
-          </a:fillRef>
-          <a:effectRef idx="2">
-            <a:schemeClr val="accent1"/>
-          </a:effectRef>
-          <a:fontRef idx="minor">
-            <a:schemeClr val="lt1"/>
-          </a:fontRef>
-        </p:style>
+        </p:spPr>
         <p:txBody>
           <a:bodyPr rtlCol="0" anchor="ctr" wrap="square" lIns="54864" rIns="54864" tIns="27432" bIns="27432"/>
           <a:lstStyle/>
@@ -16754,22 +16118,7 @@
           <a:ln>
             <a:noFill/>
           </a:ln>
-          <a:effectLst/>
-        </p:spPr>
-        <p:style>
-          <a:lnRef idx="1">
-            <a:schemeClr val="accent1"/>
-          </a:lnRef>
-          <a:fillRef idx="3">
-            <a:schemeClr val="accent1"/>
-          </a:fillRef>
-          <a:effectRef idx="2">
-            <a:schemeClr val="accent1"/>
-          </a:effectRef>
-          <a:fontRef idx="minor">
-            <a:schemeClr val="lt1"/>
-          </a:fontRef>
-        </p:style>
+        </p:spPr>
         <p:txBody>
           <a:bodyPr rtlCol="0" anchor="ctr" wrap="square" lIns="54864" rIns="54864" tIns="27432" bIns="27432"/>
           <a:lstStyle/>
@@ -16880,22 +16229,7 @@
           <a:ln>
             <a:noFill/>
           </a:ln>
-          <a:effectLst/>
-        </p:spPr>
-        <p:style>
-          <a:lnRef idx="1">
-            <a:schemeClr val="accent1"/>
-          </a:lnRef>
-          <a:fillRef idx="3">
-            <a:schemeClr val="accent1"/>
-          </a:fillRef>
-          <a:effectRef idx="2">
-            <a:schemeClr val="accent1"/>
-          </a:effectRef>
-          <a:fontRef idx="minor">
-            <a:schemeClr val="lt1"/>
-          </a:fontRef>
-        </p:style>
+        </p:spPr>
         <p:txBody>
           <a:bodyPr rtlCol="0" anchor="ctr" wrap="square" lIns="54864" rIns="54864" tIns="27432" bIns="27432"/>
           <a:lstStyle/>
@@ -17006,22 +16340,7 @@
           <a:ln>
             <a:noFill/>
           </a:ln>
-          <a:effectLst/>
-        </p:spPr>
-        <p:style>
-          <a:lnRef idx="1">
-            <a:schemeClr val="accent1"/>
-          </a:lnRef>
-          <a:fillRef idx="3">
-            <a:schemeClr val="accent1"/>
-          </a:fillRef>
-          <a:effectRef idx="2">
-            <a:schemeClr val="accent1"/>
-          </a:effectRef>
-          <a:fontRef idx="minor">
-            <a:schemeClr val="lt1"/>
-          </a:fontRef>
-        </p:style>
+        </p:spPr>
         <p:txBody>
           <a:bodyPr rtlCol="0" anchor="ctr" wrap="square" lIns="54864" rIns="54864" tIns="27432" bIns="27432"/>
           <a:lstStyle/>
@@ -17132,22 +16451,7 @@
           <a:ln>
             <a:noFill/>
           </a:ln>
-          <a:effectLst/>
-        </p:spPr>
-        <p:style>
-          <a:lnRef idx="1">
-            <a:schemeClr val="accent1"/>
-          </a:lnRef>
-          <a:fillRef idx="3">
-            <a:schemeClr val="accent1"/>
-          </a:fillRef>
-          <a:effectRef idx="2">
-            <a:schemeClr val="accent1"/>
-          </a:effectRef>
-          <a:fontRef idx="minor">
-            <a:schemeClr val="lt1"/>
-          </a:fontRef>
-        </p:style>
+        </p:spPr>
         <p:txBody>
           <a:bodyPr rtlCol="0" anchor="ctr" wrap="square" lIns="54864" rIns="54864" tIns="27432" bIns="27432"/>
           <a:lstStyle/>
@@ -17246,22 +16550,7 @@
           <a:ln>
             <a:noFill/>
           </a:ln>
-          <a:effectLst/>
-        </p:spPr>
-        <p:style>
-          <a:lnRef idx="1">
-            <a:schemeClr val="accent1"/>
-          </a:lnRef>
-          <a:fillRef idx="3">
-            <a:schemeClr val="accent1"/>
-          </a:fillRef>
-          <a:effectRef idx="2">
-            <a:schemeClr val="accent1"/>
-          </a:effectRef>
-          <a:fontRef idx="minor">
-            <a:schemeClr val="lt1"/>
-          </a:fontRef>
-        </p:style>
+        </p:spPr>
         <p:txBody>
           <a:bodyPr rtlCol="0" anchor="ctr" wrap="square" lIns="54864" rIns="54864" tIns="27432" bIns="27432"/>
           <a:lstStyle/>
@@ -17360,22 +16649,7 @@
           <a:ln>
             <a:noFill/>
           </a:ln>
-          <a:effectLst/>
-        </p:spPr>
-        <p:style>
-          <a:lnRef idx="1">
-            <a:schemeClr val="accent1"/>
-          </a:lnRef>
-          <a:fillRef idx="3">
-            <a:schemeClr val="accent1"/>
-          </a:fillRef>
-          <a:effectRef idx="2">
-            <a:schemeClr val="accent1"/>
-          </a:effectRef>
-          <a:fontRef idx="minor">
-            <a:schemeClr val="lt1"/>
-          </a:fontRef>
-        </p:style>
+        </p:spPr>
         <p:txBody>
           <a:bodyPr rtlCol="0" anchor="ctr" wrap="square" lIns="54864" rIns="54864" tIns="27432" bIns="27432"/>
           <a:lstStyle/>
@@ -17486,22 +16760,7 @@
           <a:ln>
             <a:noFill/>
           </a:ln>
-          <a:effectLst/>
-        </p:spPr>
-        <p:style>
-          <a:lnRef idx="1">
-            <a:schemeClr val="accent1"/>
-          </a:lnRef>
-          <a:fillRef idx="3">
-            <a:schemeClr val="accent1"/>
-          </a:fillRef>
-          <a:effectRef idx="2">
-            <a:schemeClr val="accent1"/>
-          </a:effectRef>
-          <a:fontRef idx="minor">
-            <a:schemeClr val="lt1"/>
-          </a:fontRef>
-        </p:style>
+        </p:spPr>
         <p:txBody>
           <a:bodyPr rtlCol="0" anchor="ctr" wrap="square" lIns="54864" rIns="54864" tIns="27432" bIns="27432"/>
           <a:lstStyle/>
@@ -17600,22 +16859,7 @@
           <a:ln>
             <a:noFill/>
           </a:ln>
-          <a:effectLst/>
-        </p:spPr>
-        <p:style>
-          <a:lnRef idx="1">
-            <a:schemeClr val="accent1"/>
-          </a:lnRef>
-          <a:fillRef idx="3">
-            <a:schemeClr val="accent1"/>
-          </a:fillRef>
-          <a:effectRef idx="2">
-            <a:schemeClr val="accent1"/>
-          </a:effectRef>
-          <a:fontRef idx="minor">
-            <a:schemeClr val="lt1"/>
-          </a:fontRef>
-        </p:style>
+        </p:spPr>
         <p:txBody>
           <a:bodyPr rtlCol="0" anchor="ctr" wrap="square" lIns="54864" rIns="54864" tIns="27432" bIns="27432"/>
           <a:lstStyle/>
@@ -17688,22 +16932,7 @@
           <a:ln>
             <a:noFill/>
           </a:ln>
-          <a:effectLst/>
-        </p:spPr>
-        <p:style>
-          <a:lnRef idx="1">
-            <a:schemeClr val="accent1"/>
-          </a:lnRef>
-          <a:fillRef idx="3">
-            <a:schemeClr val="accent1"/>
-          </a:fillRef>
-          <a:effectRef idx="2">
-            <a:schemeClr val="accent1"/>
-          </a:effectRef>
-          <a:fontRef idx="minor">
-            <a:schemeClr val="lt1"/>
-          </a:fontRef>
-        </p:style>
+        </p:spPr>
         <p:txBody>
           <a:bodyPr rtlCol="0" anchor="ctr" wrap="square" lIns="54864" rIns="54864" tIns="27432" bIns="27432"/>
           <a:lstStyle/>
@@ -17776,22 +17005,7 @@
           <a:ln>
             <a:noFill/>
           </a:ln>
-          <a:effectLst/>
-        </p:spPr>
-        <p:style>
-          <a:lnRef idx="1">
-            <a:schemeClr val="accent1"/>
-          </a:lnRef>
-          <a:fillRef idx="3">
-            <a:schemeClr val="accent1"/>
-          </a:fillRef>
-          <a:effectRef idx="2">
-            <a:schemeClr val="accent1"/>
-          </a:effectRef>
-          <a:fontRef idx="minor">
-            <a:schemeClr val="lt1"/>
-          </a:fontRef>
-        </p:style>
+        </p:spPr>
         <p:txBody>
           <a:bodyPr rtlCol="0" anchor="ctr" wrap="square" lIns="54864" rIns="54864" tIns="27432" bIns="27432"/>
           <a:lstStyle/>
@@ -17864,22 +17078,7 @@
           <a:ln>
             <a:noFill/>
           </a:ln>
-          <a:effectLst/>
-        </p:spPr>
-        <p:style>
-          <a:lnRef idx="1">
-            <a:schemeClr val="accent1"/>
-          </a:lnRef>
-          <a:fillRef idx="3">
-            <a:schemeClr val="accent1"/>
-          </a:fillRef>
-          <a:effectRef idx="2">
-            <a:schemeClr val="accent1"/>
-          </a:effectRef>
-          <a:fontRef idx="minor">
-            <a:schemeClr val="lt1"/>
-          </a:fontRef>
-        </p:style>
+        </p:spPr>
         <p:txBody>
           <a:bodyPr rtlCol="0" anchor="ctr" wrap="square" lIns="54864" rIns="54864" tIns="27432" bIns="27432"/>
           <a:lstStyle/>
@@ -17952,22 +17151,7 @@
           <a:ln>
             <a:noFill/>
           </a:ln>
-          <a:effectLst/>
-        </p:spPr>
-        <p:style>
-          <a:lnRef idx="1">
-            <a:schemeClr val="accent1"/>
-          </a:lnRef>
-          <a:fillRef idx="3">
-            <a:schemeClr val="accent1"/>
-          </a:fillRef>
-          <a:effectRef idx="2">
-            <a:schemeClr val="accent1"/>
-          </a:effectRef>
-          <a:fontRef idx="minor">
-            <a:schemeClr val="lt1"/>
-          </a:fontRef>
-        </p:style>
+        </p:spPr>
         <p:txBody>
           <a:bodyPr rtlCol="0" anchor="ctr" wrap="square" lIns="54864" rIns="54864" tIns="27432" bIns="27432"/>
           <a:lstStyle/>
@@ -18040,22 +17224,7 @@
           <a:ln>
             <a:noFill/>
           </a:ln>
-          <a:effectLst/>
-        </p:spPr>
-        <p:style>
-          <a:lnRef idx="1">
-            <a:schemeClr val="accent1"/>
-          </a:lnRef>
-          <a:fillRef idx="3">
-            <a:schemeClr val="accent1"/>
-          </a:fillRef>
-          <a:effectRef idx="2">
-            <a:schemeClr val="accent1"/>
-          </a:effectRef>
-          <a:fontRef idx="minor">
-            <a:schemeClr val="lt1"/>
-          </a:fontRef>
-        </p:style>
+        </p:spPr>
         <p:txBody>
           <a:bodyPr rtlCol="0" anchor="ctr" wrap="square" lIns="54864" rIns="54864" tIns="27432" bIns="27432"/>
           <a:lstStyle/>
@@ -18128,22 +17297,7 @@
           <a:ln>
             <a:noFill/>
           </a:ln>
-          <a:effectLst/>
-        </p:spPr>
-        <p:style>
-          <a:lnRef idx="1">
-            <a:schemeClr val="accent1"/>
-          </a:lnRef>
-          <a:fillRef idx="3">
-            <a:schemeClr val="accent1"/>
-          </a:fillRef>
-          <a:effectRef idx="2">
-            <a:schemeClr val="accent1"/>
-          </a:effectRef>
-          <a:fontRef idx="minor">
-            <a:schemeClr val="lt1"/>
-          </a:fontRef>
-        </p:style>
+        </p:spPr>
         <p:txBody>
           <a:bodyPr rtlCol="0" anchor="ctr" wrap="square" lIns="54864" rIns="54864" tIns="27432" bIns="27432"/>
           <a:lstStyle/>
@@ -18216,22 +17370,7 @@
           <a:ln>
             <a:noFill/>
           </a:ln>
-          <a:effectLst/>
-        </p:spPr>
-        <p:style>
-          <a:lnRef idx="1">
-            <a:schemeClr val="accent1"/>
-          </a:lnRef>
-          <a:fillRef idx="3">
-            <a:schemeClr val="accent1"/>
-          </a:fillRef>
-          <a:effectRef idx="2">
-            <a:schemeClr val="accent1"/>
-          </a:effectRef>
-          <a:fontRef idx="minor">
-            <a:schemeClr val="lt1"/>
-          </a:fontRef>
-        </p:style>
+        </p:spPr>
         <p:txBody>
           <a:bodyPr rtlCol="0" anchor="ctr" wrap="square" lIns="54864" rIns="54864" tIns="27432" bIns="27432"/>
           <a:lstStyle/>
@@ -18330,22 +17469,7 @@
           <a:ln>
             <a:noFill/>
           </a:ln>
-          <a:effectLst/>
-        </p:spPr>
-        <p:style>
-          <a:lnRef idx="1">
-            <a:schemeClr val="accent1"/>
-          </a:lnRef>
-          <a:fillRef idx="3">
-            <a:schemeClr val="accent1"/>
-          </a:fillRef>
-          <a:effectRef idx="2">
-            <a:schemeClr val="accent1"/>
-          </a:effectRef>
-          <a:fontRef idx="minor">
-            <a:schemeClr val="lt1"/>
-          </a:fontRef>
-        </p:style>
+        </p:spPr>
         <p:txBody>
           <a:bodyPr rtlCol="0" anchor="ctr" wrap="square" lIns="54864" rIns="54864" tIns="27432" bIns="27432"/>
           <a:lstStyle/>
@@ -19413,22 +18537,7 @@
           <a:ln>
             <a:noFill/>
           </a:ln>
-          <a:effectLst/>
-        </p:spPr>
-        <p:style>
-          <a:lnRef idx="1">
-            <a:schemeClr val="accent1"/>
-          </a:lnRef>
-          <a:fillRef idx="3">
-            <a:schemeClr val="accent1"/>
-          </a:fillRef>
-          <a:effectRef idx="2">
-            <a:schemeClr val="accent1"/>
-          </a:effectRef>
-          <a:fontRef idx="minor">
-            <a:schemeClr val="lt1"/>
-          </a:fontRef>
-        </p:style>
+        </p:spPr>
         <p:txBody>
           <a:bodyPr rtlCol="0" anchor="ctr" wrap="square" lIns="54864" rIns="54864" tIns="27432" bIns="27432"/>
           <a:lstStyle/>
@@ -19599,22 +18708,7 @@
               <a:srgbClr val="2A78D6"/>
             </a:solidFill>
           </a:ln>
-          <a:effectLst/>
-        </p:spPr>
-        <p:style>
-          <a:lnRef idx="1">
-            <a:schemeClr val="accent1"/>
-          </a:lnRef>
-          <a:fillRef idx="3">
-            <a:schemeClr val="accent1"/>
-          </a:fillRef>
-          <a:effectRef idx="2">
-            <a:schemeClr val="accent1"/>
-          </a:effectRef>
-          <a:fontRef idx="minor">
-            <a:schemeClr val="lt1"/>
-          </a:fontRef>
-        </p:style>
+        </p:spPr>
         <p:txBody>
           <a:bodyPr rtlCol="0" anchor="ctr" wrap="square" lIns="54864" rIns="54864" tIns="27432" bIns="27432"/>
           <a:lstStyle/>
@@ -19680,22 +18774,7 @@
               <a:srgbClr val="2A78D6"/>
             </a:solidFill>
           </a:ln>
-          <a:effectLst/>
-        </p:spPr>
-        <p:style>
-          <a:lnRef idx="1">
-            <a:schemeClr val="accent1"/>
-          </a:lnRef>
-          <a:fillRef idx="3">
-            <a:schemeClr val="accent1"/>
-          </a:fillRef>
-          <a:effectRef idx="2">
-            <a:schemeClr val="accent1"/>
-          </a:effectRef>
-          <a:fontRef idx="minor">
-            <a:schemeClr val="lt1"/>
-          </a:fontRef>
-        </p:style>
+        </p:spPr>
         <p:txBody>
           <a:bodyPr rtlCol="0" anchor="ctr" wrap="square" lIns="54864" rIns="54864" tIns="27432" bIns="27432"/>
           <a:lstStyle/>
@@ -19735,22 +18814,7 @@
               <a:srgbClr val="2A78D6"/>
             </a:solidFill>
           </a:ln>
-          <a:effectLst/>
-        </p:spPr>
-        <p:style>
-          <a:lnRef idx="1">
-            <a:schemeClr val="accent1"/>
-          </a:lnRef>
-          <a:fillRef idx="3">
-            <a:schemeClr val="accent1"/>
-          </a:fillRef>
-          <a:effectRef idx="2">
-            <a:schemeClr val="accent1"/>
-          </a:effectRef>
-          <a:fontRef idx="minor">
-            <a:schemeClr val="lt1"/>
-          </a:fontRef>
-        </p:style>
+        </p:spPr>
         <p:txBody>
           <a:bodyPr rtlCol="0" anchor="ctr" wrap="square" lIns="54864" rIns="54864" tIns="27432" bIns="27432"/>
           <a:lstStyle/>
@@ -19790,22 +18854,7 @@
               <a:srgbClr val="2A78D6"/>
             </a:solidFill>
           </a:ln>
-          <a:effectLst/>
-        </p:spPr>
-        <p:style>
-          <a:lnRef idx="1">
-            <a:schemeClr val="accent1"/>
-          </a:lnRef>
-          <a:fillRef idx="3">
-            <a:schemeClr val="accent1"/>
-          </a:fillRef>
-          <a:effectRef idx="2">
-            <a:schemeClr val="accent1"/>
-          </a:effectRef>
-          <a:fontRef idx="minor">
-            <a:schemeClr val="lt1"/>
-          </a:fontRef>
-        </p:style>
+        </p:spPr>
         <p:txBody>
           <a:bodyPr rtlCol="0" anchor="ctr" wrap="square" lIns="54864" rIns="54864" tIns="27432" bIns="27432"/>
           <a:lstStyle/>
@@ -19845,22 +18894,7 @@
               <a:srgbClr val="2A78D6"/>
             </a:solidFill>
           </a:ln>
-          <a:effectLst/>
-        </p:spPr>
-        <p:style>
-          <a:lnRef idx="1">
-            <a:schemeClr val="accent1"/>
-          </a:lnRef>
-          <a:fillRef idx="3">
-            <a:schemeClr val="accent1"/>
-          </a:fillRef>
-          <a:effectRef idx="2">
-            <a:schemeClr val="accent1"/>
-          </a:effectRef>
-          <a:fontRef idx="minor">
-            <a:schemeClr val="lt1"/>
-          </a:fontRef>
-        </p:style>
+        </p:spPr>
         <p:txBody>
           <a:bodyPr rtlCol="0" anchor="ctr" wrap="square" lIns="54864" rIns="54864" tIns="27432" bIns="27432"/>
           <a:lstStyle/>
@@ -19900,22 +18934,7 @@
               <a:srgbClr val="2A78D6"/>
             </a:solidFill>
           </a:ln>
-          <a:effectLst/>
-        </p:spPr>
-        <p:style>
-          <a:lnRef idx="1">
-            <a:schemeClr val="accent1"/>
-          </a:lnRef>
-          <a:fillRef idx="3">
-            <a:schemeClr val="accent1"/>
-          </a:fillRef>
-          <a:effectRef idx="2">
-            <a:schemeClr val="accent1"/>
-          </a:effectRef>
-          <a:fontRef idx="minor">
-            <a:schemeClr val="lt1"/>
-          </a:fontRef>
-        </p:style>
+        </p:spPr>
         <p:txBody>
           <a:bodyPr rtlCol="0" anchor="ctr" wrap="square" lIns="54864" rIns="54864" tIns="27432" bIns="27432"/>
           <a:lstStyle/>
@@ -19955,22 +18974,7 @@
               <a:srgbClr val="2A78D6"/>
             </a:solidFill>
           </a:ln>
-          <a:effectLst/>
-        </p:spPr>
-        <p:style>
-          <a:lnRef idx="1">
-            <a:schemeClr val="accent1"/>
-          </a:lnRef>
-          <a:fillRef idx="3">
-            <a:schemeClr val="accent1"/>
-          </a:fillRef>
-          <a:effectRef idx="2">
-            <a:schemeClr val="accent1"/>
-          </a:effectRef>
-          <a:fontRef idx="minor">
-            <a:schemeClr val="lt1"/>
-          </a:fontRef>
-        </p:style>
+        </p:spPr>
         <p:txBody>
           <a:bodyPr rtlCol="0" anchor="ctr" wrap="square" lIns="54864" rIns="54864" tIns="27432" bIns="27432"/>
           <a:lstStyle/>
@@ -20010,22 +19014,7 @@
               <a:srgbClr val="2A78D6"/>
             </a:solidFill>
           </a:ln>
-          <a:effectLst/>
-        </p:spPr>
-        <p:style>
-          <a:lnRef idx="1">
-            <a:schemeClr val="accent1"/>
-          </a:lnRef>
-          <a:fillRef idx="3">
-            <a:schemeClr val="accent1"/>
-          </a:fillRef>
-          <a:effectRef idx="2">
-            <a:schemeClr val="accent1"/>
-          </a:effectRef>
-          <a:fontRef idx="minor">
-            <a:schemeClr val="lt1"/>
-          </a:fontRef>
-        </p:style>
+        </p:spPr>
         <p:txBody>
           <a:bodyPr rtlCol="0" anchor="ctr" wrap="square" lIns="54864" rIns="54864" tIns="27432" bIns="27432"/>
           <a:lstStyle/>
@@ -20065,22 +19054,7 @@
               <a:srgbClr val="2A78D6"/>
             </a:solidFill>
           </a:ln>
-          <a:effectLst/>
-        </p:spPr>
-        <p:style>
-          <a:lnRef idx="1">
-            <a:schemeClr val="accent1"/>
-          </a:lnRef>
-          <a:fillRef idx="3">
-            <a:schemeClr val="accent1"/>
-          </a:fillRef>
-          <a:effectRef idx="2">
-            <a:schemeClr val="accent1"/>
-          </a:effectRef>
-          <a:fontRef idx="minor">
-            <a:schemeClr val="lt1"/>
-          </a:fontRef>
-        </p:style>
+        </p:spPr>
         <p:txBody>
           <a:bodyPr rtlCol="0" anchor="ctr" wrap="square" lIns="54864" rIns="54864" tIns="27432" bIns="27432"/>
           <a:lstStyle/>
@@ -20120,22 +19094,7 @@
               <a:srgbClr val="0B5E57"/>
             </a:solidFill>
           </a:ln>
-          <a:effectLst/>
-        </p:spPr>
-        <p:style>
-          <a:lnRef idx="1">
-            <a:schemeClr val="accent1"/>
-          </a:lnRef>
-          <a:fillRef idx="3">
-            <a:schemeClr val="accent1"/>
-          </a:fillRef>
-          <a:effectRef idx="2">
-            <a:schemeClr val="accent1"/>
-          </a:effectRef>
-          <a:fontRef idx="minor">
-            <a:schemeClr val="lt1"/>
-          </a:fontRef>
-        </p:style>
+        </p:spPr>
         <p:txBody>
           <a:bodyPr rtlCol="0" anchor="ctr" wrap="square" lIns="54864" rIns="54864" tIns="27432" bIns="27432"/>
           <a:lstStyle/>
@@ -20201,22 +19160,7 @@
               <a:srgbClr val="0B5E57"/>
             </a:solidFill>
           </a:ln>
-          <a:effectLst/>
-        </p:spPr>
-        <p:style>
-          <a:lnRef idx="1">
-            <a:schemeClr val="accent1"/>
-          </a:lnRef>
-          <a:fillRef idx="3">
-            <a:schemeClr val="accent1"/>
-          </a:fillRef>
-          <a:effectRef idx="2">
-            <a:schemeClr val="accent1"/>
-          </a:effectRef>
-          <a:fontRef idx="minor">
-            <a:schemeClr val="lt1"/>
-          </a:fontRef>
-        </p:style>
+        </p:spPr>
         <p:txBody>
           <a:bodyPr rtlCol="0" anchor="ctr" wrap="square" lIns="54864" rIns="54864" tIns="27432" bIns="27432"/>
           <a:lstStyle/>
@@ -20256,22 +19200,7 @@
               <a:srgbClr val="0B5E57"/>
             </a:solidFill>
           </a:ln>
-          <a:effectLst/>
-        </p:spPr>
-        <p:style>
-          <a:lnRef idx="1">
-            <a:schemeClr val="accent1"/>
-          </a:lnRef>
-          <a:fillRef idx="3">
-            <a:schemeClr val="accent1"/>
-          </a:fillRef>
-          <a:effectRef idx="2">
-            <a:schemeClr val="accent1"/>
-          </a:effectRef>
-          <a:fontRef idx="minor">
-            <a:schemeClr val="lt1"/>
-          </a:fontRef>
-        </p:style>
+        </p:spPr>
         <p:txBody>
           <a:bodyPr rtlCol="0" anchor="ctr" wrap="square" lIns="54864" rIns="54864" tIns="27432" bIns="27432"/>
           <a:lstStyle/>
@@ -20311,22 +19240,7 @@
               <a:srgbClr val="0B5E57"/>
             </a:solidFill>
           </a:ln>
-          <a:effectLst/>
-        </p:spPr>
-        <p:style>
-          <a:lnRef idx="1">
-            <a:schemeClr val="accent1"/>
-          </a:lnRef>
-          <a:fillRef idx="3">
-            <a:schemeClr val="accent1"/>
-          </a:fillRef>
-          <a:effectRef idx="2">
-            <a:schemeClr val="accent1"/>
-          </a:effectRef>
-          <a:fontRef idx="minor">
-            <a:schemeClr val="lt1"/>
-          </a:fontRef>
-        </p:style>
+        </p:spPr>
         <p:txBody>
           <a:bodyPr rtlCol="0" anchor="ctr" wrap="square" lIns="54864" rIns="54864" tIns="27432" bIns="27432"/>
           <a:lstStyle/>
@@ -20366,22 +19280,7 @@
               <a:srgbClr val="0B5E57"/>
             </a:solidFill>
           </a:ln>
-          <a:effectLst/>
-        </p:spPr>
-        <p:style>
-          <a:lnRef idx="1">
-            <a:schemeClr val="accent1"/>
-          </a:lnRef>
-          <a:fillRef idx="3">
-            <a:schemeClr val="accent1"/>
-          </a:fillRef>
-          <a:effectRef idx="2">
-            <a:schemeClr val="accent1"/>
-          </a:effectRef>
-          <a:fontRef idx="minor">
-            <a:schemeClr val="lt1"/>
-          </a:fontRef>
-        </p:style>
+        </p:spPr>
         <p:txBody>
           <a:bodyPr rtlCol="0" anchor="ctr" wrap="square" lIns="54864" rIns="54864" tIns="27432" bIns="27432"/>
           <a:lstStyle/>
@@ -20421,22 +19320,7 @@
               <a:srgbClr val="0B5E57"/>
             </a:solidFill>
           </a:ln>
-          <a:effectLst/>
-        </p:spPr>
-        <p:style>
-          <a:lnRef idx="1">
-            <a:schemeClr val="accent1"/>
-          </a:lnRef>
-          <a:fillRef idx="3">
-            <a:schemeClr val="accent1"/>
-          </a:fillRef>
-          <a:effectRef idx="2">
-            <a:schemeClr val="accent1"/>
-          </a:effectRef>
-          <a:fontRef idx="minor">
-            <a:schemeClr val="lt1"/>
-          </a:fontRef>
-        </p:style>
+        </p:spPr>
         <p:txBody>
           <a:bodyPr rtlCol="0" anchor="ctr" wrap="square" lIns="54864" rIns="54864" tIns="27432" bIns="27432"/>
           <a:lstStyle/>
@@ -20476,22 +19360,7 @@
               <a:srgbClr val="0B5E57"/>
             </a:solidFill>
           </a:ln>
-          <a:effectLst/>
-        </p:spPr>
-        <p:style>
-          <a:lnRef idx="1">
-            <a:schemeClr val="accent1"/>
-          </a:lnRef>
-          <a:fillRef idx="3">
-            <a:schemeClr val="accent1"/>
-          </a:fillRef>
-          <a:effectRef idx="2">
-            <a:schemeClr val="accent1"/>
-          </a:effectRef>
-          <a:fontRef idx="minor">
-            <a:schemeClr val="lt1"/>
-          </a:fontRef>
-        </p:style>
+        </p:spPr>
         <p:txBody>
           <a:bodyPr rtlCol="0" anchor="ctr" wrap="square" lIns="54864" rIns="54864" tIns="27432" bIns="27432"/>
           <a:lstStyle/>
@@ -20531,22 +19400,7 @@
               <a:srgbClr val="0B5E57"/>
             </a:solidFill>
           </a:ln>
-          <a:effectLst/>
-        </p:spPr>
-        <p:style>
-          <a:lnRef idx="1">
-            <a:schemeClr val="accent1"/>
-          </a:lnRef>
-          <a:fillRef idx="3">
-            <a:schemeClr val="accent1"/>
-          </a:fillRef>
-          <a:effectRef idx="2">
-            <a:schemeClr val="accent1"/>
-          </a:effectRef>
-          <a:fontRef idx="minor">
-            <a:schemeClr val="lt1"/>
-          </a:fontRef>
-        </p:style>
+        </p:spPr>
         <p:txBody>
           <a:bodyPr rtlCol="0" anchor="ctr" wrap="square" lIns="54864" rIns="54864" tIns="27432" bIns="27432"/>
           <a:lstStyle/>
@@ -20586,22 +19440,7 @@
               <a:srgbClr val="0B5E57"/>
             </a:solidFill>
           </a:ln>
-          <a:effectLst/>
-        </p:spPr>
-        <p:style>
-          <a:lnRef idx="1">
-            <a:schemeClr val="accent1"/>
-          </a:lnRef>
-          <a:fillRef idx="3">
-            <a:schemeClr val="accent1"/>
-          </a:fillRef>
-          <a:effectRef idx="2">
-            <a:schemeClr val="accent1"/>
-          </a:effectRef>
-          <a:fontRef idx="minor">
-            <a:schemeClr val="lt1"/>
-          </a:fontRef>
-        </p:style>
+        </p:spPr>
         <p:txBody>
           <a:bodyPr rtlCol="0" anchor="ctr" wrap="square" lIns="54864" rIns="54864" tIns="27432" bIns="27432"/>
           <a:lstStyle/>
@@ -20641,22 +19480,7 @@
               <a:srgbClr val="64748B"/>
             </a:solidFill>
           </a:ln>
-          <a:effectLst/>
-        </p:spPr>
-        <p:style>
-          <a:lnRef idx="1">
-            <a:schemeClr val="accent1"/>
-          </a:lnRef>
-          <a:fillRef idx="3">
-            <a:schemeClr val="accent1"/>
-          </a:fillRef>
-          <a:effectRef idx="2">
-            <a:schemeClr val="accent1"/>
-          </a:effectRef>
-          <a:fontRef idx="minor">
-            <a:schemeClr val="lt1"/>
-          </a:fontRef>
-        </p:style>
+        </p:spPr>
         <p:txBody>
           <a:bodyPr rtlCol="0" anchor="ctr" wrap="square" lIns="54864" rIns="54864" tIns="27432" bIns="27432"/>
           <a:lstStyle/>
@@ -20722,22 +19546,7 @@
               <a:srgbClr val="64748B"/>
             </a:solidFill>
           </a:ln>
-          <a:effectLst/>
-        </p:spPr>
-        <p:style>
-          <a:lnRef idx="1">
-            <a:schemeClr val="accent1"/>
-          </a:lnRef>
-          <a:fillRef idx="3">
-            <a:schemeClr val="accent1"/>
-          </a:fillRef>
-          <a:effectRef idx="2">
-            <a:schemeClr val="accent1"/>
-          </a:effectRef>
-          <a:fontRef idx="minor">
-            <a:schemeClr val="lt1"/>
-          </a:fontRef>
-        </p:style>
+        </p:spPr>
         <p:txBody>
           <a:bodyPr rtlCol="0" anchor="ctr" wrap="square" lIns="54864" rIns="54864" tIns="27432" bIns="27432"/>
           <a:lstStyle/>
@@ -20777,22 +19586,7 @@
               <a:srgbClr val="64748B"/>
             </a:solidFill>
           </a:ln>
-          <a:effectLst/>
-        </p:spPr>
-        <p:style>
-          <a:lnRef idx="1">
-            <a:schemeClr val="accent1"/>
-          </a:lnRef>
-          <a:fillRef idx="3">
-            <a:schemeClr val="accent1"/>
-          </a:fillRef>
-          <a:effectRef idx="2">
-            <a:schemeClr val="accent1"/>
-          </a:effectRef>
-          <a:fontRef idx="minor">
-            <a:schemeClr val="lt1"/>
-          </a:fontRef>
-        </p:style>
+        </p:spPr>
         <p:txBody>
           <a:bodyPr rtlCol="0" anchor="ctr" wrap="square" lIns="54864" rIns="54864" tIns="27432" bIns="27432"/>
           <a:lstStyle/>
@@ -20832,22 +19626,7 @@
               <a:srgbClr val="64748B"/>
             </a:solidFill>
           </a:ln>
-          <a:effectLst/>
-        </p:spPr>
-        <p:style>
-          <a:lnRef idx="1">
-            <a:schemeClr val="accent1"/>
-          </a:lnRef>
-          <a:fillRef idx="3">
-            <a:schemeClr val="accent1"/>
-          </a:fillRef>
-          <a:effectRef idx="2">
-            <a:schemeClr val="accent1"/>
-          </a:effectRef>
-          <a:fontRef idx="minor">
-            <a:schemeClr val="lt1"/>
-          </a:fontRef>
-        </p:style>
+        </p:spPr>
         <p:txBody>
           <a:bodyPr rtlCol="0" anchor="ctr" wrap="square" lIns="54864" rIns="54864" tIns="27432" bIns="27432"/>
           <a:lstStyle/>
@@ -20887,22 +19666,7 @@
               <a:srgbClr val="64748B"/>
             </a:solidFill>
           </a:ln>
-          <a:effectLst/>
-        </p:spPr>
-        <p:style>
-          <a:lnRef idx="1">
-            <a:schemeClr val="accent1"/>
-          </a:lnRef>
-          <a:fillRef idx="3">
-            <a:schemeClr val="accent1"/>
-          </a:fillRef>
-          <a:effectRef idx="2">
-            <a:schemeClr val="accent1"/>
-          </a:effectRef>
-          <a:fontRef idx="minor">
-            <a:schemeClr val="lt1"/>
-          </a:fontRef>
-        </p:style>
+        </p:spPr>
         <p:txBody>
           <a:bodyPr rtlCol="0" anchor="ctr" wrap="square" lIns="54864" rIns="54864" tIns="27432" bIns="27432"/>
           <a:lstStyle/>
@@ -20942,22 +19706,7 @@
               <a:srgbClr val="64748B"/>
             </a:solidFill>
           </a:ln>
-          <a:effectLst/>
-        </p:spPr>
-        <p:style>
-          <a:lnRef idx="1">
-            <a:schemeClr val="accent1"/>
-          </a:lnRef>
-          <a:fillRef idx="3">
-            <a:schemeClr val="accent1"/>
-          </a:fillRef>
-          <a:effectRef idx="2">
-            <a:schemeClr val="accent1"/>
-          </a:effectRef>
-          <a:fontRef idx="minor">
-            <a:schemeClr val="lt1"/>
-          </a:fontRef>
-        </p:style>
+        </p:spPr>
         <p:txBody>
           <a:bodyPr rtlCol="0" anchor="ctr" wrap="square" lIns="54864" rIns="54864" tIns="27432" bIns="27432"/>
           <a:lstStyle/>
@@ -20997,22 +19746,7 @@
               <a:srgbClr val="64748B"/>
             </a:solidFill>
           </a:ln>
-          <a:effectLst/>
-        </p:spPr>
-        <p:style>
-          <a:lnRef idx="1">
-            <a:schemeClr val="accent1"/>
-          </a:lnRef>
-          <a:fillRef idx="3">
-            <a:schemeClr val="accent1"/>
-          </a:fillRef>
-          <a:effectRef idx="2">
-            <a:schemeClr val="accent1"/>
-          </a:effectRef>
-          <a:fontRef idx="minor">
-            <a:schemeClr val="lt1"/>
-          </a:fontRef>
-        </p:style>
+        </p:spPr>
         <p:txBody>
           <a:bodyPr rtlCol="0" anchor="ctr" wrap="square" lIns="54864" rIns="54864" tIns="27432" bIns="27432"/>
           <a:lstStyle/>
@@ -21052,22 +19786,7 @@
               <a:srgbClr val="64748B"/>
             </a:solidFill>
           </a:ln>
-          <a:effectLst/>
-        </p:spPr>
-        <p:style>
-          <a:lnRef idx="1">
-            <a:schemeClr val="accent1"/>
-          </a:lnRef>
-          <a:fillRef idx="3">
-            <a:schemeClr val="accent1"/>
-          </a:fillRef>
-          <a:effectRef idx="2">
-            <a:schemeClr val="accent1"/>
-          </a:effectRef>
-          <a:fontRef idx="minor">
-            <a:schemeClr val="lt1"/>
-          </a:fontRef>
-        </p:style>
+        </p:spPr>
         <p:txBody>
           <a:bodyPr rtlCol="0" anchor="ctr" wrap="square" lIns="54864" rIns="54864" tIns="27432" bIns="27432"/>
           <a:lstStyle/>
@@ -21107,22 +19826,7 @@
               <a:srgbClr val="64748B"/>
             </a:solidFill>
           </a:ln>
-          <a:effectLst/>
-        </p:spPr>
-        <p:style>
-          <a:lnRef idx="1">
-            <a:schemeClr val="accent1"/>
-          </a:lnRef>
-          <a:fillRef idx="3">
-            <a:schemeClr val="accent1"/>
-          </a:fillRef>
-          <a:effectRef idx="2">
-            <a:schemeClr val="accent1"/>
-          </a:effectRef>
-          <a:fontRef idx="minor">
-            <a:schemeClr val="lt1"/>
-          </a:fontRef>
-        </p:style>
+        </p:spPr>
         <p:txBody>
           <a:bodyPr rtlCol="0" anchor="ctr" wrap="square" lIns="54864" rIns="54864" tIns="27432" bIns="27432"/>
           <a:lstStyle/>
@@ -21162,22 +19866,7 @@
               <a:srgbClr val="EA6834"/>
             </a:solidFill>
           </a:ln>
-          <a:effectLst/>
-        </p:spPr>
-        <p:style>
-          <a:lnRef idx="1">
-            <a:schemeClr val="accent1"/>
-          </a:lnRef>
-          <a:fillRef idx="3">
-            <a:schemeClr val="accent1"/>
-          </a:fillRef>
-          <a:effectRef idx="2">
-            <a:schemeClr val="accent1"/>
-          </a:effectRef>
-          <a:fontRef idx="minor">
-            <a:schemeClr val="lt1"/>
-          </a:fontRef>
-        </p:style>
+        </p:spPr>
         <p:txBody>
           <a:bodyPr rtlCol="0" anchor="ctr" wrap="square" lIns="54864" rIns="54864" tIns="27432" bIns="27432"/>
           <a:lstStyle/>
@@ -21243,22 +19932,7 @@
               <a:srgbClr val="EA6834"/>
             </a:solidFill>
           </a:ln>
-          <a:effectLst/>
-        </p:spPr>
-        <p:style>
-          <a:lnRef idx="1">
-            <a:schemeClr val="accent1"/>
-          </a:lnRef>
-          <a:fillRef idx="3">
-            <a:schemeClr val="accent1"/>
-          </a:fillRef>
-          <a:effectRef idx="2">
-            <a:schemeClr val="accent1"/>
-          </a:effectRef>
-          <a:fontRef idx="minor">
-            <a:schemeClr val="lt1"/>
-          </a:fontRef>
-        </p:style>
+        </p:spPr>
         <p:txBody>
           <a:bodyPr rtlCol="0" anchor="ctr" wrap="square" lIns="54864" rIns="54864" tIns="27432" bIns="27432"/>
           <a:lstStyle/>
@@ -21298,22 +19972,7 @@
               <a:srgbClr val="EA6834"/>
             </a:solidFill>
           </a:ln>
-          <a:effectLst/>
-        </p:spPr>
-        <p:style>
-          <a:lnRef idx="1">
-            <a:schemeClr val="accent1"/>
-          </a:lnRef>
-          <a:fillRef idx="3">
-            <a:schemeClr val="accent1"/>
-          </a:fillRef>
-          <a:effectRef idx="2">
-            <a:schemeClr val="accent1"/>
-          </a:effectRef>
-          <a:fontRef idx="minor">
-            <a:schemeClr val="lt1"/>
-          </a:fontRef>
-        </p:style>
+        </p:spPr>
         <p:txBody>
           <a:bodyPr rtlCol="0" anchor="ctr" wrap="square" lIns="54864" rIns="54864" tIns="27432" bIns="27432"/>
           <a:lstStyle/>
@@ -21353,22 +20012,7 @@
               <a:srgbClr val="EA6834"/>
             </a:solidFill>
           </a:ln>
-          <a:effectLst/>
-        </p:spPr>
-        <p:style>
-          <a:lnRef idx="1">
-            <a:schemeClr val="accent1"/>
-          </a:lnRef>
-          <a:fillRef idx="3">
-            <a:schemeClr val="accent1"/>
-          </a:fillRef>
-          <a:effectRef idx="2">
-            <a:schemeClr val="accent1"/>
-          </a:effectRef>
-          <a:fontRef idx="minor">
-            <a:schemeClr val="lt1"/>
-          </a:fontRef>
-        </p:style>
+        </p:spPr>
         <p:txBody>
           <a:bodyPr rtlCol="0" anchor="ctr" wrap="square" lIns="54864" rIns="54864" tIns="27432" bIns="27432"/>
           <a:lstStyle/>
@@ -21408,22 +20052,7 @@
               <a:srgbClr val="EA6834"/>
             </a:solidFill>
           </a:ln>
-          <a:effectLst/>
-        </p:spPr>
-        <p:style>
-          <a:lnRef idx="1">
-            <a:schemeClr val="accent1"/>
-          </a:lnRef>
-          <a:fillRef idx="3">
-            <a:schemeClr val="accent1"/>
-          </a:fillRef>
-          <a:effectRef idx="2">
-            <a:schemeClr val="accent1"/>
-          </a:effectRef>
-          <a:fontRef idx="minor">
-            <a:schemeClr val="lt1"/>
-          </a:fontRef>
-        </p:style>
+        </p:spPr>
         <p:txBody>
           <a:bodyPr rtlCol="0" anchor="ctr" wrap="square" lIns="54864" rIns="54864" tIns="27432" bIns="27432"/>
           <a:lstStyle/>
@@ -21522,22 +20151,7 @@
           <a:ln>
             <a:noFill/>
           </a:ln>
-          <a:effectLst/>
-        </p:spPr>
-        <p:style>
-          <a:lnRef idx="1">
-            <a:schemeClr val="accent1"/>
-          </a:lnRef>
-          <a:fillRef idx="3">
-            <a:schemeClr val="accent1"/>
-          </a:fillRef>
-          <a:effectRef idx="2">
-            <a:schemeClr val="accent1"/>
-          </a:effectRef>
-          <a:fontRef idx="minor">
-            <a:schemeClr val="lt1"/>
-          </a:fontRef>
-        </p:style>
+        </p:spPr>
         <p:txBody>
           <a:bodyPr rtlCol="0" anchor="ctr" wrap="square" lIns="54864" rIns="54864" tIns="27432" bIns="27432"/>
           <a:lstStyle/>
@@ -21708,22 +20322,7 @@
               <a:srgbClr val="2A78D6"/>
             </a:solidFill>
           </a:ln>
-          <a:effectLst/>
-        </p:spPr>
-        <p:style>
-          <a:lnRef idx="1">
-            <a:schemeClr val="accent1"/>
-          </a:lnRef>
-          <a:fillRef idx="3">
-            <a:schemeClr val="accent1"/>
-          </a:fillRef>
-          <a:effectRef idx="2">
-            <a:schemeClr val="accent1"/>
-          </a:effectRef>
-          <a:fontRef idx="minor">
-            <a:schemeClr val="lt1"/>
-          </a:fontRef>
-        </p:style>
+        </p:spPr>
         <p:txBody>
           <a:bodyPr rtlCol="0" anchor="ctr" wrap="square" lIns="54864" rIns="54864" tIns="27432" bIns="27432"/>
           <a:lstStyle/>
@@ -21798,43 +20397,28 @@
               <a:srgbClr val="0B5E57"/>
             </a:solidFill>
           </a:ln>
-          <a:effectLst/>
-        </p:spPr>
-        <p:style>
-          <a:lnRef idx="1">
-            <a:schemeClr val="accent1"/>
-          </a:lnRef>
-          <a:fillRef idx="3">
-            <a:schemeClr val="accent1"/>
-          </a:fillRef>
-          <a:effectRef idx="2">
-            <a:schemeClr val="accent1"/>
-          </a:effectRef>
-          <a:fontRef idx="minor">
-            <a:schemeClr val="lt1"/>
-          </a:fontRef>
-        </p:style>
+        </p:spPr>
         <p:txBody>
           <a:bodyPr rtlCol="0" anchor="ctr" wrap="square" lIns="54864" rIns="54864" tIns="27432" bIns="27432"/>
           <a:lstStyle/>
           <a:p>
             <a:pPr algn="ctr"/>
             <a:r>
-              <a:rPr sz="1200" b="1" i="0">
+              <a:rPr sz="1000" b="1" i="0">
+                <a:solidFill>
+                  <a:srgbClr val="0D9488"/>
+                </a:solidFill>
+                <a:latin typeface="Calibri"/>
+              </a:rPr>
+              <a:t>2.0</a:t>
+            </a:r>
+          </a:p>
+          <a:p>
+            <a:pPr algn="ctr"/>
+            <a:r>
+              <a:rPr sz="1300" b="1" i="0">
                 <a:solidFill>
                   <a:srgbClr val="0B5E57"/>
-                </a:solidFill>
-                <a:latin typeface="Calibri"/>
-              </a:rPr>
-              <a:t>2.0</a:t>
-            </a:r>
-          </a:p>
-          <a:p>
-            <a:pPr algn="ctr"/>
-            <a:r>
-              <a:rPr sz="1000" b="0" i="0">
-                <a:solidFill>
-                  <a:srgbClr val="64748B"/>
                 </a:solidFill>
                 <a:latin typeface="Calibri"/>
               </a:rPr>
@@ -21898,22 +20482,7 @@
           <a:ln>
             <a:noFill/>
           </a:ln>
-          <a:effectLst/>
-        </p:spPr>
-        <p:style>
-          <a:lnRef idx="1">
-            <a:schemeClr val="accent1"/>
-          </a:lnRef>
-          <a:fillRef idx="3">
-            <a:schemeClr val="accent1"/>
-          </a:fillRef>
-          <a:effectRef idx="2">
-            <a:schemeClr val="accent1"/>
-          </a:effectRef>
-          <a:fontRef idx="minor">
-            <a:schemeClr val="lt1"/>
-          </a:fontRef>
-        </p:style>
+        </p:spPr>
         <p:txBody>
           <a:bodyPr rtlCol="0" anchor="ctr" wrap="square" lIns="54864" rIns="54864" tIns="27432" bIns="27432"/>
           <a:lstStyle/>
@@ -21942,22 +20511,7 @@
           <a:ln>
             <a:noFill/>
           </a:ln>
-          <a:effectLst/>
-        </p:spPr>
-        <p:style>
-          <a:lnRef idx="1">
-            <a:schemeClr val="accent1"/>
-          </a:lnRef>
-          <a:fillRef idx="3">
-            <a:schemeClr val="accent1"/>
-          </a:fillRef>
-          <a:effectRef idx="2">
-            <a:schemeClr val="accent1"/>
-          </a:effectRef>
-          <a:fontRef idx="minor">
-            <a:schemeClr val="lt1"/>
-          </a:fontRef>
-        </p:style>
+        </p:spPr>
         <p:txBody>
           <a:bodyPr rtlCol="0" anchor="ctr" wrap="square" lIns="54864" rIns="54864" tIns="27432" bIns="27432"/>
           <a:lstStyle/>
@@ -22136,20 +20690,6 @@
             <a:tailEnd type="triangle" w="med" len="med"/>
           </a:ln>
         </p:spPr>
-        <p:style>
-          <a:lnRef idx="2">
-            <a:schemeClr val="accent1"/>
-          </a:lnRef>
-          <a:fillRef idx="0">
-            <a:schemeClr val="accent1"/>
-          </a:fillRef>
-          <a:effectRef idx="1">
-            <a:schemeClr val="accent1"/>
-          </a:effectRef>
-          <a:fontRef idx="minor">
-            <a:schemeClr val="tx1"/>
-          </a:fontRef>
-        </p:style>
       </p:cxnSp>
       <p:sp>
         <p:nvSpPr>
@@ -22267,22 +20807,7 @@
           <a:ln>
             <a:noFill/>
           </a:ln>
-          <a:effectLst/>
-        </p:spPr>
-        <p:style>
-          <a:lnRef idx="1">
-            <a:schemeClr val="accent1"/>
-          </a:lnRef>
-          <a:fillRef idx="3">
-            <a:schemeClr val="accent1"/>
-          </a:fillRef>
-          <a:effectRef idx="2">
-            <a:schemeClr val="accent1"/>
-          </a:effectRef>
-          <a:fontRef idx="minor">
-            <a:schemeClr val="lt1"/>
-          </a:fontRef>
-        </p:style>
+        </p:spPr>
         <p:txBody>
           <a:bodyPr rtlCol="0" anchor="ctr" wrap="square" lIns="54864" rIns="54864" tIns="27432" bIns="27432"/>
           <a:lstStyle/>
@@ -22433,49 +20958,60 @@
       </p:sp>
       <p:sp>
         <p:nvSpPr>
-          <p:cNvPr id="7" name="Oval 6"/>
+          <p:cNvPr id="7" name="Rounded Rectangle 6"/>
           <p:cNvSpPr/>
           <p:nvPr/>
         </p:nvSpPr>
         <p:spPr>
           <a:xfrm>
-            <a:off x="4727448" y="2606040"/>
-            <a:ext cx="2743200" cy="1600200"/>
-          </a:xfrm>
-          <a:prstGeom prst="ellipse">
+            <a:off x="4727448" y="1188720"/>
+            <a:ext cx="2743200" cy="4892040"/>
+          </a:xfrm>
+          <a:prstGeom prst="roundRect">
             <a:avLst/>
           </a:prstGeom>
           <a:solidFill>
             <a:srgbClr val="0D9488"/>
           </a:solidFill>
-          <a:ln w="22225">
+          <a:ln w="25400">
             <a:solidFill>
               <a:srgbClr val="0B5E57"/>
             </a:solidFill>
           </a:ln>
-          <a:effectLst/>
-        </p:spPr>
-        <p:style>
-          <a:lnRef idx="1">
-            <a:schemeClr val="accent1"/>
-          </a:lnRef>
-          <a:fillRef idx="3">
-            <a:schemeClr val="accent1"/>
-          </a:fillRef>
-          <a:effectRef idx="2">
-            <a:schemeClr val="accent1"/>
-          </a:effectRef>
-          <a:fontRef idx="minor">
-            <a:schemeClr val="lt1"/>
-          </a:fontRef>
-        </p:style>
+        </p:spPr>
         <p:txBody>
           <a:bodyPr rtlCol="0" anchor="ctr" wrap="square" lIns="54864" rIns="54864" tIns="27432" bIns="27432"/>
           <a:lstStyle/>
           <a:p>
             <a:pPr algn="ctr"/>
-            <a:r>
-              <a:rPr sz="1300" b="1" i="0">
+          </a:p>
+        </p:txBody>
+      </p:sp>
+      <p:sp>
+        <p:nvSpPr>
+          <p:cNvPr id="8" name="TextBox 7"/>
+          <p:cNvSpPr txBox="1"/>
+          <p:nvPr/>
+        </p:nvSpPr>
+        <p:spPr>
+          <a:xfrm>
+            <a:off x="4727448" y="2971800"/>
+            <a:ext cx="2743200" cy="457200"/>
+          </a:xfrm>
+          <a:prstGeom prst="rect">
+            <a:avLst/>
+          </a:prstGeom>
+          <a:noFill/>
+        </p:spPr>
+        <p:txBody>
+          <a:bodyPr wrap="square" lIns="45720" rIns="45720" tIns="18288" bIns="18288" anchor="t">
+            <a:spAutoFit/>
+          </a:bodyPr>
+          <a:lstStyle/>
+          <a:p>
+            <a:pPr algn="ctr"/>
+            <a:r>
+              <a:rPr sz="2200" b="1" i="0">
                 <a:solidFill>
                   <a:srgbClr val="FFFFFF"/>
                 </a:solidFill>
@@ -22484,30 +21020,100 @@
               <a:t>0</a:t>
             </a:r>
           </a:p>
+        </p:txBody>
+      </p:sp>
+      <p:sp>
+        <p:nvSpPr>
+          <p:cNvPr id="9" name="TextBox 8"/>
+          <p:cNvSpPr txBox="1"/>
+          <p:nvPr/>
+        </p:nvSpPr>
+        <p:spPr>
+          <a:xfrm>
+            <a:off x="4727448" y="3383280"/>
+            <a:ext cx="2743200" cy="457200"/>
+          </a:xfrm>
+          <a:prstGeom prst="rect">
+            <a:avLst/>
+          </a:prstGeom>
+          <a:noFill/>
+        </p:spPr>
+        <p:txBody>
+          <a:bodyPr wrap="square" lIns="45720" rIns="45720" tIns="18288" bIns="18288" anchor="t">
+            <a:spAutoFit/>
+          </a:bodyPr>
+          <a:lstStyle/>
           <a:p>
             <a:pPr algn="ctr"/>
             <a:r>
+              <a:rPr sz="2200" b="1" i="0">
+                <a:solidFill>
+                  <a:srgbClr val="FFFFFF"/>
+                </a:solidFill>
+                <a:latin typeface="Calibri"/>
+              </a:rPr>
+              <a:t>Restaurant OS</a:t>
+            </a:r>
+          </a:p>
+        </p:txBody>
+      </p:sp>
+      <p:sp>
+        <p:nvSpPr>
+          <p:cNvPr id="10" name="TextBox 9"/>
+          <p:cNvSpPr txBox="1"/>
+          <p:nvPr/>
+        </p:nvSpPr>
+        <p:spPr>
+          <a:xfrm>
+            <a:off x="4818888" y="3886200"/>
+            <a:ext cx="2560320" cy="822960"/>
+          </a:xfrm>
+          <a:prstGeom prst="rect">
+            <a:avLst/>
+          </a:prstGeom>
+          <a:noFill/>
+        </p:spPr>
+        <p:txBody>
+          <a:bodyPr wrap="square" lIns="45720" rIns="45720" tIns="18288" bIns="18288" anchor="t">
+            <a:spAutoFit/>
+          </a:bodyPr>
+          <a:lstStyle/>
+          <a:p>
+            <a:pPr algn="ctr"/>
+            <a:r>
               <a:rPr sz="1100" b="0" i="0">
                 <a:solidFill>
-                  <a:srgbClr val="64748B"/>
-                </a:solidFill>
-                <a:latin typeface="Calibri"/>
-              </a:rPr>
-              <a:t>Restaurant OS</a:t>
-            </a:r>
-          </a:p>
-        </p:txBody>
-      </p:sp>
-      <p:sp>
-        <p:nvSpPr>
-          <p:cNvPr id="8" name="Rectangle 7"/>
+                  <a:srgbClr val="CCFBF1"/>
+                </a:solidFill>
+                <a:latin typeface="Calibri"/>
+              </a:rPr>
+              <a:t>orders · kitchen · delivery</a:t>
+            </a:r>
+          </a:p>
+          <a:p>
+            <a:pPr algn="ctr"/>
+            <a:r>
+              <a:rPr sz="1100" b="0" i="0">
+                <a:solidFill>
+                  <a:srgbClr val="CCFBF1"/>
+                </a:solidFill>
+                <a:latin typeface="Calibri"/>
+              </a:rPr>
+              <a:t>billing · stock · loyalty · reports</a:t>
+            </a:r>
+          </a:p>
+        </p:txBody>
+      </p:sp>
+      <p:sp>
+        <p:nvSpPr>
+          <p:cNvPr id="11" name="Rectangle 10"/>
           <p:cNvSpPr/>
           <p:nvPr/>
         </p:nvSpPr>
         <p:spPr>
           <a:xfrm>
-            <a:off x="457200" y="1143000"/>
-            <a:ext cx="1920240" cy="685800"/>
+            <a:off x="411480" y="1325880"/>
+            <a:ext cx="1828800" cy="731520"/>
           </a:xfrm>
           <a:prstGeom prst="rect">
             <a:avLst/>
@@ -22520,22 +21126,7 @@
               <a:srgbClr val="2A78D6"/>
             </a:solidFill>
           </a:ln>
-          <a:effectLst/>
-        </p:spPr>
-        <p:style>
-          <a:lnRef idx="1">
-            <a:schemeClr val="accent1"/>
-          </a:lnRef>
-          <a:fillRef idx="3">
-            <a:schemeClr val="accent1"/>
-          </a:fillRef>
-          <a:effectRef idx="2">
-            <a:schemeClr val="accent1"/>
-          </a:effectRef>
-          <a:fontRef idx="minor">
-            <a:schemeClr val="lt1"/>
-          </a:fontRef>
-        </p:style>
+        </p:spPr>
         <p:txBody>
           <a:bodyPr rtlCol="0" anchor="ctr" wrap="square" lIns="54864" rIns="54864" tIns="27432" bIns="27432"/>
           <a:lstStyle/>
@@ -22565,16 +21156,130 @@
           </a:p>
         </p:txBody>
       </p:sp>
-      <p:sp>
-        <p:nvSpPr>
-          <p:cNvPr id="9" name="Rectangle 8"/>
+      <p:cxnSp>
+        <p:nvCxnSpPr>
+          <p:cNvPr id="12" name="Connector 11"/>
+          <p:cNvCxnSpPr/>
+          <p:nvPr/>
+        </p:nvCxnSpPr>
+        <p:spPr>
+          <a:xfrm>
+            <a:off x="2240280" y="1591056"/>
+            <a:ext cx="2487168" cy="0"/>
+          </a:xfrm>
+          <a:prstGeom prst="line">
+            <a:avLst/>
+          </a:prstGeom>
+          <a:ln w="19050">
+            <a:solidFill>
+              <a:srgbClr val="64748B"/>
+            </a:solidFill>
+            <a:tailEnd type="triangle" w="med" len="med"/>
+          </a:ln>
+        </p:spPr>
+      </p:cxnSp>
+      <p:cxnSp>
+        <p:nvCxnSpPr>
+          <p:cNvPr id="13" name="Connector 12"/>
+          <p:cNvCxnSpPr/>
+          <p:nvPr/>
+        </p:nvCxnSpPr>
+        <p:spPr>
+          <a:xfrm flipH="1">
+            <a:off x="2240280" y="1792224"/>
+            <a:ext cx="2487168" cy="0"/>
+          </a:xfrm>
+          <a:prstGeom prst="line">
+            <a:avLst/>
+          </a:prstGeom>
+          <a:ln w="19050">
+            <a:solidFill>
+              <a:srgbClr val="0D9488"/>
+            </a:solidFill>
+            <a:tailEnd type="triangle" w="med" len="med"/>
+          </a:ln>
+        </p:spPr>
+      </p:cxnSp>
+      <p:sp>
+        <p:nvSpPr>
+          <p:cNvPr id="14" name="TextBox 13"/>
+          <p:cNvSpPr txBox="1"/>
+          <p:nvPr/>
+        </p:nvSpPr>
+        <p:spPr>
+          <a:xfrm>
+            <a:off x="2331720" y="1316736"/>
+            <a:ext cx="2304288" cy="237744"/>
+          </a:xfrm>
+          <a:prstGeom prst="rect">
+            <a:avLst/>
+          </a:prstGeom>
+          <a:noFill/>
+        </p:spPr>
+        <p:txBody>
+          <a:bodyPr wrap="square" lIns="45720" rIns="45720" tIns="18288" bIns="18288" anchor="t">
+            <a:spAutoFit/>
+          </a:bodyPr>
+          <a:lstStyle/>
+          <a:p>
+            <a:pPr algn="ctr"/>
+            <a:r>
+              <a:rPr sz="1000" b="0" i="0">
+                <a:solidFill>
+                  <a:srgbClr val="1E293B"/>
+                </a:solidFill>
+                <a:latin typeface="Calibri"/>
+              </a:rPr>
+              <a:t>order, payment, rating</a:t>
+            </a:r>
+          </a:p>
+        </p:txBody>
+      </p:sp>
+      <p:sp>
+        <p:nvSpPr>
+          <p:cNvPr id="15" name="TextBox 14"/>
+          <p:cNvSpPr txBox="1"/>
+          <p:nvPr/>
+        </p:nvSpPr>
+        <p:spPr>
+          <a:xfrm>
+            <a:off x="2331720" y="1819656"/>
+            <a:ext cx="2304288" cy="237744"/>
+          </a:xfrm>
+          <a:prstGeom prst="rect">
+            <a:avLst/>
+          </a:prstGeom>
+          <a:noFill/>
+        </p:spPr>
+        <p:txBody>
+          <a:bodyPr wrap="square" lIns="45720" rIns="45720" tIns="18288" bIns="18288" anchor="t">
+            <a:spAutoFit/>
+          </a:bodyPr>
+          <a:lstStyle/>
+          <a:p>
+            <a:pPr algn="ctr"/>
+            <a:r>
+              <a:rPr sz="1000" b="0" i="0">
+                <a:solidFill>
+                  <a:srgbClr val="0B5E57"/>
+                </a:solidFill>
+                <a:latin typeface="Calibri"/>
+              </a:rPr>
+              <a:t>quote, tracking, receipt</a:t>
+            </a:r>
+          </a:p>
+        </p:txBody>
+      </p:sp>
+      <p:sp>
+        <p:nvSpPr>
+          <p:cNvPr id="16" name="Rectangle 15"/>
           <p:cNvSpPr/>
           <p:nvPr/>
         </p:nvSpPr>
         <p:spPr>
           <a:xfrm>
-            <a:off x="457200" y="3063240"/>
-            <a:ext cx="1920240" cy="685800"/>
+            <a:off x="411480" y="2532888"/>
+            <a:ext cx="1828800" cy="731520"/>
           </a:xfrm>
           <a:prstGeom prst="rect">
             <a:avLst/>
@@ -22587,22 +21292,7 @@
               <a:srgbClr val="2A78D6"/>
             </a:solidFill>
           </a:ln>
-          <a:effectLst/>
-        </p:spPr>
-        <p:style>
-          <a:lnRef idx="1">
-            <a:schemeClr val="accent1"/>
-          </a:lnRef>
-          <a:fillRef idx="3">
-            <a:schemeClr val="accent1"/>
-          </a:fillRef>
-          <a:effectRef idx="2">
-            <a:schemeClr val="accent1"/>
-          </a:effectRef>
-          <a:fontRef idx="minor">
-            <a:schemeClr val="lt1"/>
-          </a:fontRef>
-        </p:style>
+        </p:spPr>
         <p:txBody>
           <a:bodyPr rtlCol="0" anchor="ctr" wrap="square" lIns="54864" rIns="54864" tIns="27432" bIns="27432"/>
           <a:lstStyle/>
@@ -22620,16 +21310,130 @@
           </a:p>
         </p:txBody>
       </p:sp>
-      <p:sp>
-        <p:nvSpPr>
-          <p:cNvPr id="10" name="Rectangle 9"/>
+      <p:cxnSp>
+        <p:nvCxnSpPr>
+          <p:cNvPr id="17" name="Connector 16"/>
+          <p:cNvCxnSpPr/>
+          <p:nvPr/>
+        </p:nvCxnSpPr>
+        <p:spPr>
+          <a:xfrm>
+            <a:off x="2240280" y="2798064"/>
+            <a:ext cx="2487168" cy="0"/>
+          </a:xfrm>
+          <a:prstGeom prst="line">
+            <a:avLst/>
+          </a:prstGeom>
+          <a:ln w="19050">
+            <a:solidFill>
+              <a:srgbClr val="64748B"/>
+            </a:solidFill>
+            <a:tailEnd type="triangle" w="med" len="med"/>
+          </a:ln>
+        </p:spPr>
+      </p:cxnSp>
+      <p:cxnSp>
+        <p:nvCxnSpPr>
+          <p:cNvPr id="18" name="Connector 17"/>
+          <p:cNvCxnSpPr/>
+          <p:nvPr/>
+        </p:nvCxnSpPr>
+        <p:spPr>
+          <a:xfrm flipH="1">
+            <a:off x="2240280" y="2999232"/>
+            <a:ext cx="2487168" cy="0"/>
+          </a:xfrm>
+          <a:prstGeom prst="line">
+            <a:avLst/>
+          </a:prstGeom>
+          <a:ln w="19050">
+            <a:solidFill>
+              <a:srgbClr val="0D9488"/>
+            </a:solidFill>
+            <a:tailEnd type="triangle" w="med" len="med"/>
+          </a:ln>
+        </p:spPr>
+      </p:cxnSp>
+      <p:sp>
+        <p:nvSpPr>
+          <p:cNvPr id="19" name="TextBox 18"/>
+          <p:cNvSpPr txBox="1"/>
+          <p:nvPr/>
+        </p:nvSpPr>
+        <p:spPr>
+          <a:xfrm>
+            <a:off x="2331720" y="2523744"/>
+            <a:ext cx="2304288" cy="237744"/>
+          </a:xfrm>
+          <a:prstGeom prst="rect">
+            <a:avLst/>
+          </a:prstGeom>
+          <a:noFill/>
+        </p:spPr>
+        <p:txBody>
+          <a:bodyPr wrap="square" lIns="45720" rIns="45720" tIns="18288" bIns="18288" anchor="t">
+            <a:spAutoFit/>
+          </a:bodyPr>
+          <a:lstStyle/>
+          <a:p>
+            <a:pPr algn="ctr"/>
+            <a:r>
+              <a:rPr sz="1000" b="0" i="0">
+                <a:solidFill>
+                  <a:srgbClr val="1E293B"/>
+                </a:solidFill>
+                <a:latin typeface="Calibri"/>
+              </a:rPr>
+              <a:t>sale, shift, cash, table rounds</a:t>
+            </a:r>
+          </a:p>
+        </p:txBody>
+      </p:sp>
+      <p:sp>
+        <p:nvSpPr>
+          <p:cNvPr id="20" name="TextBox 19"/>
+          <p:cNvSpPr txBox="1"/>
+          <p:nvPr/>
+        </p:nvSpPr>
+        <p:spPr>
+          <a:xfrm>
+            <a:off x="2331720" y="3026664"/>
+            <a:ext cx="2304288" cy="237744"/>
+          </a:xfrm>
+          <a:prstGeom prst="rect">
+            <a:avLst/>
+          </a:prstGeom>
+          <a:noFill/>
+        </p:spPr>
+        <p:txBody>
+          <a:bodyPr wrap="square" lIns="45720" rIns="45720" tIns="18288" bIns="18288" anchor="t">
+            <a:spAutoFit/>
+          </a:bodyPr>
+          <a:lstStyle/>
+          <a:p>
+            <a:pPr algn="ctr"/>
+            <a:r>
+              <a:rPr sz="1000" b="0" i="0">
+                <a:solidFill>
+                  <a:srgbClr val="0B5E57"/>
+                </a:solidFill>
+                <a:latin typeface="Calibri"/>
+              </a:rPr>
+              <a:t>receipt, bill, Z-report</a:t>
+            </a:r>
+          </a:p>
+        </p:txBody>
+      </p:sp>
+      <p:sp>
+        <p:nvSpPr>
+          <p:cNvPr id="21" name="Rectangle 20"/>
           <p:cNvSpPr/>
           <p:nvPr/>
         </p:nvSpPr>
         <p:spPr>
           <a:xfrm>
-            <a:off x="457200" y="4983480"/>
-            <a:ext cx="1920240" cy="685800"/>
+            <a:off x="411480" y="3739896"/>
+            <a:ext cx="1828800" cy="731520"/>
           </a:xfrm>
           <a:prstGeom prst="rect">
             <a:avLst/>
@@ -22642,22 +21446,7 @@
               <a:srgbClr val="2A78D6"/>
             </a:solidFill>
           </a:ln>
-          <a:effectLst/>
-        </p:spPr>
-        <p:style>
-          <a:lnRef idx="1">
-            <a:schemeClr val="accent1"/>
-          </a:lnRef>
-          <a:fillRef idx="3">
-            <a:schemeClr val="accent1"/>
-          </a:fillRef>
-          <a:effectRef idx="2">
-            <a:schemeClr val="accent1"/>
-          </a:effectRef>
-          <a:fontRef idx="minor">
-            <a:schemeClr val="lt1"/>
-          </a:fontRef>
-        </p:style>
+        </p:spPr>
         <p:txBody>
           <a:bodyPr rtlCol="0" anchor="ctr" wrap="square" lIns="54864" rIns="54864" tIns="27432" bIns="27432"/>
           <a:lstStyle/>
@@ -22675,16 +21464,130 @@
           </a:p>
         </p:txBody>
       </p:sp>
-      <p:sp>
-        <p:nvSpPr>
-          <p:cNvPr id="11" name="Rectangle 10"/>
+      <p:cxnSp>
+        <p:nvCxnSpPr>
+          <p:cNvPr id="22" name="Connector 21"/>
+          <p:cNvCxnSpPr/>
+          <p:nvPr/>
+        </p:nvCxnSpPr>
+        <p:spPr>
+          <a:xfrm>
+            <a:off x="2240280" y="4005072"/>
+            <a:ext cx="2487168" cy="0"/>
+          </a:xfrm>
+          <a:prstGeom prst="line">
+            <a:avLst/>
+          </a:prstGeom>
+          <a:ln w="19050">
+            <a:solidFill>
+              <a:srgbClr val="64748B"/>
+            </a:solidFill>
+            <a:tailEnd type="triangle" w="med" len="med"/>
+          </a:ln>
+        </p:spPr>
+      </p:cxnSp>
+      <p:cxnSp>
+        <p:nvCxnSpPr>
+          <p:cNvPr id="23" name="Connector 22"/>
+          <p:cNvCxnSpPr/>
+          <p:nvPr/>
+        </p:nvCxnSpPr>
+        <p:spPr>
+          <a:xfrm flipH="1">
+            <a:off x="2240280" y="4206240"/>
+            <a:ext cx="2487168" cy="0"/>
+          </a:xfrm>
+          <a:prstGeom prst="line">
+            <a:avLst/>
+          </a:prstGeom>
+          <a:ln w="19050">
+            <a:solidFill>
+              <a:srgbClr val="0D9488"/>
+            </a:solidFill>
+            <a:tailEnd type="triangle" w="med" len="med"/>
+          </a:ln>
+        </p:spPr>
+      </p:cxnSp>
+      <p:sp>
+        <p:nvSpPr>
+          <p:cNvPr id="24" name="TextBox 23"/>
+          <p:cNvSpPr txBox="1"/>
+          <p:nvPr/>
+        </p:nvSpPr>
+        <p:spPr>
+          <a:xfrm>
+            <a:off x="2331720" y="3730752"/>
+            <a:ext cx="2304288" cy="237744"/>
+          </a:xfrm>
+          <a:prstGeom prst="rect">
+            <a:avLst/>
+          </a:prstGeom>
+          <a:noFill/>
+        </p:spPr>
+        <p:txBody>
+          <a:bodyPr wrap="square" lIns="45720" rIns="45720" tIns="18288" bIns="18288" anchor="t">
+            <a:spAutoFit/>
+          </a:bodyPr>
+          <a:lstStyle/>
+          <a:p>
+            <a:pPr algn="ctr"/>
+            <a:r>
+              <a:rPr sz="1000" b="0" i="0">
+                <a:solidFill>
+                  <a:srgbClr val="1E293B"/>
+                </a:solidFill>
+                <a:latin typeface="Calibri"/>
+              </a:rPr>
+              <a:t>bump, recall, rider pick</a:t>
+            </a:r>
+          </a:p>
+        </p:txBody>
+      </p:sp>
+      <p:sp>
+        <p:nvSpPr>
+          <p:cNvPr id="25" name="TextBox 24"/>
+          <p:cNvSpPr txBox="1"/>
+          <p:nvPr/>
+        </p:nvSpPr>
+        <p:spPr>
+          <a:xfrm>
+            <a:off x="2331720" y="4233672"/>
+            <a:ext cx="2304288" cy="237744"/>
+          </a:xfrm>
+          <a:prstGeom prst="rect">
+            <a:avLst/>
+          </a:prstGeom>
+          <a:noFill/>
+        </p:spPr>
+        <p:txBody>
+          <a:bodyPr wrap="square" lIns="45720" rIns="45720" tIns="18288" bIns="18288" anchor="t">
+            <a:spAutoFit/>
+          </a:bodyPr>
+          <a:lstStyle/>
+          <a:p>
+            <a:pPr algn="ctr"/>
+            <a:r>
+              <a:rPr sz="1000" b="0" i="0">
+                <a:solidFill>
+                  <a:srgbClr val="0B5E57"/>
+                </a:solidFill>
+                <a:latin typeface="Calibri"/>
+              </a:rPr>
+              <a:t>tickets by station</a:t>
+            </a:r>
+          </a:p>
+        </p:txBody>
+      </p:sp>
+      <p:sp>
+        <p:nvSpPr>
+          <p:cNvPr id="26" name="Rectangle 25"/>
           <p:cNvSpPr/>
           <p:nvPr/>
         </p:nvSpPr>
         <p:spPr>
           <a:xfrm>
-            <a:off x="5138928" y="5532120"/>
-            <a:ext cx="1920240" cy="685800"/>
+            <a:off x="411480" y="4946904"/>
+            <a:ext cx="1828800" cy="731520"/>
           </a:xfrm>
           <a:prstGeom prst="rect">
             <a:avLst/>
@@ -22697,22 +21600,7 @@
               <a:srgbClr val="2A78D6"/>
             </a:solidFill>
           </a:ln>
-          <a:effectLst/>
-        </p:spPr>
-        <p:style>
-          <a:lnRef idx="1">
-            <a:schemeClr val="accent1"/>
-          </a:lnRef>
-          <a:fillRef idx="3">
-            <a:schemeClr val="accent1"/>
-          </a:fillRef>
-          <a:effectRef idx="2">
-            <a:schemeClr val="accent1"/>
-          </a:effectRef>
-          <a:fontRef idx="minor">
-            <a:schemeClr val="lt1"/>
-          </a:fontRef>
-        </p:style>
+        </p:spPr>
         <p:txBody>
           <a:bodyPr rtlCol="0" anchor="ctr" wrap="square" lIns="54864" rIns="54864" tIns="27432" bIns="27432"/>
           <a:lstStyle/>
@@ -22730,16 +21618,130 @@
           </a:p>
         </p:txBody>
       </p:sp>
-      <p:sp>
-        <p:nvSpPr>
-          <p:cNvPr id="12" name="Rectangle 11"/>
+      <p:cxnSp>
+        <p:nvCxnSpPr>
+          <p:cNvPr id="27" name="Connector 26"/>
+          <p:cNvCxnSpPr/>
+          <p:nvPr/>
+        </p:nvCxnSpPr>
+        <p:spPr>
+          <a:xfrm>
+            <a:off x="2240280" y="5212080"/>
+            <a:ext cx="2487168" cy="0"/>
+          </a:xfrm>
+          <a:prstGeom prst="line">
+            <a:avLst/>
+          </a:prstGeom>
+          <a:ln w="19050">
+            <a:solidFill>
+              <a:srgbClr val="64748B"/>
+            </a:solidFill>
+            <a:tailEnd type="triangle" w="med" len="med"/>
+          </a:ln>
+        </p:spPr>
+      </p:cxnSp>
+      <p:cxnSp>
+        <p:nvCxnSpPr>
+          <p:cNvPr id="28" name="Connector 27"/>
+          <p:cNvCxnSpPr/>
+          <p:nvPr/>
+        </p:nvCxnSpPr>
+        <p:spPr>
+          <a:xfrm flipH="1">
+            <a:off x="2240280" y="5413248"/>
+            <a:ext cx="2487168" cy="0"/>
+          </a:xfrm>
+          <a:prstGeom prst="line">
+            <a:avLst/>
+          </a:prstGeom>
+          <a:ln w="19050">
+            <a:solidFill>
+              <a:srgbClr val="0D9488"/>
+            </a:solidFill>
+            <a:tailEnd type="triangle" w="med" len="med"/>
+          </a:ln>
+        </p:spPr>
+      </p:cxnSp>
+      <p:sp>
+        <p:nvSpPr>
+          <p:cNvPr id="29" name="TextBox 28"/>
+          <p:cNvSpPr txBox="1"/>
+          <p:nvPr/>
+        </p:nvSpPr>
+        <p:spPr>
+          <a:xfrm>
+            <a:off x="2331720" y="4937760"/>
+            <a:ext cx="2304288" cy="237744"/>
+          </a:xfrm>
+          <a:prstGeom prst="rect">
+            <a:avLst/>
+          </a:prstGeom>
+          <a:noFill/>
+        </p:spPr>
+        <p:txBody>
+          <a:bodyPr wrap="square" lIns="45720" rIns="45720" tIns="18288" bIns="18288" anchor="t">
+            <a:spAutoFit/>
+          </a:bodyPr>
+          <a:lstStyle/>
+          <a:p>
+            <a:pPr algn="ctr"/>
+            <a:r>
+              <a:rPr sz="1000" b="0" i="0">
+                <a:solidFill>
+                  <a:srgbClr val="1E293B"/>
+                </a:solidFill>
+                <a:latin typeface="Calibri"/>
+              </a:rPr>
+              <a:t>duty, GPS, delivered + cash</a:t>
+            </a:r>
+          </a:p>
+        </p:txBody>
+      </p:sp>
+      <p:sp>
+        <p:nvSpPr>
+          <p:cNvPr id="30" name="TextBox 29"/>
+          <p:cNvSpPr txBox="1"/>
+          <p:nvPr/>
+        </p:nvSpPr>
+        <p:spPr>
+          <a:xfrm>
+            <a:off x="2331720" y="5440680"/>
+            <a:ext cx="2304288" cy="237744"/>
+          </a:xfrm>
+          <a:prstGeom prst="rect">
+            <a:avLst/>
+          </a:prstGeom>
+          <a:noFill/>
+        </p:spPr>
+        <p:txBody>
+          <a:bodyPr wrap="square" lIns="45720" rIns="45720" tIns="18288" bIns="18288" anchor="t">
+            <a:spAutoFit/>
+          </a:bodyPr>
+          <a:lstStyle/>
+          <a:p>
+            <a:pPr algn="ctr"/>
+            <a:r>
+              <a:rPr sz="1000" b="0" i="0">
+                <a:solidFill>
+                  <a:srgbClr val="0B5E57"/>
+                </a:solidFill>
+                <a:latin typeface="Calibri"/>
+              </a:rPr>
+              <a:t>delivery offer, route</a:t>
+            </a:r>
+          </a:p>
+        </p:txBody>
+      </p:sp>
+      <p:sp>
+        <p:nvSpPr>
+          <p:cNvPr id="31" name="Rectangle 30"/>
           <p:cNvSpPr/>
           <p:nvPr/>
         </p:nvSpPr>
         <p:spPr>
           <a:xfrm>
-            <a:off x="5138928" y="914400"/>
-            <a:ext cx="1920240" cy="685800"/>
+            <a:off x="9948672" y="1234440"/>
+            <a:ext cx="1828800" cy="658368"/>
           </a:xfrm>
           <a:prstGeom prst="rect">
             <a:avLst/>
@@ -22752,22 +21754,7 @@
               <a:srgbClr val="2A78D6"/>
             </a:solidFill>
           </a:ln>
-          <a:effectLst/>
-        </p:spPr>
-        <p:style>
-          <a:lnRef idx="1">
-            <a:schemeClr val="accent1"/>
-          </a:lnRef>
-          <a:fillRef idx="3">
-            <a:schemeClr val="accent1"/>
-          </a:fillRef>
-          <a:effectRef idx="2">
-            <a:schemeClr val="accent1"/>
-          </a:effectRef>
-          <a:fontRef idx="minor">
-            <a:schemeClr val="lt1"/>
-          </a:fontRef>
-        </p:style>
+        </p:spPr>
         <p:txBody>
           <a:bodyPr rtlCol="0" anchor="ctr" wrap="square" lIns="54864" rIns="54864" tIns="27432" bIns="27432"/>
           <a:lstStyle/>
@@ -22785,16 +21772,130 @@
           </a:p>
         </p:txBody>
       </p:sp>
-      <p:sp>
-        <p:nvSpPr>
-          <p:cNvPr id="13" name="Rectangle 12"/>
+      <p:cxnSp>
+        <p:nvCxnSpPr>
+          <p:cNvPr id="32" name="Connector 31"/>
+          <p:cNvCxnSpPr/>
+          <p:nvPr/>
+        </p:nvCxnSpPr>
+        <p:spPr>
+          <a:xfrm flipH="1">
+            <a:off x="7470648" y="1463040"/>
+            <a:ext cx="2478024" cy="0"/>
+          </a:xfrm>
+          <a:prstGeom prst="line">
+            <a:avLst/>
+          </a:prstGeom>
+          <a:ln w="19050">
+            <a:solidFill>
+              <a:srgbClr val="64748B"/>
+            </a:solidFill>
+            <a:tailEnd type="triangle" w="med" len="med"/>
+          </a:ln>
+        </p:spPr>
+      </p:cxnSp>
+      <p:cxnSp>
+        <p:nvCxnSpPr>
+          <p:cNvPr id="33" name="Connector 32"/>
+          <p:cNvCxnSpPr/>
+          <p:nvPr/>
+        </p:nvCxnSpPr>
+        <p:spPr>
+          <a:xfrm>
+            <a:off x="7470648" y="1664208"/>
+            <a:ext cx="2478024" cy="0"/>
+          </a:xfrm>
+          <a:prstGeom prst="line">
+            <a:avLst/>
+          </a:prstGeom>
+          <a:ln w="19050">
+            <a:solidFill>
+              <a:srgbClr val="0D9488"/>
+            </a:solidFill>
+            <a:tailEnd type="triangle" w="med" len="med"/>
+          </a:ln>
+        </p:spPr>
+      </p:cxnSp>
+      <p:sp>
+        <p:nvSpPr>
+          <p:cNvPr id="34" name="TextBox 33"/>
+          <p:cNvSpPr txBox="1"/>
+          <p:nvPr/>
+        </p:nvSpPr>
+        <p:spPr>
+          <a:xfrm>
+            <a:off x="7562088" y="1188720"/>
+            <a:ext cx="2295144" cy="237744"/>
+          </a:xfrm>
+          <a:prstGeom prst="rect">
+            <a:avLst/>
+          </a:prstGeom>
+          <a:noFill/>
+        </p:spPr>
+        <p:txBody>
+          <a:bodyPr wrap="square" lIns="45720" rIns="45720" tIns="18288" bIns="18288" anchor="t">
+            <a:spAutoFit/>
+          </a:bodyPr>
+          <a:lstStyle/>
+          <a:p>
+            <a:pPr algn="ctr"/>
+            <a:r>
+              <a:rPr sz="1000" b="0" i="0">
+                <a:solidFill>
+                  <a:srgbClr val="1E293B"/>
+                </a:solidFill>
+                <a:latin typeface="Calibri"/>
+              </a:rPr>
+              <a:t>settings, approvals</a:t>
+            </a:r>
+          </a:p>
+        </p:txBody>
+      </p:sp>
+      <p:sp>
+        <p:nvSpPr>
+          <p:cNvPr id="35" name="TextBox 34"/>
+          <p:cNvSpPr txBox="1"/>
+          <p:nvPr/>
+        </p:nvSpPr>
+        <p:spPr>
+          <a:xfrm>
+            <a:off x="7562088" y="1691640"/>
+            <a:ext cx="2295144" cy="237744"/>
+          </a:xfrm>
+          <a:prstGeom prst="rect">
+            <a:avLst/>
+          </a:prstGeom>
+          <a:noFill/>
+        </p:spPr>
+        <p:txBody>
+          <a:bodyPr wrap="square" lIns="45720" rIns="45720" tIns="18288" bIns="18288" anchor="t">
+            <a:spAutoFit/>
+          </a:bodyPr>
+          <a:lstStyle/>
+          <a:p>
+            <a:pPr algn="ctr"/>
+            <a:r>
+              <a:rPr sz="1000" b="0" i="0">
+                <a:solidFill>
+                  <a:srgbClr val="0B5E57"/>
+                </a:solidFill>
+                <a:latin typeface="Calibri"/>
+              </a:rPr>
+              <a:t>dashboard, alerts, reports</a:t>
+            </a:r>
+          </a:p>
+        </p:txBody>
+      </p:sp>
+      <p:sp>
+        <p:nvSpPr>
+          <p:cNvPr id="36" name="Rectangle 35"/>
           <p:cNvSpPr/>
           <p:nvPr/>
         </p:nvSpPr>
         <p:spPr>
           <a:xfrm>
-            <a:off x="9811512" y="1143000"/>
-            <a:ext cx="1920240" cy="685800"/>
+            <a:off x="9948672" y="2221992"/>
+            <a:ext cx="1828800" cy="658368"/>
           </a:xfrm>
           <a:prstGeom prst="rect">
             <a:avLst/>
@@ -22807,22 +21908,7 @@
               <a:srgbClr val="2A78D6"/>
             </a:solidFill>
           </a:ln>
-          <a:effectLst/>
-        </p:spPr>
-        <p:style>
-          <a:lnRef idx="1">
-            <a:schemeClr val="accent1"/>
-          </a:lnRef>
-          <a:fillRef idx="3">
-            <a:schemeClr val="accent1"/>
-          </a:fillRef>
-          <a:effectRef idx="2">
-            <a:schemeClr val="accent1"/>
-          </a:effectRef>
-          <a:fontRef idx="minor">
-            <a:schemeClr val="lt1"/>
-          </a:fontRef>
-        </p:style>
+        </p:spPr>
         <p:txBody>
           <a:bodyPr rtlCol="0" anchor="ctr" wrap="square" lIns="54864" rIns="54864" tIns="27432" bIns="27432"/>
           <a:lstStyle/>
@@ -22840,16 +21926,130 @@
           </a:p>
         </p:txBody>
       </p:sp>
-      <p:sp>
-        <p:nvSpPr>
-          <p:cNvPr id="14" name="Rectangle 13"/>
+      <p:cxnSp>
+        <p:nvCxnSpPr>
+          <p:cNvPr id="37" name="Connector 36"/>
+          <p:cNvCxnSpPr/>
+          <p:nvPr/>
+        </p:nvCxnSpPr>
+        <p:spPr>
+          <a:xfrm flipH="1">
+            <a:off x="7470648" y="2450592"/>
+            <a:ext cx="2478024" cy="0"/>
+          </a:xfrm>
+          <a:prstGeom prst="line">
+            <a:avLst/>
+          </a:prstGeom>
+          <a:ln w="19050">
+            <a:solidFill>
+              <a:srgbClr val="64748B"/>
+            </a:solidFill>
+            <a:tailEnd type="triangle" w="med" len="med"/>
+          </a:ln>
+        </p:spPr>
+      </p:cxnSp>
+      <p:cxnSp>
+        <p:nvCxnSpPr>
+          <p:cNvPr id="38" name="Connector 37"/>
+          <p:cNvCxnSpPr/>
+          <p:nvPr/>
+        </p:nvCxnSpPr>
+        <p:spPr>
+          <a:xfrm>
+            <a:off x="7470648" y="2651760"/>
+            <a:ext cx="2478024" cy="0"/>
+          </a:xfrm>
+          <a:prstGeom prst="line">
+            <a:avLst/>
+          </a:prstGeom>
+          <a:ln w="19050">
+            <a:solidFill>
+              <a:srgbClr val="0D9488"/>
+            </a:solidFill>
+            <a:tailEnd type="triangle" w="med" len="med"/>
+          </a:ln>
+        </p:spPr>
+      </p:cxnSp>
+      <p:sp>
+        <p:nvSpPr>
+          <p:cNvPr id="39" name="TextBox 38"/>
+          <p:cNvSpPr txBox="1"/>
+          <p:nvPr/>
+        </p:nvSpPr>
+        <p:spPr>
+          <a:xfrm>
+            <a:off x="7562088" y="2176272"/>
+            <a:ext cx="2295144" cy="237744"/>
+          </a:xfrm>
+          <a:prstGeom prst="rect">
+            <a:avLst/>
+          </a:prstGeom>
+          <a:noFill/>
+        </p:spPr>
+        <p:txBody>
+          <a:bodyPr wrap="square" lIns="45720" rIns="45720" tIns="18288" bIns="18288" anchor="t">
+            <a:spAutoFit/>
+          </a:bodyPr>
+          <a:lstStyle/>
+          <a:p>
+            <a:pPr algn="ctr"/>
+            <a:r>
+              <a:rPr sz="1000" b="0" i="0">
+                <a:solidFill>
+                  <a:srgbClr val="1E293B"/>
+                </a:solidFill>
+                <a:latin typeface="Calibri"/>
+              </a:rPr>
+              <a:t>orders (webhook)</a:t>
+            </a:r>
+          </a:p>
+        </p:txBody>
+      </p:sp>
+      <p:sp>
+        <p:nvSpPr>
+          <p:cNvPr id="40" name="TextBox 39"/>
+          <p:cNvSpPr txBox="1"/>
+          <p:nvPr/>
+        </p:nvSpPr>
+        <p:spPr>
+          <a:xfrm>
+            <a:off x="7562088" y="2679192"/>
+            <a:ext cx="2295144" cy="237744"/>
+          </a:xfrm>
+          <a:prstGeom prst="rect">
+            <a:avLst/>
+          </a:prstGeom>
+          <a:noFill/>
+        </p:spPr>
+        <p:txBody>
+          <a:bodyPr wrap="square" lIns="45720" rIns="45720" tIns="18288" bIns="18288" anchor="t">
+            <a:spAutoFit/>
+          </a:bodyPr>
+          <a:lstStyle/>
+          <a:p>
+            <a:pPr algn="ctr"/>
+            <a:r>
+              <a:rPr sz="1000" b="0" i="0">
+                <a:solidFill>
+                  <a:srgbClr val="0B5E57"/>
+                </a:solidFill>
+                <a:latin typeface="Calibri"/>
+              </a:rPr>
+              <a:t>status, availability</a:t>
+            </a:r>
+          </a:p>
+        </p:txBody>
+      </p:sp>
+      <p:sp>
+        <p:nvSpPr>
+          <p:cNvPr id="41" name="Rectangle 40"/>
           <p:cNvSpPr/>
           <p:nvPr/>
         </p:nvSpPr>
         <p:spPr>
           <a:xfrm>
-            <a:off x="9811512" y="2377440"/>
-            <a:ext cx="1920240" cy="685800"/>
+            <a:off x="9948672" y="3209544"/>
+            <a:ext cx="1828800" cy="658368"/>
           </a:xfrm>
           <a:prstGeom prst="rect">
             <a:avLst/>
@@ -22862,22 +22062,7 @@
               <a:srgbClr val="2A78D6"/>
             </a:solidFill>
           </a:ln>
-          <a:effectLst/>
-        </p:spPr>
-        <p:style>
-          <a:lnRef idx="1">
-            <a:schemeClr val="accent1"/>
-          </a:lnRef>
-          <a:fillRef idx="3">
-            <a:schemeClr val="accent1"/>
-          </a:fillRef>
-          <a:effectRef idx="2">
-            <a:schemeClr val="accent1"/>
-          </a:effectRef>
-          <a:fontRef idx="minor">
-            <a:schemeClr val="lt1"/>
-          </a:fontRef>
-        </p:style>
+        </p:spPr>
         <p:txBody>
           <a:bodyPr rtlCol="0" anchor="ctr" wrap="square" lIns="54864" rIns="54864" tIns="27432" bIns="27432"/>
           <a:lstStyle/>
@@ -22895,16 +22080,130 @@
           </a:p>
         </p:txBody>
       </p:sp>
-      <p:sp>
-        <p:nvSpPr>
-          <p:cNvPr id="15" name="Rectangle 14"/>
+      <p:cxnSp>
+        <p:nvCxnSpPr>
+          <p:cNvPr id="42" name="Connector 41"/>
+          <p:cNvCxnSpPr/>
+          <p:nvPr/>
+        </p:nvCxnSpPr>
+        <p:spPr>
+          <a:xfrm flipH="1">
+            <a:off x="7470648" y="3438144"/>
+            <a:ext cx="2478024" cy="0"/>
+          </a:xfrm>
+          <a:prstGeom prst="line">
+            <a:avLst/>
+          </a:prstGeom>
+          <a:ln w="19050">
+            <a:solidFill>
+              <a:srgbClr val="64748B"/>
+            </a:solidFill>
+            <a:tailEnd type="triangle" w="med" len="med"/>
+          </a:ln>
+        </p:spPr>
+      </p:cxnSp>
+      <p:cxnSp>
+        <p:nvCxnSpPr>
+          <p:cNvPr id="43" name="Connector 42"/>
+          <p:cNvCxnSpPr/>
+          <p:nvPr/>
+        </p:nvCxnSpPr>
+        <p:spPr>
+          <a:xfrm>
+            <a:off x="7470648" y="3639312"/>
+            <a:ext cx="2478024" cy="0"/>
+          </a:xfrm>
+          <a:prstGeom prst="line">
+            <a:avLst/>
+          </a:prstGeom>
+          <a:ln w="19050">
+            <a:solidFill>
+              <a:srgbClr val="0D9488"/>
+            </a:solidFill>
+            <a:tailEnd type="triangle" w="med" len="med"/>
+          </a:ln>
+        </p:spPr>
+      </p:cxnSp>
+      <p:sp>
+        <p:nvSpPr>
+          <p:cNvPr id="44" name="TextBox 43"/>
+          <p:cNvSpPr txBox="1"/>
+          <p:nvPr/>
+        </p:nvSpPr>
+        <p:spPr>
+          <a:xfrm>
+            <a:off x="7562088" y="3163824"/>
+            <a:ext cx="2295144" cy="237744"/>
+          </a:xfrm>
+          <a:prstGeom prst="rect">
+            <a:avLst/>
+          </a:prstGeom>
+          <a:noFill/>
+        </p:spPr>
+        <p:txBody>
+          <a:bodyPr wrap="square" lIns="45720" rIns="45720" tIns="18288" bIns="18288" anchor="t">
+            <a:spAutoFit/>
+          </a:bodyPr>
+          <a:lstStyle/>
+          <a:p>
+            <a:pPr algn="ctr"/>
+            <a:r>
+              <a:rPr sz="1000" b="0" i="0">
+                <a:solidFill>
+                  <a:srgbClr val="1E293B"/>
+                </a:solidFill>
+                <a:latin typeface="Calibri"/>
+              </a:rPr>
+              <a:t>paid / failed</a:t>
+            </a:r>
+          </a:p>
+        </p:txBody>
+      </p:sp>
+      <p:sp>
+        <p:nvSpPr>
+          <p:cNvPr id="45" name="TextBox 44"/>
+          <p:cNvSpPr txBox="1"/>
+          <p:nvPr/>
+        </p:nvSpPr>
+        <p:spPr>
+          <a:xfrm>
+            <a:off x="7562088" y="3666744"/>
+            <a:ext cx="2295144" cy="237744"/>
+          </a:xfrm>
+          <a:prstGeom prst="rect">
+            <a:avLst/>
+          </a:prstGeom>
+          <a:noFill/>
+        </p:spPr>
+        <p:txBody>
+          <a:bodyPr wrap="square" lIns="45720" rIns="45720" tIns="18288" bIns="18288" anchor="t">
+            <a:spAutoFit/>
+          </a:bodyPr>
+          <a:lstStyle/>
+          <a:p>
+            <a:pPr algn="ctr"/>
+            <a:r>
+              <a:rPr sz="1000" b="0" i="0">
+                <a:solidFill>
+                  <a:srgbClr val="0B5E57"/>
+                </a:solidFill>
+                <a:latin typeface="Calibri"/>
+              </a:rPr>
+              <a:t>payment session</a:t>
+            </a:r>
+          </a:p>
+        </p:txBody>
+      </p:sp>
+      <p:sp>
+        <p:nvSpPr>
+          <p:cNvPr id="46" name="Rectangle 45"/>
           <p:cNvSpPr/>
           <p:nvPr/>
         </p:nvSpPr>
         <p:spPr>
           <a:xfrm>
-            <a:off x="9811512" y="3611880"/>
-            <a:ext cx="1920240" cy="685800"/>
+            <a:off x="9948672" y="4197096"/>
+            <a:ext cx="1828800" cy="658368"/>
           </a:xfrm>
           <a:prstGeom prst="rect">
             <a:avLst/>
@@ -22917,22 +22216,7 @@
               <a:srgbClr val="2A78D6"/>
             </a:solidFill>
           </a:ln>
-          <a:effectLst/>
-        </p:spPr>
-        <p:style>
-          <a:lnRef idx="1">
-            <a:schemeClr val="accent1"/>
-          </a:lnRef>
-          <a:fillRef idx="3">
-            <a:schemeClr val="accent1"/>
-          </a:fillRef>
-          <a:effectRef idx="2">
-            <a:schemeClr val="accent1"/>
-          </a:effectRef>
-          <a:fontRef idx="minor">
-            <a:schemeClr val="lt1"/>
-          </a:fontRef>
-        </p:style>
+        </p:spPr>
         <p:txBody>
           <a:bodyPr rtlCol="0" anchor="ctr" wrap="square" lIns="54864" rIns="54864" tIns="27432" bIns="27432"/>
           <a:lstStyle/>
@@ -22950,16 +22234,130 @@
           </a:p>
         </p:txBody>
       </p:sp>
-      <p:sp>
-        <p:nvSpPr>
-          <p:cNvPr id="16" name="Rectangle 15"/>
+      <p:cxnSp>
+        <p:nvCxnSpPr>
+          <p:cNvPr id="47" name="Connector 46"/>
+          <p:cNvCxnSpPr/>
+          <p:nvPr/>
+        </p:nvCxnSpPr>
+        <p:spPr>
+          <a:xfrm flipH="1">
+            <a:off x="7470648" y="4425696"/>
+            <a:ext cx="2478024" cy="0"/>
+          </a:xfrm>
+          <a:prstGeom prst="line">
+            <a:avLst/>
+          </a:prstGeom>
+          <a:ln w="19050">
+            <a:solidFill>
+              <a:srgbClr val="64748B"/>
+            </a:solidFill>
+            <a:tailEnd type="triangle" w="med" len="med"/>
+          </a:ln>
+        </p:spPr>
+      </p:cxnSp>
+      <p:cxnSp>
+        <p:nvCxnSpPr>
+          <p:cNvPr id="48" name="Connector 47"/>
+          <p:cNvCxnSpPr/>
+          <p:nvPr/>
+        </p:nvCxnSpPr>
+        <p:spPr>
+          <a:xfrm>
+            <a:off x="7470648" y="4626864"/>
+            <a:ext cx="2478024" cy="0"/>
+          </a:xfrm>
+          <a:prstGeom prst="line">
+            <a:avLst/>
+          </a:prstGeom>
+          <a:ln w="19050">
+            <a:solidFill>
+              <a:srgbClr val="0D9488"/>
+            </a:solidFill>
+            <a:tailEnd type="triangle" w="med" len="med"/>
+          </a:ln>
+        </p:spPr>
+      </p:cxnSp>
+      <p:sp>
+        <p:nvSpPr>
+          <p:cNvPr id="49" name="TextBox 48"/>
+          <p:cNvSpPr txBox="1"/>
+          <p:nvPr/>
+        </p:nvSpPr>
+        <p:spPr>
+          <a:xfrm>
+            <a:off x="7562088" y="4151376"/>
+            <a:ext cx="2295144" cy="237744"/>
+          </a:xfrm>
+          <a:prstGeom prst="rect">
+            <a:avLst/>
+          </a:prstGeom>
+          <a:noFill/>
+        </p:spPr>
+        <p:txBody>
+          <a:bodyPr wrap="square" lIns="45720" rIns="45720" tIns="18288" bIns="18288" anchor="t">
+            <a:spAutoFit/>
+          </a:bodyPr>
+          <a:lstStyle/>
+          <a:p>
+            <a:pPr algn="ctr"/>
+            <a:r>
+              <a:rPr sz="1000" b="0" i="0">
+                <a:solidFill>
+                  <a:srgbClr val="1E293B"/>
+                </a:solidFill>
+                <a:latin typeface="Calibri"/>
+              </a:rPr>
+              <a:t>FBR invoice no. + QR</a:t>
+            </a:r>
+          </a:p>
+        </p:txBody>
+      </p:sp>
+      <p:sp>
+        <p:nvSpPr>
+          <p:cNvPr id="50" name="TextBox 49"/>
+          <p:cNvSpPr txBox="1"/>
+          <p:nvPr/>
+        </p:nvSpPr>
+        <p:spPr>
+          <a:xfrm>
+            <a:off x="7562088" y="4654296"/>
+            <a:ext cx="2295144" cy="237744"/>
+          </a:xfrm>
+          <a:prstGeom prst="rect">
+            <a:avLst/>
+          </a:prstGeom>
+          <a:noFill/>
+        </p:spPr>
+        <p:txBody>
+          <a:bodyPr wrap="square" lIns="45720" rIns="45720" tIns="18288" bIns="18288" anchor="t">
+            <a:spAutoFit/>
+          </a:bodyPr>
+          <a:lstStyle/>
+          <a:p>
+            <a:pPr algn="ctr"/>
+            <a:r>
+              <a:rPr sz="1000" b="0" i="0">
+                <a:solidFill>
+                  <a:srgbClr val="0B5E57"/>
+                </a:solidFill>
+                <a:latin typeface="Calibri"/>
+              </a:rPr>
+              <a:t>invoice data</a:t>
+            </a:r>
+          </a:p>
+        </p:txBody>
+      </p:sp>
+      <p:sp>
+        <p:nvSpPr>
+          <p:cNvPr id="51" name="Rectangle 50"/>
           <p:cNvSpPr/>
           <p:nvPr/>
         </p:nvSpPr>
         <p:spPr>
           <a:xfrm>
-            <a:off x="9811512" y="4846320"/>
-            <a:ext cx="1920240" cy="685800"/>
+            <a:off x="9948672" y="5184648"/>
+            <a:ext cx="1828800" cy="658368"/>
           </a:xfrm>
           <a:prstGeom prst="rect">
             <a:avLst/>
@@ -22972,22 +22370,7 @@
               <a:srgbClr val="2A78D6"/>
             </a:solidFill>
           </a:ln>
-          <a:effectLst/>
-        </p:spPr>
-        <p:style>
-          <a:lnRef idx="1">
-            <a:schemeClr val="accent1"/>
-          </a:lnRef>
-          <a:fillRef idx="3">
-            <a:schemeClr val="accent1"/>
-          </a:fillRef>
-          <a:effectRef idx="2">
-            <a:schemeClr val="accent1"/>
-          </a:effectRef>
-          <a:fontRef idx="minor">
-            <a:schemeClr val="lt1"/>
-          </a:fontRef>
-        </p:style>
+        </p:spPr>
         <p:txBody>
           <a:bodyPr rtlCol="0" anchor="ctr" wrap="square" lIns="54864" rIns="54864" tIns="27432" bIns="27432"/>
           <a:lstStyle/>
@@ -23007,130 +22390,63 @@
       </p:sp>
       <p:cxnSp>
         <p:nvCxnSpPr>
-          <p:cNvPr id="17" name="Connector 16"/>
+          <p:cNvPr id="52" name="Connector 51"/>
           <p:cNvCxnSpPr/>
           <p:nvPr/>
         </p:nvCxnSpPr>
         <p:spPr>
-          <a:xfrm>
-            <a:off x="2377440" y="1394460"/>
-            <a:ext cx="2670048" cy="1531620"/>
+          <a:xfrm flipH="1">
+            <a:off x="7470648" y="5413248"/>
+            <a:ext cx="2478024" cy="0"/>
           </a:xfrm>
           <a:prstGeom prst="line">
             <a:avLst/>
           </a:prstGeom>
-          <a:ln w="15875">
+          <a:ln w="19050">
             <a:solidFill>
               <a:srgbClr val="64748B"/>
             </a:solidFill>
             <a:tailEnd type="triangle" w="med" len="med"/>
           </a:ln>
         </p:spPr>
-        <p:style>
-          <a:lnRef idx="2">
-            <a:schemeClr val="accent1"/>
-          </a:lnRef>
-          <a:fillRef idx="0">
-            <a:schemeClr val="accent1"/>
-          </a:fillRef>
-          <a:effectRef idx="1">
-            <a:schemeClr val="accent1"/>
-          </a:effectRef>
-          <a:fontRef idx="minor">
-            <a:schemeClr val="tx1"/>
-          </a:fontRef>
-        </p:style>
       </p:cxnSp>
-      <p:sp>
-        <p:nvSpPr>
-          <p:cNvPr id="18" name="TextBox 17"/>
-          <p:cNvSpPr txBox="1"/>
-          <p:nvPr/>
-        </p:nvSpPr>
-        <p:spPr>
-          <a:xfrm>
-            <a:off x="2514600" y="1417320"/>
-            <a:ext cx="1645920" cy="274320"/>
-          </a:xfrm>
-          <a:prstGeom prst="rect">
-            <a:avLst/>
-          </a:prstGeom>
-          <a:solidFill>
-            <a:srgbClr val="FFFFFF"/>
-          </a:solidFill>
-        </p:spPr>
-        <p:txBody>
-          <a:bodyPr wrap="square" lIns="45720" rIns="45720" tIns="18288" bIns="18288" anchor="t">
-            <a:spAutoFit/>
-          </a:bodyPr>
-          <a:lstStyle/>
-          <a:p>
-            <a:pPr algn="ctr"/>
-            <a:r>
-              <a:rPr sz="900" b="0" i="0">
-                <a:solidFill>
-                  <a:srgbClr val="1E293B"/>
-                </a:solidFill>
-                <a:latin typeface="Calibri"/>
-              </a:rPr>
-              <a:t>order, payment, review</a:t>
-            </a:r>
-          </a:p>
-        </p:txBody>
-      </p:sp>
       <p:cxnSp>
         <p:nvCxnSpPr>
-          <p:cNvPr id="19" name="Connector 18"/>
+          <p:cNvPr id="53" name="Connector 52"/>
           <p:cNvCxnSpPr/>
           <p:nvPr/>
         </p:nvCxnSpPr>
         <p:spPr>
-          <a:xfrm flipH="1" flipV="1">
-            <a:off x="2377440" y="1668780"/>
-            <a:ext cx="2532888" cy="1485900"/>
+          <a:xfrm>
+            <a:off x="7470648" y="5614416"/>
+            <a:ext cx="2478024" cy="0"/>
           </a:xfrm>
           <a:prstGeom prst="line">
             <a:avLst/>
           </a:prstGeom>
-          <a:ln w="15875">
+          <a:ln w="19050">
             <a:solidFill>
               <a:srgbClr val="0D9488"/>
             </a:solidFill>
             <a:tailEnd type="triangle" w="med" len="med"/>
           </a:ln>
         </p:spPr>
-        <p:style>
-          <a:lnRef idx="2">
-            <a:schemeClr val="accent1"/>
-          </a:lnRef>
-          <a:fillRef idx="0">
-            <a:schemeClr val="accent1"/>
-          </a:fillRef>
-          <a:effectRef idx="1">
-            <a:schemeClr val="accent1"/>
-          </a:effectRef>
-          <a:fontRef idx="minor">
-            <a:schemeClr val="tx1"/>
-          </a:fontRef>
-        </p:style>
       </p:cxnSp>
       <p:sp>
         <p:nvSpPr>
-          <p:cNvPr id="20" name="TextBox 19"/>
+          <p:cNvPr id="54" name="TextBox 53"/>
           <p:cNvSpPr txBox="1"/>
           <p:nvPr/>
         </p:nvSpPr>
         <p:spPr>
           <a:xfrm>
-            <a:off x="2514600" y="2148840"/>
-            <a:ext cx="1645920" cy="274320"/>
-          </a:xfrm>
-          <a:prstGeom prst="rect">
-            <a:avLst/>
-          </a:prstGeom>
-          <a:solidFill>
-            <a:srgbClr val="FFFFFF"/>
-          </a:solidFill>
+            <a:off x="7562088" y="5138928"/>
+            <a:ext cx="2295144" cy="237744"/>
+          </a:xfrm>
+          <a:prstGeom prst="rect">
+            <a:avLst/>
+          </a:prstGeom>
+          <a:noFill/>
         </p:spPr>
         <p:txBody>
           <a:bodyPr wrap="square" lIns="45720" rIns="45720" tIns="18288" bIns="18288" anchor="t">
@@ -23140,70 +22456,32 @@
           <a:p>
             <a:pPr algn="ctr"/>
             <a:r>
-              <a:rPr sz="900" b="0" i="0">
-                <a:solidFill>
-                  <a:srgbClr val="1E293B"/>
-                </a:solidFill>
-                <a:latin typeface="Calibri"/>
-              </a:rPr>
-              <a:t>quote, tracking, receipt</a:t>
-            </a:r>
-          </a:p>
-        </p:txBody>
-      </p:sp>
-      <p:cxnSp>
-        <p:nvCxnSpPr>
-          <p:cNvPr id="21" name="Connector 20"/>
-          <p:cNvCxnSpPr/>
-          <p:nvPr/>
-        </p:nvCxnSpPr>
-        <p:spPr>
-          <a:xfrm>
-            <a:off x="2377440" y="3296412"/>
-            <a:ext cx="2350008" cy="0"/>
-          </a:xfrm>
-          <a:prstGeom prst="line">
-            <a:avLst/>
-          </a:prstGeom>
-          <a:ln w="15875">
-            <a:solidFill>
-              <a:srgbClr val="64748B"/>
-            </a:solidFill>
-            <a:tailEnd type="triangle" w="med" len="med"/>
-          </a:ln>
-        </p:spPr>
-        <p:style>
-          <a:lnRef idx="2">
-            <a:schemeClr val="accent1"/>
-          </a:lnRef>
-          <a:fillRef idx="0">
-            <a:schemeClr val="accent1"/>
-          </a:fillRef>
-          <a:effectRef idx="1">
-            <a:schemeClr val="accent1"/>
-          </a:effectRef>
-          <a:fontRef idx="minor">
-            <a:schemeClr val="tx1"/>
-          </a:fontRef>
-        </p:style>
-      </p:cxnSp>
-      <p:sp>
-        <p:nvSpPr>
-          <p:cNvPr id="22" name="TextBox 21"/>
+              <a:rPr sz="1000" b="0" i="0">
+                <a:solidFill>
+                  <a:srgbClr val="1E293B"/>
+                </a:solidFill>
+                <a:latin typeface="Calibri"/>
+              </a:rPr>
+              <a:t>delivery reports</a:t>
+            </a:r>
+          </a:p>
+        </p:txBody>
+      </p:sp>
+      <p:sp>
+        <p:nvSpPr>
+          <p:cNvPr id="55" name="TextBox 54"/>
           <p:cNvSpPr txBox="1"/>
           <p:nvPr/>
         </p:nvSpPr>
         <p:spPr>
           <a:xfrm>
-            <a:off x="2514600" y="2834640"/>
-            <a:ext cx="1645920" cy="274320"/>
-          </a:xfrm>
-          <a:prstGeom prst="rect">
-            <a:avLst/>
-          </a:prstGeom>
-          <a:solidFill>
-            <a:srgbClr val="FFFFFF"/>
-          </a:solidFill>
+            <a:off x="7562088" y="5641848"/>
+            <a:ext cx="2295144" cy="237744"/>
+          </a:xfrm>
+          <a:prstGeom prst="rect">
+            <a:avLst/>
+          </a:prstGeom>
+          <a:noFill/>
         </p:spPr>
         <p:txBody>
           <a:bodyPr wrap="square" lIns="45720" rIns="45720" tIns="18288" bIns="18288" anchor="t">
@@ -23213,70 +22491,32 @@
           <a:p>
             <a:pPr algn="ctr"/>
             <a:r>
-              <a:rPr sz="900" b="0" i="0">
-                <a:solidFill>
-                  <a:srgbClr val="1E293B"/>
-                </a:solidFill>
-                <a:latin typeface="Calibri"/>
-              </a:rPr>
-              <a:t>sale, shift, cash, table rounds</a:t>
-            </a:r>
-          </a:p>
-        </p:txBody>
-      </p:sp>
-      <p:cxnSp>
-        <p:nvCxnSpPr>
-          <p:cNvPr id="23" name="Connector 22"/>
-          <p:cNvCxnSpPr/>
-          <p:nvPr/>
-        </p:nvCxnSpPr>
-        <p:spPr>
-          <a:xfrm flipH="1">
-            <a:off x="2377440" y="3543300"/>
-            <a:ext cx="2350008" cy="0"/>
-          </a:xfrm>
-          <a:prstGeom prst="line">
-            <a:avLst/>
-          </a:prstGeom>
-          <a:ln w="15875">
-            <a:solidFill>
-              <a:srgbClr val="0D9488"/>
-            </a:solidFill>
-            <a:tailEnd type="triangle" w="med" len="med"/>
-          </a:ln>
-        </p:spPr>
-        <p:style>
-          <a:lnRef idx="2">
-            <a:schemeClr val="accent1"/>
-          </a:lnRef>
-          <a:fillRef idx="0">
-            <a:schemeClr val="accent1"/>
-          </a:fillRef>
-          <a:effectRef idx="1">
-            <a:schemeClr val="accent1"/>
-          </a:effectRef>
-          <a:fontRef idx="minor">
-            <a:schemeClr val="tx1"/>
-          </a:fontRef>
-        </p:style>
-      </p:cxnSp>
-      <p:sp>
-        <p:nvSpPr>
-          <p:cNvPr id="24" name="TextBox 23"/>
+              <a:rPr sz="1000" b="0" i="0">
+                <a:solidFill>
+                  <a:srgbClr val="0B5E57"/>
+                </a:solidFill>
+                <a:latin typeface="Calibri"/>
+              </a:rPr>
+              <a:t>review link, campaign</a:t>
+            </a:r>
+          </a:p>
+        </p:txBody>
+      </p:sp>
+      <p:sp>
+        <p:nvSpPr>
+          <p:cNvPr id="56" name="TextBox 55"/>
           <p:cNvSpPr txBox="1"/>
           <p:nvPr/>
         </p:nvSpPr>
         <p:spPr>
           <a:xfrm>
-            <a:off x="2514600" y="3611880"/>
-            <a:ext cx="1645920" cy="274320"/>
-          </a:xfrm>
-          <a:prstGeom prst="rect">
-            <a:avLst/>
-          </a:prstGeom>
-          <a:solidFill>
-            <a:srgbClr val="FFFFFF"/>
-          </a:solidFill>
+            <a:off x="411480" y="6199632"/>
+            <a:ext cx="8229600" cy="256032"/>
+          </a:xfrm>
+          <a:prstGeom prst="rect">
+            <a:avLst/>
+          </a:prstGeom>
+          <a:noFill/>
         </p:spPr>
         <p:txBody>
           <a:bodyPr wrap="square" lIns="45720" rIns="45720" tIns="18288" bIns="18288" anchor="t">
@@ -23284,990 +22524,6 @@
           </a:bodyPr>
           <a:lstStyle/>
           <a:p>
-            <a:pPr algn="ctr"/>
-            <a:r>
-              <a:rPr sz="900" b="0" i="0">
-                <a:solidFill>
-                  <a:srgbClr val="1E293B"/>
-                </a:solidFill>
-                <a:latin typeface="Calibri"/>
-              </a:rPr>
-              <a:t>receipt, Z-report, bill</a:t>
-            </a:r>
-          </a:p>
-        </p:txBody>
-      </p:sp>
-      <p:cxnSp>
-        <p:nvCxnSpPr>
-          <p:cNvPr id="25" name="Connector 24"/>
-          <p:cNvCxnSpPr/>
-          <p:nvPr/>
-        </p:nvCxnSpPr>
-        <p:spPr>
-          <a:xfrm flipV="1">
-            <a:off x="2377440" y="3749040"/>
-            <a:ext cx="2532888" cy="1485900"/>
-          </a:xfrm>
-          <a:prstGeom prst="line">
-            <a:avLst/>
-          </a:prstGeom>
-          <a:ln w="15875">
-            <a:solidFill>
-              <a:srgbClr val="64748B"/>
-            </a:solidFill>
-            <a:tailEnd type="triangle" w="med" len="med"/>
-          </a:ln>
-        </p:spPr>
-        <p:style>
-          <a:lnRef idx="2">
-            <a:schemeClr val="accent1"/>
-          </a:lnRef>
-          <a:fillRef idx="0">
-            <a:schemeClr val="accent1"/>
-          </a:fillRef>
-          <a:effectRef idx="1">
-            <a:schemeClr val="accent1"/>
-          </a:effectRef>
-          <a:fontRef idx="minor">
-            <a:schemeClr val="tx1"/>
-          </a:fontRef>
-        </p:style>
-      </p:cxnSp>
-      <p:sp>
-        <p:nvSpPr>
-          <p:cNvPr id="26" name="TextBox 25"/>
-          <p:cNvSpPr txBox="1"/>
-          <p:nvPr/>
-        </p:nvSpPr>
-        <p:spPr>
-          <a:xfrm>
-            <a:off x="2514600" y="4572000"/>
-            <a:ext cx="1645920" cy="274320"/>
-          </a:xfrm>
-          <a:prstGeom prst="rect">
-            <a:avLst/>
-          </a:prstGeom>
-          <a:solidFill>
-            <a:srgbClr val="FFFFFF"/>
-          </a:solidFill>
-        </p:spPr>
-        <p:txBody>
-          <a:bodyPr wrap="square" lIns="45720" rIns="45720" tIns="18288" bIns="18288" anchor="t">
-            <a:spAutoFit/>
-          </a:bodyPr>
-          <a:lstStyle/>
-          <a:p>
-            <a:pPr algn="ctr"/>
-            <a:r>
-              <a:rPr sz="900" b="0" i="0">
-                <a:solidFill>
-                  <a:srgbClr val="1E293B"/>
-                </a:solidFill>
-                <a:latin typeface="Calibri"/>
-              </a:rPr>
-              <a:t>bump, recall, rider pick</a:t>
-            </a:r>
-          </a:p>
-        </p:txBody>
-      </p:sp>
-      <p:cxnSp>
-        <p:nvCxnSpPr>
-          <p:cNvPr id="27" name="Connector 26"/>
-          <p:cNvCxnSpPr/>
-          <p:nvPr/>
-        </p:nvCxnSpPr>
-        <p:spPr>
-          <a:xfrm flipH="1">
-            <a:off x="2377440" y="3977640"/>
-            <a:ext cx="2715768" cy="1531620"/>
-          </a:xfrm>
-          <a:prstGeom prst="line">
-            <a:avLst/>
-          </a:prstGeom>
-          <a:ln w="15875">
-            <a:solidFill>
-              <a:srgbClr val="0D9488"/>
-            </a:solidFill>
-            <a:tailEnd type="triangle" w="med" len="med"/>
-          </a:ln>
-        </p:spPr>
-        <p:style>
-          <a:lnRef idx="2">
-            <a:schemeClr val="accent1"/>
-          </a:lnRef>
-          <a:fillRef idx="0">
-            <a:schemeClr val="accent1"/>
-          </a:fillRef>
-          <a:effectRef idx="1">
-            <a:schemeClr val="accent1"/>
-          </a:effectRef>
-          <a:fontRef idx="minor">
-            <a:schemeClr val="tx1"/>
-          </a:fontRef>
-        </p:style>
-      </p:cxnSp>
-      <p:sp>
-        <p:nvSpPr>
-          <p:cNvPr id="28" name="TextBox 27"/>
-          <p:cNvSpPr txBox="1"/>
-          <p:nvPr/>
-        </p:nvSpPr>
-        <p:spPr>
-          <a:xfrm>
-            <a:off x="2514600" y="5349240"/>
-            <a:ext cx="1645920" cy="274320"/>
-          </a:xfrm>
-          <a:prstGeom prst="rect">
-            <a:avLst/>
-          </a:prstGeom>
-          <a:solidFill>
-            <a:srgbClr val="FFFFFF"/>
-          </a:solidFill>
-        </p:spPr>
-        <p:txBody>
-          <a:bodyPr wrap="square" lIns="45720" rIns="45720" tIns="18288" bIns="18288" anchor="t">
-            <a:spAutoFit/>
-          </a:bodyPr>
-          <a:lstStyle/>
-          <a:p>
-            <a:pPr algn="ctr"/>
-            <a:r>
-              <a:rPr sz="900" b="0" i="0">
-                <a:solidFill>
-                  <a:srgbClr val="1E293B"/>
-                </a:solidFill>
-                <a:latin typeface="Calibri"/>
-              </a:rPr>
-              <a:t>tickets by station</a:t>
-            </a:r>
-          </a:p>
-        </p:txBody>
-      </p:sp>
-      <p:cxnSp>
-        <p:nvCxnSpPr>
-          <p:cNvPr id="29" name="Connector 28"/>
-          <p:cNvCxnSpPr/>
-          <p:nvPr/>
-        </p:nvCxnSpPr>
-        <p:spPr>
-          <a:xfrm>
-            <a:off x="5779008" y="1600200"/>
-            <a:ext cx="0" cy="1005840"/>
-          </a:xfrm>
-          <a:prstGeom prst="line">
-            <a:avLst/>
-          </a:prstGeom>
-          <a:ln w="15875">
-            <a:solidFill>
-              <a:srgbClr val="64748B"/>
-            </a:solidFill>
-            <a:tailEnd type="triangle" w="med" len="med"/>
-          </a:ln>
-        </p:spPr>
-        <p:style>
-          <a:lnRef idx="2">
-            <a:schemeClr val="accent1"/>
-          </a:lnRef>
-          <a:fillRef idx="0">
-            <a:schemeClr val="accent1"/>
-          </a:fillRef>
-          <a:effectRef idx="1">
-            <a:schemeClr val="accent1"/>
-          </a:effectRef>
-          <a:fontRef idx="minor">
-            <a:schemeClr val="tx1"/>
-          </a:fontRef>
-        </p:style>
-      </p:cxnSp>
-      <p:sp>
-        <p:nvSpPr>
-          <p:cNvPr id="30" name="TextBox 29"/>
-          <p:cNvSpPr txBox="1"/>
-          <p:nvPr/>
-        </p:nvSpPr>
-        <p:spPr>
-          <a:xfrm>
-            <a:off x="2880360" y="1965960"/>
-            <a:ext cx="1645920" cy="274320"/>
-          </a:xfrm>
-          <a:prstGeom prst="rect">
-            <a:avLst/>
-          </a:prstGeom>
-          <a:solidFill>
-            <a:srgbClr val="FFFFFF"/>
-          </a:solidFill>
-        </p:spPr>
-        <p:txBody>
-          <a:bodyPr wrap="square" lIns="45720" rIns="45720" tIns="18288" bIns="18288" anchor="t">
-            <a:spAutoFit/>
-          </a:bodyPr>
-          <a:lstStyle/>
-          <a:p>
-            <a:pPr algn="ctr"/>
-            <a:r>
-              <a:rPr sz="900" b="0" i="0">
-                <a:solidFill>
-                  <a:srgbClr val="1E293B"/>
-                </a:solidFill>
-                <a:latin typeface="Calibri"/>
-              </a:rPr>
-              <a:t>settings, approval</a:t>
-            </a:r>
-          </a:p>
-        </p:txBody>
-      </p:sp>
-      <p:cxnSp>
-        <p:nvCxnSpPr>
-          <p:cNvPr id="31" name="Connector 30"/>
-          <p:cNvCxnSpPr/>
-          <p:nvPr/>
-        </p:nvCxnSpPr>
-        <p:spPr>
-          <a:xfrm flipV="1">
-            <a:off x="6419088" y="1600200"/>
-            <a:ext cx="0" cy="1005840"/>
-          </a:xfrm>
-          <a:prstGeom prst="line">
-            <a:avLst/>
-          </a:prstGeom>
-          <a:ln w="15875">
-            <a:solidFill>
-              <a:srgbClr val="0D9488"/>
-            </a:solidFill>
-            <a:tailEnd type="triangle" w="med" len="med"/>
-          </a:ln>
-        </p:spPr>
-        <p:style>
-          <a:lnRef idx="2">
-            <a:schemeClr val="accent1"/>
-          </a:lnRef>
-          <a:fillRef idx="0">
-            <a:schemeClr val="accent1"/>
-          </a:fillRef>
-          <a:effectRef idx="1">
-            <a:schemeClr val="accent1"/>
-          </a:effectRef>
-          <a:fontRef idx="minor">
-            <a:schemeClr val="tx1"/>
-          </a:fontRef>
-        </p:style>
-      </p:cxnSp>
-      <p:sp>
-        <p:nvSpPr>
-          <p:cNvPr id="32" name="TextBox 31"/>
-          <p:cNvSpPr txBox="1"/>
-          <p:nvPr/>
-        </p:nvSpPr>
-        <p:spPr>
-          <a:xfrm>
-            <a:off x="7086600" y="1965960"/>
-            <a:ext cx="1645920" cy="274320"/>
-          </a:xfrm>
-          <a:prstGeom prst="rect">
-            <a:avLst/>
-          </a:prstGeom>
-          <a:solidFill>
-            <a:srgbClr val="FFFFFF"/>
-          </a:solidFill>
-        </p:spPr>
-        <p:txBody>
-          <a:bodyPr wrap="square" lIns="45720" rIns="45720" tIns="18288" bIns="18288" anchor="t">
-            <a:spAutoFit/>
-          </a:bodyPr>
-          <a:lstStyle/>
-          <a:p>
-            <a:pPr algn="ctr"/>
-            <a:r>
-              <a:rPr sz="900" b="0" i="0">
-                <a:solidFill>
-                  <a:srgbClr val="1E293B"/>
-                </a:solidFill>
-                <a:latin typeface="Calibri"/>
-              </a:rPr>
-              <a:t>dashboard, alerts</a:t>
-            </a:r>
-          </a:p>
-        </p:txBody>
-      </p:sp>
-      <p:cxnSp>
-        <p:nvCxnSpPr>
-          <p:cNvPr id="33" name="Connector 32"/>
-          <p:cNvCxnSpPr/>
-          <p:nvPr/>
-        </p:nvCxnSpPr>
-        <p:spPr>
-          <a:xfrm flipV="1">
-            <a:off x="5779008" y="4206240"/>
-            <a:ext cx="0" cy="1325880"/>
-          </a:xfrm>
-          <a:prstGeom prst="line">
-            <a:avLst/>
-          </a:prstGeom>
-          <a:ln w="15875">
-            <a:solidFill>
-              <a:srgbClr val="64748B"/>
-            </a:solidFill>
-            <a:tailEnd type="triangle" w="med" len="med"/>
-          </a:ln>
-        </p:spPr>
-        <p:style>
-          <a:lnRef idx="2">
-            <a:schemeClr val="accent1"/>
-          </a:lnRef>
-          <a:fillRef idx="0">
-            <a:schemeClr val="accent1"/>
-          </a:fillRef>
-          <a:effectRef idx="1">
-            <a:schemeClr val="accent1"/>
-          </a:effectRef>
-          <a:fontRef idx="minor">
-            <a:schemeClr val="tx1"/>
-          </a:fontRef>
-        </p:style>
-      </p:cxnSp>
-      <p:sp>
-        <p:nvSpPr>
-          <p:cNvPr id="34" name="TextBox 33"/>
-          <p:cNvSpPr txBox="1"/>
-          <p:nvPr/>
-        </p:nvSpPr>
-        <p:spPr>
-          <a:xfrm>
-            <a:off x="2743200" y="4754880"/>
-            <a:ext cx="1645920" cy="274320"/>
-          </a:xfrm>
-          <a:prstGeom prst="rect">
-            <a:avLst/>
-          </a:prstGeom>
-          <a:solidFill>
-            <a:srgbClr val="FFFFFF"/>
-          </a:solidFill>
-        </p:spPr>
-        <p:txBody>
-          <a:bodyPr wrap="square" lIns="45720" rIns="45720" tIns="18288" bIns="18288" anchor="t">
-            <a:spAutoFit/>
-          </a:bodyPr>
-          <a:lstStyle/>
-          <a:p>
-            <a:pPr algn="ctr"/>
-            <a:r>
-              <a:rPr sz="900" b="0" i="0">
-                <a:solidFill>
-                  <a:srgbClr val="1E293B"/>
-                </a:solidFill>
-                <a:latin typeface="Calibri"/>
-              </a:rPr>
-              <a:t>duty, GPS, delivered + cash</a:t>
-            </a:r>
-          </a:p>
-        </p:txBody>
-      </p:sp>
-      <p:cxnSp>
-        <p:nvCxnSpPr>
-          <p:cNvPr id="35" name="Connector 34"/>
-          <p:cNvCxnSpPr/>
-          <p:nvPr/>
-        </p:nvCxnSpPr>
-        <p:spPr>
-          <a:xfrm>
-            <a:off x="6419088" y="4206240"/>
-            <a:ext cx="0" cy="1325880"/>
-          </a:xfrm>
-          <a:prstGeom prst="line">
-            <a:avLst/>
-          </a:prstGeom>
-          <a:ln w="15875">
-            <a:solidFill>
-              <a:srgbClr val="0D9488"/>
-            </a:solidFill>
-            <a:tailEnd type="triangle" w="med" len="med"/>
-          </a:ln>
-        </p:spPr>
-        <p:style>
-          <a:lnRef idx="2">
-            <a:schemeClr val="accent1"/>
-          </a:lnRef>
-          <a:fillRef idx="0">
-            <a:schemeClr val="accent1"/>
-          </a:fillRef>
-          <a:effectRef idx="1">
-            <a:schemeClr val="accent1"/>
-          </a:effectRef>
-          <a:fontRef idx="minor">
-            <a:schemeClr val="tx1"/>
-          </a:fontRef>
-        </p:style>
-      </p:cxnSp>
-      <p:sp>
-        <p:nvSpPr>
-          <p:cNvPr id="36" name="TextBox 35"/>
-          <p:cNvSpPr txBox="1"/>
-          <p:nvPr/>
-        </p:nvSpPr>
-        <p:spPr>
-          <a:xfrm>
-            <a:off x="7086600" y="4754880"/>
-            <a:ext cx="1645920" cy="274320"/>
-          </a:xfrm>
-          <a:prstGeom prst="rect">
-            <a:avLst/>
-          </a:prstGeom>
-          <a:solidFill>
-            <a:srgbClr val="FFFFFF"/>
-          </a:solidFill>
-        </p:spPr>
-        <p:txBody>
-          <a:bodyPr wrap="square" lIns="45720" rIns="45720" tIns="18288" bIns="18288" anchor="t">
-            <a:spAutoFit/>
-          </a:bodyPr>
-          <a:lstStyle/>
-          <a:p>
-            <a:pPr algn="ctr"/>
-            <a:r>
-              <a:rPr sz="900" b="0" i="0">
-                <a:solidFill>
-                  <a:srgbClr val="1E293B"/>
-                </a:solidFill>
-                <a:latin typeface="Calibri"/>
-              </a:rPr>
-              <a:t>delivery offer, route</a:t>
-            </a:r>
-          </a:p>
-        </p:txBody>
-      </p:sp>
-      <p:cxnSp>
-        <p:nvCxnSpPr>
-          <p:cNvPr id="37" name="Connector 36"/>
-          <p:cNvCxnSpPr/>
-          <p:nvPr/>
-        </p:nvCxnSpPr>
-        <p:spPr>
-          <a:xfrm flipH="1">
-            <a:off x="7150608" y="1485900"/>
-            <a:ext cx="2660904" cy="1394460"/>
-          </a:xfrm>
-          <a:prstGeom prst="line">
-            <a:avLst/>
-          </a:prstGeom>
-          <a:ln w="15875">
-            <a:solidFill>
-              <a:srgbClr val="64748B"/>
-            </a:solidFill>
-            <a:tailEnd type="triangle" w="med" len="med"/>
-          </a:ln>
-        </p:spPr>
-        <p:style>
-          <a:lnRef idx="2">
-            <a:schemeClr val="accent1"/>
-          </a:lnRef>
-          <a:fillRef idx="0">
-            <a:schemeClr val="accent1"/>
-          </a:fillRef>
-          <a:effectRef idx="1">
-            <a:schemeClr val="accent1"/>
-          </a:effectRef>
-          <a:fontRef idx="minor">
-            <a:schemeClr val="tx1"/>
-          </a:fontRef>
-        </p:style>
-      </p:cxnSp>
-      <p:sp>
-        <p:nvSpPr>
-          <p:cNvPr id="38" name="TextBox 37"/>
-          <p:cNvSpPr txBox="1"/>
-          <p:nvPr/>
-        </p:nvSpPr>
-        <p:spPr>
-          <a:xfrm>
-            <a:off x="8001000" y="1417320"/>
-            <a:ext cx="1645920" cy="274320"/>
-          </a:xfrm>
-          <a:prstGeom prst="rect">
-            <a:avLst/>
-          </a:prstGeom>
-          <a:solidFill>
-            <a:srgbClr val="FFFFFF"/>
-          </a:solidFill>
-        </p:spPr>
-        <p:txBody>
-          <a:bodyPr wrap="square" lIns="45720" rIns="45720" tIns="18288" bIns="18288" anchor="t">
-            <a:spAutoFit/>
-          </a:bodyPr>
-          <a:lstStyle/>
-          <a:p>
-            <a:pPr algn="ctr"/>
-            <a:r>
-              <a:rPr sz="900" b="0" i="0">
-                <a:solidFill>
-                  <a:srgbClr val="1E293B"/>
-                </a:solidFill>
-                <a:latin typeface="Calibri"/>
-              </a:rPr>
-              <a:t>orders (webhook)</a:t>
-            </a:r>
-          </a:p>
-        </p:txBody>
-      </p:sp>
-      <p:cxnSp>
-        <p:nvCxnSpPr>
-          <p:cNvPr id="39" name="Connector 38"/>
-          <p:cNvCxnSpPr/>
-          <p:nvPr/>
-        </p:nvCxnSpPr>
-        <p:spPr>
-          <a:xfrm flipV="1">
-            <a:off x="7379208" y="1714500"/>
-            <a:ext cx="2432304" cy="1440180"/>
-          </a:xfrm>
-          <a:prstGeom prst="line">
-            <a:avLst/>
-          </a:prstGeom>
-          <a:ln w="15875">
-            <a:solidFill>
-              <a:srgbClr val="0D9488"/>
-            </a:solidFill>
-            <a:tailEnd type="triangle" w="med" len="med"/>
-          </a:ln>
-        </p:spPr>
-        <p:style>
-          <a:lnRef idx="2">
-            <a:schemeClr val="accent1"/>
-          </a:lnRef>
-          <a:fillRef idx="0">
-            <a:schemeClr val="accent1"/>
-          </a:fillRef>
-          <a:effectRef idx="1">
-            <a:schemeClr val="accent1"/>
-          </a:effectRef>
-          <a:fontRef idx="minor">
-            <a:schemeClr val="tx1"/>
-          </a:fontRef>
-        </p:style>
-      </p:cxnSp>
-      <p:sp>
-        <p:nvSpPr>
-          <p:cNvPr id="40" name="TextBox 39"/>
-          <p:cNvSpPr txBox="1"/>
-          <p:nvPr/>
-        </p:nvSpPr>
-        <p:spPr>
-          <a:xfrm>
-            <a:off x="8001000" y="1920240"/>
-            <a:ext cx="1645920" cy="274320"/>
-          </a:xfrm>
-          <a:prstGeom prst="rect">
-            <a:avLst/>
-          </a:prstGeom>
-          <a:solidFill>
-            <a:srgbClr val="FFFFFF"/>
-          </a:solidFill>
-        </p:spPr>
-        <p:txBody>
-          <a:bodyPr wrap="square" lIns="45720" rIns="45720" tIns="18288" bIns="18288" anchor="t">
-            <a:spAutoFit/>
-          </a:bodyPr>
-          <a:lstStyle/>
-          <a:p>
-            <a:pPr algn="ctr"/>
-            <a:r>
-              <a:rPr sz="900" b="0" i="0">
-                <a:solidFill>
-                  <a:srgbClr val="1E293B"/>
-                </a:solidFill>
-                <a:latin typeface="Calibri"/>
-              </a:rPr>
-              <a:t>status, availability</a:t>
-            </a:r>
-          </a:p>
-        </p:txBody>
-      </p:sp>
-      <p:cxnSp>
-        <p:nvCxnSpPr>
-          <p:cNvPr id="41" name="Connector 40"/>
-          <p:cNvCxnSpPr/>
-          <p:nvPr/>
-        </p:nvCxnSpPr>
-        <p:spPr>
-          <a:xfrm flipV="1">
-            <a:off x="7470648" y="2720340"/>
-            <a:ext cx="2340864" cy="365760"/>
-          </a:xfrm>
-          <a:prstGeom prst="line">
-            <a:avLst/>
-          </a:prstGeom>
-          <a:ln w="15875">
-            <a:solidFill>
-              <a:srgbClr val="0D9488"/>
-            </a:solidFill>
-            <a:tailEnd type="triangle" w="med" len="med"/>
-          </a:ln>
-        </p:spPr>
-        <p:style>
-          <a:lnRef idx="2">
-            <a:schemeClr val="accent1"/>
-          </a:lnRef>
-          <a:fillRef idx="0">
-            <a:schemeClr val="accent1"/>
-          </a:fillRef>
-          <a:effectRef idx="1">
-            <a:schemeClr val="accent1"/>
-          </a:effectRef>
-          <a:fontRef idx="minor">
-            <a:schemeClr val="tx1"/>
-          </a:fontRef>
-        </p:style>
-      </p:cxnSp>
-      <p:sp>
-        <p:nvSpPr>
-          <p:cNvPr id="42" name="TextBox 41"/>
-          <p:cNvSpPr txBox="1"/>
-          <p:nvPr/>
-        </p:nvSpPr>
-        <p:spPr>
-          <a:xfrm>
-            <a:off x="8001000" y="2487168"/>
-            <a:ext cx="1645920" cy="274320"/>
-          </a:xfrm>
-          <a:prstGeom prst="rect">
-            <a:avLst/>
-          </a:prstGeom>
-          <a:solidFill>
-            <a:srgbClr val="FFFFFF"/>
-          </a:solidFill>
-        </p:spPr>
-        <p:txBody>
-          <a:bodyPr wrap="square" lIns="45720" rIns="45720" tIns="18288" bIns="18288" anchor="t">
-            <a:spAutoFit/>
-          </a:bodyPr>
-          <a:lstStyle/>
-          <a:p>
-            <a:pPr algn="ctr"/>
-            <a:r>
-              <a:rPr sz="900" b="0" i="0">
-                <a:solidFill>
-                  <a:srgbClr val="1E293B"/>
-                </a:solidFill>
-                <a:latin typeface="Calibri"/>
-              </a:rPr>
-              <a:t>payment session</a:t>
-            </a:r>
-          </a:p>
-        </p:txBody>
-      </p:sp>
-      <p:cxnSp>
-        <p:nvCxnSpPr>
-          <p:cNvPr id="43" name="Connector 42"/>
-          <p:cNvCxnSpPr/>
-          <p:nvPr/>
-        </p:nvCxnSpPr>
-        <p:spPr>
-          <a:xfrm flipH="1">
-            <a:off x="7470648" y="2948940"/>
-            <a:ext cx="2340864" cy="365760"/>
-          </a:xfrm>
-          <a:prstGeom prst="line">
-            <a:avLst/>
-          </a:prstGeom>
-          <a:ln w="15875">
-            <a:solidFill>
-              <a:srgbClr val="64748B"/>
-            </a:solidFill>
-            <a:tailEnd type="triangle" w="med" len="med"/>
-          </a:ln>
-        </p:spPr>
-        <p:style>
-          <a:lnRef idx="2">
-            <a:schemeClr val="accent1"/>
-          </a:lnRef>
-          <a:fillRef idx="0">
-            <a:schemeClr val="accent1"/>
-          </a:fillRef>
-          <a:effectRef idx="1">
-            <a:schemeClr val="accent1"/>
-          </a:effectRef>
-          <a:fontRef idx="minor">
-            <a:schemeClr val="tx1"/>
-          </a:fontRef>
-        </p:style>
-      </p:cxnSp>
-      <p:sp>
-        <p:nvSpPr>
-          <p:cNvPr id="44" name="TextBox 43"/>
-          <p:cNvSpPr txBox="1"/>
-          <p:nvPr/>
-        </p:nvSpPr>
-        <p:spPr>
-          <a:xfrm>
-            <a:off x="8001000" y="3017520"/>
-            <a:ext cx="1645920" cy="274320"/>
-          </a:xfrm>
-          <a:prstGeom prst="rect">
-            <a:avLst/>
-          </a:prstGeom>
-          <a:solidFill>
-            <a:srgbClr val="FFFFFF"/>
-          </a:solidFill>
-        </p:spPr>
-        <p:txBody>
-          <a:bodyPr wrap="square" lIns="45720" rIns="45720" tIns="18288" bIns="18288" anchor="t">
-            <a:spAutoFit/>
-          </a:bodyPr>
-          <a:lstStyle/>
-          <a:p>
-            <a:pPr algn="ctr"/>
-            <a:r>
-              <a:rPr sz="900" b="0" i="0">
-                <a:solidFill>
-                  <a:srgbClr val="1E293B"/>
-                </a:solidFill>
-                <a:latin typeface="Calibri"/>
-              </a:rPr>
-              <a:t>paid / failed</a:t>
-            </a:r>
-          </a:p>
-        </p:txBody>
-      </p:sp>
-      <p:cxnSp>
-        <p:nvCxnSpPr>
-          <p:cNvPr id="45" name="Connector 44"/>
-          <p:cNvCxnSpPr/>
-          <p:nvPr/>
-        </p:nvCxnSpPr>
-        <p:spPr>
-          <a:xfrm>
-            <a:off x="7470648" y="3589020"/>
-            <a:ext cx="2340864" cy="365760"/>
-          </a:xfrm>
-          <a:prstGeom prst="line">
-            <a:avLst/>
-          </a:prstGeom>
-          <a:ln w="15875">
-            <a:solidFill>
-              <a:srgbClr val="0D9488"/>
-            </a:solidFill>
-            <a:tailEnd type="triangle" w="med" len="med"/>
-          </a:ln>
-        </p:spPr>
-        <p:style>
-          <a:lnRef idx="2">
-            <a:schemeClr val="accent1"/>
-          </a:lnRef>
-          <a:fillRef idx="0">
-            <a:schemeClr val="accent1"/>
-          </a:fillRef>
-          <a:effectRef idx="1">
-            <a:schemeClr val="accent1"/>
-          </a:effectRef>
-          <a:fontRef idx="minor">
-            <a:schemeClr val="tx1"/>
-          </a:fontRef>
-        </p:style>
-      </p:cxnSp>
-      <p:sp>
-        <p:nvSpPr>
-          <p:cNvPr id="46" name="TextBox 45"/>
-          <p:cNvSpPr txBox="1"/>
-          <p:nvPr/>
-        </p:nvSpPr>
-        <p:spPr>
-          <a:xfrm>
-            <a:off x="8001000" y="3639312"/>
-            <a:ext cx="1645920" cy="274320"/>
-          </a:xfrm>
-          <a:prstGeom prst="rect">
-            <a:avLst/>
-          </a:prstGeom>
-          <a:solidFill>
-            <a:srgbClr val="FFFFFF"/>
-          </a:solidFill>
-        </p:spPr>
-        <p:txBody>
-          <a:bodyPr wrap="square" lIns="45720" rIns="45720" tIns="18288" bIns="18288" anchor="t">
-            <a:spAutoFit/>
-          </a:bodyPr>
-          <a:lstStyle/>
-          <a:p>
-            <a:pPr algn="ctr"/>
-            <a:r>
-              <a:rPr sz="900" b="0" i="0">
-                <a:solidFill>
-                  <a:srgbClr val="1E293B"/>
-                </a:solidFill>
-                <a:latin typeface="Calibri"/>
-              </a:rPr>
-              <a:t>invoice data</a:t>
-            </a:r>
-          </a:p>
-        </p:txBody>
-      </p:sp>
-      <p:cxnSp>
-        <p:nvCxnSpPr>
-          <p:cNvPr id="47" name="Connector 46"/>
-          <p:cNvCxnSpPr/>
-          <p:nvPr/>
-        </p:nvCxnSpPr>
-        <p:spPr>
-          <a:xfrm flipH="1" flipV="1">
-            <a:off x="7424928" y="3817620"/>
-            <a:ext cx="2386584" cy="365760"/>
-          </a:xfrm>
-          <a:prstGeom prst="line">
-            <a:avLst/>
-          </a:prstGeom>
-          <a:ln w="15875">
-            <a:solidFill>
-              <a:srgbClr val="64748B"/>
-            </a:solidFill>
-            <a:tailEnd type="triangle" w="med" len="med"/>
-          </a:ln>
-        </p:spPr>
-        <p:style>
-          <a:lnRef idx="2">
-            <a:schemeClr val="accent1"/>
-          </a:lnRef>
-          <a:fillRef idx="0">
-            <a:schemeClr val="accent1"/>
-          </a:fillRef>
-          <a:effectRef idx="1">
-            <a:schemeClr val="accent1"/>
-          </a:effectRef>
-          <a:fontRef idx="minor">
-            <a:schemeClr val="tx1"/>
-          </a:fontRef>
-        </p:style>
-      </p:cxnSp>
-      <p:sp>
-        <p:nvSpPr>
-          <p:cNvPr id="48" name="TextBox 47"/>
-          <p:cNvSpPr txBox="1"/>
-          <p:nvPr/>
-        </p:nvSpPr>
-        <p:spPr>
-          <a:xfrm>
-            <a:off x="8001000" y="4114800"/>
-            <a:ext cx="1645920" cy="274320"/>
-          </a:xfrm>
-          <a:prstGeom prst="rect">
-            <a:avLst/>
-          </a:prstGeom>
-          <a:solidFill>
-            <a:srgbClr val="FFFFFF"/>
-          </a:solidFill>
-        </p:spPr>
-        <p:txBody>
-          <a:bodyPr wrap="square" lIns="45720" rIns="45720" tIns="18288" bIns="18288" anchor="t">
-            <a:spAutoFit/>
-          </a:bodyPr>
-          <a:lstStyle/>
-          <a:p>
-            <a:pPr algn="ctr"/>
-            <a:r>
-              <a:rPr sz="900" b="0" i="0">
-                <a:solidFill>
-                  <a:srgbClr val="1E293B"/>
-                </a:solidFill>
-                <a:latin typeface="Calibri"/>
-              </a:rPr>
-              <a:t>FBR invoice no. + QR</a:t>
-            </a:r>
-          </a:p>
-        </p:txBody>
-      </p:sp>
-      <p:cxnSp>
-        <p:nvCxnSpPr>
-          <p:cNvPr id="49" name="Connector 48"/>
-          <p:cNvCxnSpPr/>
-          <p:nvPr/>
-        </p:nvCxnSpPr>
-        <p:spPr>
-          <a:xfrm>
-            <a:off x="7104888" y="3931920"/>
-            <a:ext cx="2706624" cy="1257300"/>
-          </a:xfrm>
-          <a:prstGeom prst="line">
-            <a:avLst/>
-          </a:prstGeom>
-          <a:ln w="15875">
-            <a:solidFill>
-              <a:srgbClr val="0D9488"/>
-            </a:solidFill>
-            <a:tailEnd type="triangle" w="med" len="med"/>
-          </a:ln>
-        </p:spPr>
-        <p:style>
-          <a:lnRef idx="2">
-            <a:schemeClr val="accent1"/>
-          </a:lnRef>
-          <a:fillRef idx="0">
-            <a:schemeClr val="accent1"/>
-          </a:fillRef>
-          <a:effectRef idx="1">
-            <a:schemeClr val="accent1"/>
-          </a:effectRef>
-          <a:fontRef idx="minor">
-            <a:schemeClr val="tx1"/>
-          </a:fontRef>
-        </p:style>
-      </p:cxnSp>
-      <p:sp>
-        <p:nvSpPr>
-          <p:cNvPr id="50" name="TextBox 49"/>
-          <p:cNvSpPr txBox="1"/>
-          <p:nvPr/>
-        </p:nvSpPr>
-        <p:spPr>
-          <a:xfrm>
-            <a:off x="8001000" y="4754880"/>
-            <a:ext cx="1645920" cy="274320"/>
-          </a:xfrm>
-          <a:prstGeom prst="rect">
-            <a:avLst/>
-          </a:prstGeom>
-          <a:solidFill>
-            <a:srgbClr val="FFFFFF"/>
-          </a:solidFill>
-        </p:spPr>
-        <p:txBody>
-          <a:bodyPr wrap="square" lIns="45720" rIns="45720" tIns="18288" bIns="18288" anchor="t">
-            <a:spAutoFit/>
-          </a:bodyPr>
-          <a:lstStyle/>
-          <a:p>
-            <a:pPr algn="ctr"/>
-            <a:r>
-              <a:rPr sz="900" b="0" i="0">
-                <a:solidFill>
-                  <a:srgbClr val="1E293B"/>
-                </a:solidFill>
-                <a:latin typeface="Calibri"/>
-              </a:rPr>
-              <a:t>review link, campaign</a:t>
-            </a:r>
-          </a:p>
-        </p:txBody>
-      </p:sp>
-      <p:sp>
-        <p:nvSpPr>
-          <p:cNvPr id="51" name="TextBox 50"/>
-          <p:cNvSpPr txBox="1"/>
-          <p:nvPr/>
-        </p:nvSpPr>
-        <p:spPr>
-          <a:xfrm>
-            <a:off x="457200" y="6355080"/>
-            <a:ext cx="4572000" cy="274320"/>
-          </a:xfrm>
-          <a:prstGeom prst="rect">
-            <a:avLst/>
-          </a:prstGeom>
-          <a:noFill/>
-        </p:spPr>
-        <p:txBody>
-          <a:bodyPr wrap="square" lIns="45720" rIns="45720" tIns="18288" bIns="18288" anchor="t">
-            <a:spAutoFit/>
-          </a:bodyPr>
-          <a:lstStyle/>
-          <a:p>
             <a:pPr algn="l"/>
             <a:r>
               <a:rPr sz="1000" b="0" i="1">
@@ -24276,7 +22532,7 @@
                 </a:solidFill>
                 <a:latin typeface="Calibri"/>
               </a:rPr>
-              <a:t>Grey arrows: data into the system   ·   Teal arrows: data out of the system</a:t>
+              <a:t>Grey arrows: data into the system  ·  Teal arrows: data out of the system  ·  Blue boxes: external entities</a:t>
             </a:r>
           </a:p>
         </p:txBody>
@@ -24327,22 +22583,7 @@
           <a:ln>
             <a:noFill/>
           </a:ln>
-          <a:effectLst/>
-        </p:spPr>
-        <p:style>
-          <a:lnRef idx="1">
-            <a:schemeClr val="accent1"/>
-          </a:lnRef>
-          <a:fillRef idx="3">
-            <a:schemeClr val="accent1"/>
-          </a:fillRef>
-          <a:effectRef idx="2">
-            <a:schemeClr val="accent1"/>
-          </a:effectRef>
-          <a:fontRef idx="minor">
-            <a:schemeClr val="lt1"/>
-          </a:fontRef>
-        </p:style>
+        </p:spPr>
         <p:txBody>
           <a:bodyPr rtlCol="0" anchor="ctr" wrap="square" lIns="54864" rIns="54864" tIns="27432" bIns="27432"/>
           <a:lstStyle/>
@@ -24381,7 +22622,7 @@
                 </a:solidFill>
                 <a:latin typeface="Calibri"/>
               </a:rPr>
-              <a:t>3 · DFD</a:t>
+              <a:t>3 · DFD — PROCESSES AND DATA STORES</a:t>
             </a:r>
           </a:p>
         </p:txBody>
@@ -24416,7 +22657,7 @@
                 </a:solidFill>
                 <a:latin typeface="Calibri"/>
               </a:rPr>
-              <a:t>DFD Level 1 — processes and data stores</a:t>
+              <a:t>DFD Level 1</a:t>
             </a:r>
           </a:p>
         </p:txBody>
@@ -24499,8 +22740,8 @@
         </p:nvSpPr>
         <p:spPr>
           <a:xfrm>
-            <a:off x="2286000" y="1188720"/>
-            <a:ext cx="1874519" cy="777240"/>
+            <a:off x="2331720" y="1417320"/>
+            <a:ext cx="1874519" cy="713232"/>
           </a:xfrm>
           <a:prstGeom prst="roundRect">
             <a:avLst/>
@@ -24513,43 +22754,28 @@
               <a:srgbClr val="0B5E57"/>
             </a:solidFill>
           </a:ln>
-          <a:effectLst/>
-        </p:spPr>
-        <p:style>
-          <a:lnRef idx="1">
-            <a:schemeClr val="accent1"/>
-          </a:lnRef>
-          <a:fillRef idx="3">
-            <a:schemeClr val="accent1"/>
-          </a:fillRef>
-          <a:effectRef idx="2">
-            <a:schemeClr val="accent1"/>
-          </a:effectRef>
-          <a:fontRef idx="minor">
-            <a:schemeClr val="lt1"/>
-          </a:fontRef>
-        </p:style>
+        </p:spPr>
         <p:txBody>
           <a:bodyPr rtlCol="0" anchor="ctr" wrap="square" lIns="54864" rIns="54864" tIns="27432" bIns="27432"/>
           <a:lstStyle/>
           <a:p>
             <a:pPr algn="ctr"/>
             <a:r>
-              <a:rPr sz="1200" b="1" i="0">
+              <a:rPr sz="1000" b="1" i="0">
+                <a:solidFill>
+                  <a:srgbClr val="0D9488"/>
+                </a:solidFill>
+                <a:latin typeface="Calibri"/>
+              </a:rPr>
+              <a:t>1.0</a:t>
+            </a:r>
+          </a:p>
+          <a:p>
+            <a:pPr algn="ctr"/>
+            <a:r>
+              <a:rPr sz="1300" b="1" i="0">
                 <a:solidFill>
                   <a:srgbClr val="0B5E57"/>
-                </a:solidFill>
-                <a:latin typeface="Calibri"/>
-              </a:rPr>
-              <a:t>1.0</a:t>
-            </a:r>
-          </a:p>
-          <a:p>
-            <a:pPr algn="ctr"/>
-            <a:r>
-              <a:rPr sz="1000" b="0" i="0">
-                <a:solidFill>
-                  <a:srgbClr val="64748B"/>
                 </a:solidFill>
                 <a:latin typeface="Calibri"/>
               </a:rPr>
@@ -24566,8 +22792,8 @@
         </p:nvSpPr>
         <p:spPr>
           <a:xfrm>
-            <a:off x="5166360" y="1188720"/>
-            <a:ext cx="1874519" cy="777240"/>
+            <a:off x="5166360" y="1417320"/>
+            <a:ext cx="1874519" cy="713232"/>
           </a:xfrm>
           <a:prstGeom prst="roundRect">
             <a:avLst/>
@@ -24580,43 +22806,28 @@
               <a:srgbClr val="0B5E57"/>
             </a:solidFill>
           </a:ln>
-          <a:effectLst/>
-        </p:spPr>
-        <p:style>
-          <a:lnRef idx="1">
-            <a:schemeClr val="accent1"/>
-          </a:lnRef>
-          <a:fillRef idx="3">
-            <a:schemeClr val="accent1"/>
-          </a:fillRef>
-          <a:effectRef idx="2">
-            <a:schemeClr val="accent1"/>
-          </a:effectRef>
-          <a:fontRef idx="minor">
-            <a:schemeClr val="lt1"/>
-          </a:fontRef>
-        </p:style>
+        </p:spPr>
         <p:txBody>
           <a:bodyPr rtlCol="0" anchor="ctr" wrap="square" lIns="54864" rIns="54864" tIns="27432" bIns="27432"/>
           <a:lstStyle/>
           <a:p>
             <a:pPr algn="ctr"/>
             <a:r>
-              <a:rPr sz="1200" b="1" i="0">
+              <a:rPr sz="1000" b="1" i="0">
+                <a:solidFill>
+                  <a:srgbClr val="0D9488"/>
+                </a:solidFill>
+                <a:latin typeface="Calibri"/>
+              </a:rPr>
+              <a:t>2.0</a:t>
+            </a:r>
+          </a:p>
+          <a:p>
+            <a:pPr algn="ctr"/>
+            <a:r>
+              <a:rPr sz="1300" b="1" i="0">
                 <a:solidFill>
                   <a:srgbClr val="0B5E57"/>
-                </a:solidFill>
-                <a:latin typeface="Calibri"/>
-              </a:rPr>
-              <a:t>2.0</a:t>
-            </a:r>
-          </a:p>
-          <a:p>
-            <a:pPr algn="ctr"/>
-            <a:r>
-              <a:rPr sz="1000" b="0" i="0">
-                <a:solidFill>
-                  <a:srgbClr val="64748B"/>
                 </a:solidFill>
                 <a:latin typeface="Calibri"/>
               </a:rPr>
@@ -24633,8 +22844,8 @@
         </p:nvSpPr>
         <p:spPr>
           <a:xfrm>
-            <a:off x="8046720" y="1188720"/>
-            <a:ext cx="1874519" cy="777240"/>
+            <a:off x="8001000" y="1417320"/>
+            <a:ext cx="1874519" cy="713232"/>
           </a:xfrm>
           <a:prstGeom prst="roundRect">
             <a:avLst/>
@@ -24647,43 +22858,28 @@
               <a:srgbClr val="0B5E57"/>
             </a:solidFill>
           </a:ln>
-          <a:effectLst/>
-        </p:spPr>
-        <p:style>
-          <a:lnRef idx="1">
-            <a:schemeClr val="accent1"/>
-          </a:lnRef>
-          <a:fillRef idx="3">
-            <a:schemeClr val="accent1"/>
-          </a:fillRef>
-          <a:effectRef idx="2">
-            <a:schemeClr val="accent1"/>
-          </a:effectRef>
-          <a:fontRef idx="minor">
-            <a:schemeClr val="lt1"/>
-          </a:fontRef>
-        </p:style>
+        </p:spPr>
         <p:txBody>
           <a:bodyPr rtlCol="0" anchor="ctr" wrap="square" lIns="54864" rIns="54864" tIns="27432" bIns="27432"/>
           <a:lstStyle/>
           <a:p>
             <a:pPr algn="ctr"/>
             <a:r>
-              <a:rPr sz="1200" b="1" i="0">
+              <a:rPr sz="1000" b="1" i="0">
+                <a:solidFill>
+                  <a:srgbClr val="0D9488"/>
+                </a:solidFill>
+                <a:latin typeface="Calibri"/>
+              </a:rPr>
+              <a:t>3.0</a:t>
+            </a:r>
+          </a:p>
+          <a:p>
+            <a:pPr algn="ctr"/>
+            <a:r>
+              <a:rPr sz="1300" b="1" i="0">
                 <a:solidFill>
                   <a:srgbClr val="0B5E57"/>
-                </a:solidFill>
-                <a:latin typeface="Calibri"/>
-              </a:rPr>
-              <a:t>3.0</a:t>
-            </a:r>
-          </a:p>
-          <a:p>
-            <a:pPr algn="ctr"/>
-            <a:r>
-              <a:rPr sz="1000" b="0" i="0">
-                <a:solidFill>
-                  <a:srgbClr val="64748B"/>
                 </a:solidFill>
                 <a:latin typeface="Calibri"/>
               </a:rPr>
@@ -24700,8 +22896,8 @@
         </p:nvSpPr>
         <p:spPr>
           <a:xfrm>
-            <a:off x="2286000" y="3246120"/>
-            <a:ext cx="1874519" cy="777240"/>
+            <a:off x="2331720" y="3310128"/>
+            <a:ext cx="1874519" cy="713232"/>
           </a:xfrm>
           <a:prstGeom prst="roundRect">
             <a:avLst/>
@@ -24714,47 +22910,32 @@
               <a:srgbClr val="0B5E57"/>
             </a:solidFill>
           </a:ln>
-          <a:effectLst/>
-        </p:spPr>
-        <p:style>
-          <a:lnRef idx="1">
-            <a:schemeClr val="accent1"/>
-          </a:lnRef>
-          <a:fillRef idx="3">
-            <a:schemeClr val="accent1"/>
-          </a:fillRef>
-          <a:effectRef idx="2">
-            <a:schemeClr val="accent1"/>
-          </a:effectRef>
-          <a:fontRef idx="minor">
-            <a:schemeClr val="lt1"/>
-          </a:fontRef>
-        </p:style>
+        </p:spPr>
         <p:txBody>
           <a:bodyPr rtlCol="0" anchor="ctr" wrap="square" lIns="54864" rIns="54864" tIns="27432" bIns="27432"/>
           <a:lstStyle/>
           <a:p>
             <a:pPr algn="ctr"/>
             <a:r>
-              <a:rPr sz="1200" b="1" i="0">
+              <a:rPr sz="1000" b="1" i="0">
+                <a:solidFill>
+                  <a:srgbClr val="0D9488"/>
+                </a:solidFill>
+                <a:latin typeface="Calibri"/>
+              </a:rPr>
+              <a:t>4.0</a:t>
+            </a:r>
+          </a:p>
+          <a:p>
+            <a:pPr algn="ctr"/>
+            <a:r>
+              <a:rPr sz="1300" b="1" i="0">
                 <a:solidFill>
                   <a:srgbClr val="0B5E57"/>
                 </a:solidFill>
                 <a:latin typeface="Calibri"/>
               </a:rPr>
-              <a:t>4.0</a:t>
-            </a:r>
-          </a:p>
-          <a:p>
-            <a:pPr algn="ctr"/>
-            <a:r>
-              <a:rPr sz="1000" b="0" i="0">
-                <a:solidFill>
-                  <a:srgbClr val="64748B"/>
-                </a:solidFill>
-                <a:latin typeface="Calibri"/>
-              </a:rPr>
-              <a:t>Bill, pay &amp; report tax</a:t>
+              <a:t>Bill, pay, report tax</a:t>
             </a:r>
           </a:p>
         </p:txBody>
@@ -24767,8 +22948,8 @@
         </p:nvSpPr>
         <p:spPr>
           <a:xfrm>
-            <a:off x="5166360" y="3246120"/>
-            <a:ext cx="1874519" cy="777240"/>
+            <a:off x="5166360" y="3310128"/>
+            <a:ext cx="1874519" cy="713232"/>
           </a:xfrm>
           <a:prstGeom prst="roundRect">
             <a:avLst/>
@@ -24781,43 +22962,28 @@
               <a:srgbClr val="0B5E57"/>
             </a:solidFill>
           </a:ln>
-          <a:effectLst/>
-        </p:spPr>
-        <p:style>
-          <a:lnRef idx="1">
-            <a:schemeClr val="accent1"/>
-          </a:lnRef>
-          <a:fillRef idx="3">
-            <a:schemeClr val="accent1"/>
-          </a:fillRef>
-          <a:effectRef idx="2">
-            <a:schemeClr val="accent1"/>
-          </a:effectRef>
-          <a:fontRef idx="minor">
-            <a:schemeClr val="lt1"/>
-          </a:fontRef>
-        </p:style>
+        </p:spPr>
         <p:txBody>
           <a:bodyPr rtlCol="0" anchor="ctr" wrap="square" lIns="54864" rIns="54864" tIns="27432" bIns="27432"/>
           <a:lstStyle/>
           <a:p>
             <a:pPr algn="ctr"/>
             <a:r>
-              <a:rPr sz="1200" b="1" i="0">
+              <a:rPr sz="1000" b="1" i="0">
+                <a:solidFill>
+                  <a:srgbClr val="0D9488"/>
+                </a:solidFill>
+                <a:latin typeface="Calibri"/>
+              </a:rPr>
+              <a:t>5.0</a:t>
+            </a:r>
+          </a:p>
+          <a:p>
+            <a:pPr algn="ctr"/>
+            <a:r>
+              <a:rPr sz="1300" b="1" i="0">
                 <a:solidFill>
                   <a:srgbClr val="0B5E57"/>
-                </a:solidFill>
-                <a:latin typeface="Calibri"/>
-              </a:rPr>
-              <a:t>5.0</a:t>
-            </a:r>
-          </a:p>
-          <a:p>
-            <a:pPr algn="ctr"/>
-            <a:r>
-              <a:rPr sz="1000" b="0" i="0">
-                <a:solidFill>
-                  <a:srgbClr val="64748B"/>
                 </a:solidFill>
                 <a:latin typeface="Calibri"/>
               </a:rPr>
@@ -24834,8 +23000,8 @@
         </p:nvSpPr>
         <p:spPr>
           <a:xfrm>
-            <a:off x="8046720" y="3246120"/>
-            <a:ext cx="1874519" cy="777240"/>
+            <a:off x="8001000" y="3310128"/>
+            <a:ext cx="1874519" cy="713232"/>
           </a:xfrm>
           <a:prstGeom prst="roundRect">
             <a:avLst/>
@@ -24848,43 +23014,28 @@
               <a:srgbClr val="0B5E57"/>
             </a:solidFill>
           </a:ln>
-          <a:effectLst/>
-        </p:spPr>
-        <p:style>
-          <a:lnRef idx="1">
-            <a:schemeClr val="accent1"/>
-          </a:lnRef>
-          <a:fillRef idx="3">
-            <a:schemeClr val="accent1"/>
-          </a:fillRef>
-          <a:effectRef idx="2">
-            <a:schemeClr val="accent1"/>
-          </a:effectRef>
-          <a:fontRef idx="minor">
-            <a:schemeClr val="lt1"/>
-          </a:fontRef>
-        </p:style>
+        </p:spPr>
         <p:txBody>
           <a:bodyPr rtlCol="0" anchor="ctr" wrap="square" lIns="54864" rIns="54864" tIns="27432" bIns="27432"/>
           <a:lstStyle/>
           <a:p>
             <a:pPr algn="ctr"/>
             <a:r>
-              <a:rPr sz="1200" b="1" i="0">
+              <a:rPr sz="1000" b="1" i="0">
+                <a:solidFill>
+                  <a:srgbClr val="0D9488"/>
+                </a:solidFill>
+                <a:latin typeface="Calibri"/>
+              </a:rPr>
+              <a:t>6.0</a:t>
+            </a:r>
+          </a:p>
+          <a:p>
+            <a:pPr algn="ctr"/>
+            <a:r>
+              <a:rPr sz="1300" b="1" i="0">
                 <a:solidFill>
                   <a:srgbClr val="0B5E57"/>
-                </a:solidFill>
-                <a:latin typeface="Calibri"/>
-              </a:rPr>
-              <a:t>6.0</a:t>
-            </a:r>
-          </a:p>
-          <a:p>
-            <a:pPr algn="ctr"/>
-            <a:r>
-              <a:rPr sz="1000" b="0" i="0">
-                <a:solidFill>
-                  <a:srgbClr val="64748B"/>
                 </a:solidFill>
                 <a:latin typeface="Calibri"/>
               </a:rPr>
@@ -24901,8 +23052,8 @@
         </p:nvSpPr>
         <p:spPr>
           <a:xfrm>
-            <a:off x="5166360" y="5303520"/>
-            <a:ext cx="1874519" cy="777240"/>
+            <a:off x="5166360" y="5440680"/>
+            <a:ext cx="1874519" cy="713232"/>
           </a:xfrm>
           <a:prstGeom prst="roundRect">
             <a:avLst/>
@@ -24915,43 +23066,28 @@
               <a:srgbClr val="0B5E57"/>
             </a:solidFill>
           </a:ln>
-          <a:effectLst/>
-        </p:spPr>
-        <p:style>
-          <a:lnRef idx="1">
-            <a:schemeClr val="accent1"/>
-          </a:lnRef>
-          <a:fillRef idx="3">
-            <a:schemeClr val="accent1"/>
-          </a:fillRef>
-          <a:effectRef idx="2">
-            <a:schemeClr val="accent1"/>
-          </a:effectRef>
-          <a:fontRef idx="minor">
-            <a:schemeClr val="lt1"/>
-          </a:fontRef>
-        </p:style>
+        </p:spPr>
         <p:txBody>
           <a:bodyPr rtlCol="0" anchor="ctr" wrap="square" lIns="54864" rIns="54864" tIns="27432" bIns="27432"/>
           <a:lstStyle/>
           <a:p>
             <a:pPr algn="ctr"/>
             <a:r>
-              <a:rPr sz="1200" b="1" i="0">
+              <a:rPr sz="1000" b="1" i="0">
+                <a:solidFill>
+                  <a:srgbClr val="0D9488"/>
+                </a:solidFill>
+                <a:latin typeface="Calibri"/>
+              </a:rPr>
+              <a:t>7.0</a:t>
+            </a:r>
+          </a:p>
+          <a:p>
+            <a:pPr algn="ctr"/>
+            <a:r>
+              <a:rPr sz="1300" b="1" i="0">
                 <a:solidFill>
                   <a:srgbClr val="0B5E57"/>
-                </a:solidFill>
-                <a:latin typeface="Calibri"/>
-              </a:rPr>
-              <a:t>7.0</a:t>
-            </a:r>
-          </a:p>
-          <a:p>
-            <a:pPr algn="ctr"/>
-            <a:r>
-              <a:rPr sz="1000" b="0" i="0">
-                <a:solidFill>
-                  <a:srgbClr val="64748B"/>
                 </a:solidFill>
                 <a:latin typeface="Calibri"/>
               </a:rPr>
@@ -24968,8 +23104,8 @@
         </p:nvSpPr>
         <p:spPr>
           <a:xfrm>
-            <a:off x="5212080" y="2377440"/>
-            <a:ext cx="1783080" cy="384048"/>
+            <a:off x="2331720" y="2487168"/>
+            <a:ext cx="1874519" cy="384048"/>
           </a:xfrm>
           <a:prstGeom prst="rect">
             <a:avLst/>
@@ -24980,22 +23116,7 @@
           <a:ln>
             <a:noFill/>
           </a:ln>
-          <a:effectLst/>
-        </p:spPr>
-        <p:style>
-          <a:lnRef idx="1">
-            <a:schemeClr val="accent1"/>
-          </a:lnRef>
-          <a:fillRef idx="3">
-            <a:schemeClr val="accent1"/>
-          </a:fillRef>
-          <a:effectRef idx="2">
-            <a:schemeClr val="accent1"/>
-          </a:effectRef>
-          <a:fontRef idx="minor">
-            <a:schemeClr val="lt1"/>
-          </a:fontRef>
-        </p:style>
+        </p:spPr>
         <p:txBody>
           <a:bodyPr rtlCol="0" anchor="ctr" wrap="square" lIns="54864" rIns="54864" tIns="27432" bIns="27432"/>
           <a:lstStyle/>
@@ -25012,7 +23133,7 @@
         </p:nvSpPr>
         <p:spPr>
           <a:xfrm>
-            <a:off x="5212080" y="2377440"/>
+            <a:off x="2331720" y="2487168"/>
             <a:ext cx="457200" cy="384048"/>
           </a:xfrm>
           <a:prstGeom prst="rect">
@@ -25024,22 +23145,7 @@
           <a:ln>
             <a:noFill/>
           </a:ln>
-          <a:effectLst/>
-        </p:spPr>
-        <p:style>
-          <a:lnRef idx="1">
-            <a:schemeClr val="accent1"/>
-          </a:lnRef>
-          <a:fillRef idx="3">
-            <a:schemeClr val="accent1"/>
-          </a:fillRef>
-          <a:effectRef idx="2">
-            <a:schemeClr val="accent1"/>
-          </a:effectRef>
-          <a:fontRef idx="minor">
-            <a:schemeClr val="lt1"/>
-          </a:fontRef>
-        </p:style>
+        </p:spPr>
         <p:txBody>
           <a:bodyPr rtlCol="0" anchor="ctr" wrap="square" lIns="54864" rIns="54864" tIns="27432" bIns="27432"/>
           <a:lstStyle/>
@@ -25052,7 +23158,7 @@
                 </a:solidFill>
                 <a:latin typeface="Calibri"/>
               </a:rPr>
-              <a:t>D1</a:t>
+              <a:t>D2</a:t>
             </a:r>
           </a:p>
         </p:txBody>
@@ -25065,8 +23171,8 @@
         </p:nvSpPr>
         <p:spPr>
           <a:xfrm>
-            <a:off x="5715000" y="2377440"/>
-            <a:ext cx="1280160" cy="384048"/>
+            <a:off x="2834640" y="2487168"/>
+            <a:ext cx="1371599" cy="384048"/>
           </a:xfrm>
           <a:prstGeom prst="rect">
             <a:avLst/>
@@ -25087,7 +23193,7 @@
                 </a:solidFill>
                 <a:latin typeface="Calibri"/>
               </a:rPr>
-              <a:t>Menu, recipes (BOM)</a:t>
+              <a:t>Restaurant Orders</a:t>
             </a:r>
           </a:p>
         </p:txBody>
@@ -25100,8 +23206,8 @@
         </p:nvCxnSpPr>
         <p:spPr>
           <a:xfrm>
-            <a:off x="5212080" y="2377440"/>
-            <a:ext cx="1783080" cy="0"/>
+            <a:off x="2331720" y="2487168"/>
+            <a:ext cx="1874519" cy="0"/>
           </a:xfrm>
           <a:prstGeom prst="line">
             <a:avLst/>
@@ -25135,8 +23241,8 @@
         </p:nvCxnSpPr>
         <p:spPr>
           <a:xfrm>
-            <a:off x="5212080" y="2761488"/>
-            <a:ext cx="1783080" cy="0"/>
+            <a:off x="2331720" y="2871216"/>
+            <a:ext cx="1874519" cy="0"/>
           </a:xfrm>
           <a:prstGeom prst="line">
             <a:avLst/>
@@ -25170,8 +23276,8 @@
         </p:nvSpPr>
         <p:spPr>
           <a:xfrm>
-            <a:off x="2331720" y="2377440"/>
-            <a:ext cx="1783080" cy="384048"/>
+            <a:off x="5166360" y="2487168"/>
+            <a:ext cx="1874519" cy="384048"/>
           </a:xfrm>
           <a:prstGeom prst="rect">
             <a:avLst/>
@@ -25182,22 +23288,7 @@
           <a:ln>
             <a:noFill/>
           </a:ln>
-          <a:effectLst/>
-        </p:spPr>
-        <p:style>
-          <a:lnRef idx="1">
-            <a:schemeClr val="accent1"/>
-          </a:lnRef>
-          <a:fillRef idx="3">
-            <a:schemeClr val="accent1"/>
-          </a:fillRef>
-          <a:effectRef idx="2">
-            <a:schemeClr val="accent1"/>
-          </a:effectRef>
-          <a:fontRef idx="minor">
-            <a:schemeClr val="lt1"/>
-          </a:fontRef>
-        </p:style>
+        </p:spPr>
         <p:txBody>
           <a:bodyPr rtlCol="0" anchor="ctr" wrap="square" lIns="54864" rIns="54864" tIns="27432" bIns="27432"/>
           <a:lstStyle/>
@@ -25214,7 +23305,7 @@
         </p:nvSpPr>
         <p:spPr>
           <a:xfrm>
-            <a:off x="2331720" y="2377440"/>
+            <a:off x="5166360" y="2487168"/>
             <a:ext cx="457200" cy="384048"/>
           </a:xfrm>
           <a:prstGeom prst="rect">
@@ -25226,22 +23317,7 @@
           <a:ln>
             <a:noFill/>
           </a:ln>
-          <a:effectLst/>
-        </p:spPr>
-        <p:style>
-          <a:lnRef idx="1">
-            <a:schemeClr val="accent1"/>
-          </a:lnRef>
-          <a:fillRef idx="3">
-            <a:schemeClr val="accent1"/>
-          </a:fillRef>
-          <a:effectRef idx="2">
-            <a:schemeClr val="accent1"/>
-          </a:effectRef>
-          <a:fontRef idx="minor">
-            <a:schemeClr val="lt1"/>
-          </a:fontRef>
-        </p:style>
+        </p:spPr>
         <p:txBody>
           <a:bodyPr rtlCol="0" anchor="ctr" wrap="square" lIns="54864" rIns="54864" tIns="27432" bIns="27432"/>
           <a:lstStyle/>
@@ -25254,7 +23330,7 @@
                 </a:solidFill>
                 <a:latin typeface="Calibri"/>
               </a:rPr>
-              <a:t>D2</a:t>
+              <a:t>D1</a:t>
             </a:r>
           </a:p>
         </p:txBody>
@@ -25267,8 +23343,8 @@
         </p:nvSpPr>
         <p:spPr>
           <a:xfrm>
-            <a:off x="2834640" y="2377440"/>
-            <a:ext cx="1280160" cy="384048"/>
+            <a:off x="5669280" y="2487168"/>
+            <a:ext cx="1371599" cy="384048"/>
           </a:xfrm>
           <a:prstGeom prst="rect">
             <a:avLst/>
@@ -25289,7 +23365,7 @@
                 </a:solidFill>
                 <a:latin typeface="Calibri"/>
               </a:rPr>
-              <a:t>Restaurant Orders</a:t>
+              <a:t>Menu &amp; recipes</a:t>
             </a:r>
           </a:p>
         </p:txBody>
@@ -25302,8 +23378,8 @@
         </p:nvCxnSpPr>
         <p:spPr>
           <a:xfrm>
-            <a:off x="2331720" y="2377440"/>
-            <a:ext cx="1783080" cy="0"/>
+            <a:off x="5166360" y="2487168"/>
+            <a:ext cx="1874519" cy="0"/>
           </a:xfrm>
           <a:prstGeom prst="line">
             <a:avLst/>
@@ -25337,8 +23413,8 @@
         </p:nvCxnSpPr>
         <p:spPr>
           <a:xfrm>
-            <a:off x="2331720" y="2761488"/>
-            <a:ext cx="1783080" cy="0"/>
+            <a:off x="5166360" y="2871216"/>
+            <a:ext cx="1874519" cy="0"/>
           </a:xfrm>
           <a:prstGeom prst="line">
             <a:avLst/>
@@ -25372,8 +23448,8 @@
         </p:nvSpPr>
         <p:spPr>
           <a:xfrm>
-            <a:off x="8092440" y="2377440"/>
-            <a:ext cx="1783080" cy="384048"/>
+            <a:off x="8001000" y="2487168"/>
+            <a:ext cx="1874519" cy="384048"/>
           </a:xfrm>
           <a:prstGeom prst="rect">
             <a:avLst/>
@@ -25384,22 +23460,7 @@
           <a:ln>
             <a:noFill/>
           </a:ln>
-          <a:effectLst/>
-        </p:spPr>
-        <p:style>
-          <a:lnRef idx="1">
-            <a:schemeClr val="accent1"/>
-          </a:lnRef>
-          <a:fillRef idx="3">
-            <a:schemeClr val="accent1"/>
-          </a:fillRef>
-          <a:effectRef idx="2">
-            <a:schemeClr val="accent1"/>
-          </a:effectRef>
-          <a:fontRef idx="minor">
-            <a:schemeClr val="lt1"/>
-          </a:fontRef>
-        </p:style>
+        </p:spPr>
         <p:txBody>
           <a:bodyPr rtlCol="0" anchor="ctr" wrap="square" lIns="54864" rIns="54864" tIns="27432" bIns="27432"/>
           <a:lstStyle/>
@@ -25416,7 +23477,7 @@
         </p:nvSpPr>
         <p:spPr>
           <a:xfrm>
-            <a:off x="8092440" y="2377440"/>
+            <a:off x="8001000" y="2487168"/>
             <a:ext cx="457200" cy="384048"/>
           </a:xfrm>
           <a:prstGeom prst="rect">
@@ -25428,22 +23489,7 @@
           <a:ln>
             <a:noFill/>
           </a:ln>
-          <a:effectLst/>
-        </p:spPr>
-        <p:style>
-          <a:lnRef idx="1">
-            <a:schemeClr val="accent1"/>
-          </a:lnRef>
-          <a:fillRef idx="3">
-            <a:schemeClr val="accent1"/>
-          </a:fillRef>
-          <a:effectRef idx="2">
-            <a:schemeClr val="accent1"/>
-          </a:effectRef>
-          <a:fontRef idx="minor">
-            <a:schemeClr val="lt1"/>
-          </a:fontRef>
-        </p:style>
+        </p:spPr>
         <p:txBody>
           <a:bodyPr rtlCol="0" anchor="ctr" wrap="square" lIns="54864" rIns="54864" tIns="27432" bIns="27432"/>
           <a:lstStyle/>
@@ -25469,8 +23515,8 @@
         </p:nvSpPr>
         <p:spPr>
           <a:xfrm>
-            <a:off x="8595360" y="2377440"/>
-            <a:ext cx="1280160" cy="384048"/>
+            <a:off x="8503920" y="2487168"/>
+            <a:ext cx="1371599" cy="384048"/>
           </a:xfrm>
           <a:prstGeom prst="rect">
             <a:avLst/>
@@ -25491,7 +23537,7 @@
                 </a:solidFill>
                 <a:latin typeface="Calibri"/>
               </a:rPr>
-              <a:t>Riders &amp; assignments</a:t>
+              <a:t>Riders, assignments</a:t>
             </a:r>
           </a:p>
         </p:txBody>
@@ -25504,8 +23550,8 @@
         </p:nvCxnSpPr>
         <p:spPr>
           <a:xfrm>
-            <a:off x="8092440" y="2377440"/>
-            <a:ext cx="1783080" cy="0"/>
+            <a:off x="8001000" y="2487168"/>
+            <a:ext cx="1874519" cy="0"/>
           </a:xfrm>
           <a:prstGeom prst="line">
             <a:avLst/>
@@ -25539,8 +23585,8 @@
         </p:nvCxnSpPr>
         <p:spPr>
           <a:xfrm>
-            <a:off x="8092440" y="2761488"/>
-            <a:ext cx="1783080" cy="0"/>
+            <a:off x="8001000" y="2871216"/>
+            <a:ext cx="1874519" cy="0"/>
           </a:xfrm>
           <a:prstGeom prst="line">
             <a:avLst/>
@@ -25575,7 +23621,7 @@
         <p:spPr>
           <a:xfrm>
             <a:off x="2331720" y="4434840"/>
-            <a:ext cx="1783080" cy="384048"/>
+            <a:ext cx="1874519" cy="384048"/>
           </a:xfrm>
           <a:prstGeom prst="rect">
             <a:avLst/>
@@ -25586,22 +23632,7 @@
           <a:ln>
             <a:noFill/>
           </a:ln>
-          <a:effectLst/>
-        </p:spPr>
-        <p:style>
-          <a:lnRef idx="1">
-            <a:schemeClr val="accent1"/>
-          </a:lnRef>
-          <a:fillRef idx="3">
-            <a:schemeClr val="accent1"/>
-          </a:fillRef>
-          <a:effectRef idx="2">
-            <a:schemeClr val="accent1"/>
-          </a:effectRef>
-          <a:fontRef idx="minor">
-            <a:schemeClr val="lt1"/>
-          </a:fontRef>
-        </p:style>
+        </p:spPr>
         <p:txBody>
           <a:bodyPr rtlCol="0" anchor="ctr" wrap="square" lIns="54864" rIns="54864" tIns="27432" bIns="27432"/>
           <a:lstStyle/>
@@ -25630,22 +23661,7 @@
           <a:ln>
             <a:noFill/>
           </a:ln>
-          <a:effectLst/>
-        </p:spPr>
-        <p:style>
-          <a:lnRef idx="1">
-            <a:schemeClr val="accent1"/>
-          </a:lnRef>
-          <a:fillRef idx="3">
-            <a:schemeClr val="accent1"/>
-          </a:fillRef>
-          <a:effectRef idx="2">
-            <a:schemeClr val="accent1"/>
-          </a:effectRef>
-          <a:fontRef idx="minor">
-            <a:schemeClr val="lt1"/>
-          </a:fontRef>
-        </p:style>
+        </p:spPr>
         <p:txBody>
           <a:bodyPr rtlCol="0" anchor="ctr" wrap="square" lIns="54864" rIns="54864" tIns="27432" bIns="27432"/>
           <a:lstStyle/>
@@ -25672,7 +23688,7 @@
         <p:spPr>
           <a:xfrm>
             <a:off x="2834640" y="4434840"/>
-            <a:ext cx="1280160" cy="384048"/>
+            <a:ext cx="1371599" cy="384048"/>
           </a:xfrm>
           <a:prstGeom prst="rect">
             <a:avLst/>
@@ -25693,7 +23709,7 @@
                 </a:solidFill>
                 <a:latin typeface="Calibri"/>
               </a:rPr>
-              <a:t>Invoices &amp; payments</a:t>
+              <a:t>Invoices, payments</a:t>
             </a:r>
           </a:p>
         </p:txBody>
@@ -25707,7 +23723,7 @@
         <p:spPr>
           <a:xfrm>
             <a:off x="2331720" y="4434840"/>
-            <a:ext cx="1783080" cy="0"/>
+            <a:ext cx="1874519" cy="0"/>
           </a:xfrm>
           <a:prstGeom prst="line">
             <a:avLst/>
@@ -25742,7 +23758,7 @@
         <p:spPr>
           <a:xfrm>
             <a:off x="2331720" y="4818888"/>
-            <a:ext cx="1783080" cy="0"/>
+            <a:ext cx="1874519" cy="0"/>
           </a:xfrm>
           <a:prstGeom prst="line">
             <a:avLst/>
@@ -25776,8 +23792,8 @@
         </p:nvSpPr>
         <p:spPr>
           <a:xfrm>
-            <a:off x="5212080" y="4434840"/>
-            <a:ext cx="1783080" cy="384048"/>
+            <a:off x="5166360" y="4709160"/>
+            <a:ext cx="1874519" cy="384048"/>
           </a:xfrm>
           <a:prstGeom prst="rect">
             <a:avLst/>
@@ -25788,22 +23804,7 @@
           <a:ln>
             <a:noFill/>
           </a:ln>
-          <a:effectLst/>
-        </p:spPr>
-        <p:style>
-          <a:lnRef idx="1">
-            <a:schemeClr val="accent1"/>
-          </a:lnRef>
-          <a:fillRef idx="3">
-            <a:schemeClr val="accent1"/>
-          </a:fillRef>
-          <a:effectRef idx="2">
-            <a:schemeClr val="accent1"/>
-          </a:effectRef>
-          <a:fontRef idx="minor">
-            <a:schemeClr val="lt1"/>
-          </a:fontRef>
-        </p:style>
+        </p:spPr>
         <p:txBody>
           <a:bodyPr rtlCol="0" anchor="ctr" wrap="square" lIns="54864" rIns="54864" tIns="27432" bIns="27432"/>
           <a:lstStyle/>
@@ -25820,7 +23821,7 @@
         </p:nvSpPr>
         <p:spPr>
           <a:xfrm>
-            <a:off x="5212080" y="4434840"/>
+            <a:off x="5166360" y="4709160"/>
             <a:ext cx="457200" cy="384048"/>
           </a:xfrm>
           <a:prstGeom prst="rect">
@@ -25832,22 +23833,7 @@
           <a:ln>
             <a:noFill/>
           </a:ln>
-          <a:effectLst/>
-        </p:spPr>
-        <p:style>
-          <a:lnRef idx="1">
-            <a:schemeClr val="accent1"/>
-          </a:lnRef>
-          <a:fillRef idx="3">
-            <a:schemeClr val="accent1"/>
-          </a:fillRef>
-          <a:effectRef idx="2">
-            <a:schemeClr val="accent1"/>
-          </a:effectRef>
-          <a:fontRef idx="minor">
-            <a:schemeClr val="lt1"/>
-          </a:fontRef>
-        </p:style>
+        </p:spPr>
         <p:txBody>
           <a:bodyPr rtlCol="0" anchor="ctr" wrap="square" lIns="54864" rIns="54864" tIns="27432" bIns="27432"/>
           <a:lstStyle/>
@@ -25873,8 +23859,8 @@
         </p:nvSpPr>
         <p:spPr>
           <a:xfrm>
-            <a:off x="5715000" y="4434840"/>
-            <a:ext cx="1280160" cy="384048"/>
+            <a:off x="5669280" y="4709160"/>
+            <a:ext cx="1371599" cy="384048"/>
           </a:xfrm>
           <a:prstGeom prst="rect">
             <a:avLst/>
@@ -25908,8 +23894,8 @@
         </p:nvCxnSpPr>
         <p:spPr>
           <a:xfrm>
-            <a:off x="5212080" y="4434840"/>
-            <a:ext cx="1783080" cy="0"/>
+            <a:off x="5166360" y="4709160"/>
+            <a:ext cx="1874519" cy="0"/>
           </a:xfrm>
           <a:prstGeom prst="line">
             <a:avLst/>
@@ -25943,8 +23929,8 @@
         </p:nvCxnSpPr>
         <p:spPr>
           <a:xfrm>
-            <a:off x="5212080" y="4818888"/>
-            <a:ext cx="1783080" cy="0"/>
+            <a:off x="5166360" y="5093208"/>
+            <a:ext cx="1874519" cy="0"/>
           </a:xfrm>
           <a:prstGeom prst="line">
             <a:avLst/>
@@ -25978,8 +23964,8 @@
         </p:nvSpPr>
         <p:spPr>
           <a:xfrm>
-            <a:off x="8092440" y="4434840"/>
-            <a:ext cx="1783080" cy="384048"/>
+            <a:off x="8001000" y="4434840"/>
+            <a:ext cx="1874519" cy="384048"/>
           </a:xfrm>
           <a:prstGeom prst="rect">
             <a:avLst/>
@@ -25990,22 +23976,7 @@
           <a:ln>
             <a:noFill/>
           </a:ln>
-          <a:effectLst/>
-        </p:spPr>
-        <p:style>
-          <a:lnRef idx="1">
-            <a:schemeClr val="accent1"/>
-          </a:lnRef>
-          <a:fillRef idx="3">
-            <a:schemeClr val="accent1"/>
-          </a:fillRef>
-          <a:effectRef idx="2">
-            <a:schemeClr val="accent1"/>
-          </a:effectRef>
-          <a:fontRef idx="minor">
-            <a:schemeClr val="lt1"/>
-          </a:fontRef>
-        </p:style>
+        </p:spPr>
         <p:txBody>
           <a:bodyPr rtlCol="0" anchor="ctr" wrap="square" lIns="54864" rIns="54864" tIns="27432" bIns="27432"/>
           <a:lstStyle/>
@@ -26022,7 +23993,7 @@
         </p:nvSpPr>
         <p:spPr>
           <a:xfrm>
-            <a:off x="8092440" y="4434840"/>
+            <a:off x="8001000" y="4434840"/>
             <a:ext cx="457200" cy="384048"/>
           </a:xfrm>
           <a:prstGeom prst="rect">
@@ -26034,22 +24005,7 @@
           <a:ln>
             <a:noFill/>
           </a:ln>
-          <a:effectLst/>
-        </p:spPr>
-        <p:style>
-          <a:lnRef idx="1">
-            <a:schemeClr val="accent1"/>
-          </a:lnRef>
-          <a:fillRef idx="3">
-            <a:schemeClr val="accent1"/>
-          </a:fillRef>
-          <a:effectRef idx="2">
-            <a:schemeClr val="accent1"/>
-          </a:effectRef>
-          <a:fontRef idx="minor">
-            <a:schemeClr val="lt1"/>
-          </a:fontRef>
-        </p:style>
+        </p:spPr>
         <p:txBody>
           <a:bodyPr rtlCol="0" anchor="ctr" wrap="square" lIns="54864" rIns="54864" tIns="27432" bIns="27432"/>
           <a:lstStyle/>
@@ -26075,8 +24031,8 @@
         </p:nvSpPr>
         <p:spPr>
           <a:xfrm>
-            <a:off x="8595360" y="4434840"/>
-            <a:ext cx="1280160" cy="384048"/>
+            <a:off x="8503920" y="4434840"/>
+            <a:ext cx="1371599" cy="384048"/>
           </a:xfrm>
           <a:prstGeom prst="rect">
             <a:avLst/>
@@ -26110,8 +24066,8 @@
         </p:nvCxnSpPr>
         <p:spPr>
           <a:xfrm>
-            <a:off x="8092440" y="4434840"/>
-            <a:ext cx="1783080" cy="0"/>
+            <a:off x="8001000" y="4434840"/>
+            <a:ext cx="1874519" cy="0"/>
           </a:xfrm>
           <a:prstGeom prst="line">
             <a:avLst/>
@@ -26145,8 +24101,8 @@
         </p:nvCxnSpPr>
         <p:spPr>
           <a:xfrm>
-            <a:off x="8092440" y="4818888"/>
-            <a:ext cx="1783080" cy="0"/>
+            <a:off x="8001000" y="4818888"/>
+            <a:ext cx="1874519" cy="0"/>
           </a:xfrm>
           <a:prstGeom prst="line">
             <a:avLst/>
@@ -26180,8 +24136,8 @@
         </p:nvSpPr>
         <p:spPr>
           <a:xfrm>
-            <a:off x="274320" y="914400"/>
-            <a:ext cx="1600200" cy="566928"/>
+            <a:off x="274320" y="1051560"/>
+            <a:ext cx="1600200" cy="502920"/>
           </a:xfrm>
           <a:prstGeom prst="rect">
             <a:avLst/>
@@ -26194,22 +24150,7 @@
               <a:srgbClr val="2A78D6"/>
             </a:solidFill>
           </a:ln>
-          <a:effectLst/>
-        </p:spPr>
-        <p:style>
-          <a:lnRef idx="1">
-            <a:schemeClr val="accent1"/>
-          </a:lnRef>
-          <a:fillRef idx="3">
-            <a:schemeClr val="accent1"/>
-          </a:fillRef>
-          <a:effectRef idx="2">
-            <a:schemeClr val="accent1"/>
-          </a:effectRef>
-          <a:fontRef idx="minor">
-            <a:schemeClr val="lt1"/>
-          </a:fontRef>
-        </p:style>
+        </p:spPr>
         <p:txBody>
           <a:bodyPr rtlCol="0" anchor="ctr" wrap="square" lIns="54864" rIns="54864" tIns="27432" bIns="27432"/>
           <a:lstStyle/>
@@ -26235,8 +24176,8 @@
         </p:nvSpPr>
         <p:spPr>
           <a:xfrm>
-            <a:off x="274320" y="1783080"/>
-            <a:ext cx="1600200" cy="566928"/>
+            <a:off x="274320" y="1737360"/>
+            <a:ext cx="1600200" cy="502920"/>
           </a:xfrm>
           <a:prstGeom prst="rect">
             <a:avLst/>
@@ -26249,22 +24190,7 @@
               <a:srgbClr val="2A78D6"/>
             </a:solidFill>
           </a:ln>
-          <a:effectLst/>
-        </p:spPr>
-        <p:style>
-          <a:lnRef idx="1">
-            <a:schemeClr val="accent1"/>
-          </a:lnRef>
-          <a:fillRef idx="3">
-            <a:schemeClr val="accent1"/>
-          </a:fillRef>
-          <a:effectRef idx="2">
-            <a:schemeClr val="accent1"/>
-          </a:effectRef>
-          <a:fontRef idx="minor">
-            <a:schemeClr val="lt1"/>
-          </a:fontRef>
-        </p:style>
+        </p:spPr>
         <p:txBody>
           <a:bodyPr rtlCol="0" anchor="ctr" wrap="square" lIns="54864" rIns="54864" tIns="27432" bIns="27432"/>
           <a:lstStyle/>
@@ -26290,8 +24216,8 @@
         </p:nvSpPr>
         <p:spPr>
           <a:xfrm>
-            <a:off x="274320" y="2651760"/>
-            <a:ext cx="1600200" cy="566928"/>
+            <a:off x="274320" y="2423160"/>
+            <a:ext cx="1600200" cy="502920"/>
           </a:xfrm>
           <a:prstGeom prst="rect">
             <a:avLst/>
@@ -26304,22 +24230,7 @@
               <a:srgbClr val="2A78D6"/>
             </a:solidFill>
           </a:ln>
-          <a:effectLst/>
-        </p:spPr>
-        <p:style>
-          <a:lnRef idx="1">
-            <a:schemeClr val="accent1"/>
-          </a:lnRef>
-          <a:fillRef idx="3">
-            <a:schemeClr val="accent1"/>
-          </a:fillRef>
-          <a:effectRef idx="2">
-            <a:schemeClr val="accent1"/>
-          </a:effectRef>
-          <a:fontRef idx="minor">
-            <a:schemeClr val="lt1"/>
-          </a:fontRef>
-        </p:style>
+        </p:spPr>
         <p:txBody>
           <a:bodyPr rtlCol="0" anchor="ctr" wrap="square" lIns="54864" rIns="54864" tIns="27432" bIns="27432"/>
           <a:lstStyle/>
@@ -26345,8 +24256,8 @@
         </p:nvSpPr>
         <p:spPr>
           <a:xfrm>
-            <a:off x="5303520" y="566928"/>
-            <a:ext cx="1600200" cy="457200"/>
+            <a:off x="274320" y="3154680"/>
+            <a:ext cx="1600200" cy="502920"/>
           </a:xfrm>
           <a:prstGeom prst="rect">
             <a:avLst/>
@@ -26359,22 +24270,7 @@
               <a:srgbClr val="2A78D6"/>
             </a:solidFill>
           </a:ln>
-          <a:effectLst/>
-        </p:spPr>
-        <p:style>
-          <a:lnRef idx="1">
-            <a:schemeClr val="accent1"/>
-          </a:lnRef>
-          <a:fillRef idx="3">
-            <a:schemeClr val="accent1"/>
-          </a:fillRef>
-          <a:effectRef idx="2">
-            <a:schemeClr val="accent1"/>
-          </a:effectRef>
-          <a:fontRef idx="minor">
-            <a:schemeClr val="lt1"/>
-          </a:fontRef>
-        </p:style>
+        </p:spPr>
         <p:txBody>
           <a:bodyPr rtlCol="0" anchor="ctr" wrap="square" lIns="54864" rIns="54864" tIns="27432" bIns="27432"/>
           <a:lstStyle/>
@@ -26387,7 +24283,7 @@
                 </a:solidFill>
                 <a:latin typeface="Calibri"/>
               </a:rPr>
-              <a:t>Kitchen staff</a:t>
+              <a:t>Payment gateway</a:t>
             </a:r>
           </a:p>
         </p:txBody>
@@ -26400,8 +24296,8 @@
         </p:nvSpPr>
         <p:spPr>
           <a:xfrm>
-            <a:off x="10332720" y="1005840"/>
-            <a:ext cx="1600200" cy="566928"/>
+            <a:off x="274320" y="3840480"/>
+            <a:ext cx="1600200" cy="502920"/>
           </a:xfrm>
           <a:prstGeom prst="rect">
             <a:avLst/>
@@ -26414,22 +24310,7 @@
               <a:srgbClr val="2A78D6"/>
             </a:solidFill>
           </a:ln>
-          <a:effectLst/>
-        </p:spPr>
-        <p:style>
-          <a:lnRef idx="1">
-            <a:schemeClr val="accent1"/>
-          </a:lnRef>
-          <a:fillRef idx="3">
-            <a:schemeClr val="accent1"/>
-          </a:fillRef>
-          <a:effectRef idx="2">
-            <a:schemeClr val="accent1"/>
-          </a:effectRef>
-          <a:fontRef idx="minor">
-            <a:schemeClr val="lt1"/>
-          </a:fontRef>
-        </p:style>
+        </p:spPr>
         <p:txBody>
           <a:bodyPr rtlCol="0" anchor="ctr" wrap="square" lIns="54864" rIns="54864" tIns="27432" bIns="27432"/>
           <a:lstStyle/>
@@ -26442,7 +24323,7 @@
                 </a:solidFill>
                 <a:latin typeface="Calibri"/>
               </a:rPr>
-              <a:t>Rider</a:t>
+              <a:t>FBR</a:t>
             </a:r>
           </a:p>
         </p:txBody>
@@ -26455,8 +24336,8 @@
         </p:nvSpPr>
         <p:spPr>
           <a:xfrm>
-            <a:off x="274320" y="3886200"/>
-            <a:ext cx="1600200" cy="566928"/>
+            <a:off x="5303520" y="566928"/>
+            <a:ext cx="1600200" cy="411480"/>
           </a:xfrm>
           <a:prstGeom prst="rect">
             <a:avLst/>
@@ -26469,22 +24350,7 @@
               <a:srgbClr val="2A78D6"/>
             </a:solidFill>
           </a:ln>
-          <a:effectLst/>
-        </p:spPr>
-        <p:style>
-          <a:lnRef idx="1">
-            <a:schemeClr val="accent1"/>
-          </a:lnRef>
-          <a:fillRef idx="3">
-            <a:schemeClr val="accent1"/>
-          </a:fillRef>
-          <a:effectRef idx="2">
-            <a:schemeClr val="accent1"/>
-          </a:effectRef>
-          <a:fontRef idx="minor">
-            <a:schemeClr val="lt1"/>
-          </a:fontRef>
-        </p:style>
+        </p:spPr>
         <p:txBody>
           <a:bodyPr rtlCol="0" anchor="ctr" wrap="square" lIns="54864" rIns="54864" tIns="27432" bIns="27432"/>
           <a:lstStyle/>
@@ -26497,7 +24363,7 @@
                 </a:solidFill>
                 <a:latin typeface="Calibri"/>
               </a:rPr>
-              <a:t>Payment gateway</a:t>
+              <a:t>Kitchen staff</a:t>
             </a:r>
           </a:p>
         </p:txBody>
@@ -26510,8 +24376,8 @@
         </p:nvSpPr>
         <p:spPr>
           <a:xfrm>
-            <a:off x="274320" y="4709160"/>
-            <a:ext cx="1600200" cy="566928"/>
+            <a:off x="10287000" y="1371600"/>
+            <a:ext cx="1600200" cy="502920"/>
           </a:xfrm>
           <a:prstGeom prst="rect">
             <a:avLst/>
@@ -26524,22 +24390,7 @@
               <a:srgbClr val="2A78D6"/>
             </a:solidFill>
           </a:ln>
-          <a:effectLst/>
-        </p:spPr>
-        <p:style>
-          <a:lnRef idx="1">
-            <a:schemeClr val="accent1"/>
-          </a:lnRef>
-          <a:fillRef idx="3">
-            <a:schemeClr val="accent1"/>
-          </a:fillRef>
-          <a:effectRef idx="2">
-            <a:schemeClr val="accent1"/>
-          </a:effectRef>
-          <a:fontRef idx="minor">
-            <a:schemeClr val="lt1"/>
-          </a:fontRef>
-        </p:style>
+        </p:spPr>
         <p:txBody>
           <a:bodyPr rtlCol="0" anchor="ctr" wrap="square" lIns="54864" rIns="54864" tIns="27432" bIns="27432"/>
           <a:lstStyle/>
@@ -26552,7 +24403,7 @@
                 </a:solidFill>
                 <a:latin typeface="Calibri"/>
               </a:rPr>
-              <a:t>FBR</a:t>
+              <a:t>Rider</a:t>
             </a:r>
           </a:p>
         </p:txBody>
@@ -26565,8 +24416,8 @@
         </p:nvSpPr>
         <p:spPr>
           <a:xfrm>
-            <a:off x="10332720" y="3337560"/>
-            <a:ext cx="1600200" cy="566928"/>
+            <a:off x="10287000" y="2743200"/>
+            <a:ext cx="1600200" cy="502920"/>
           </a:xfrm>
           <a:prstGeom prst="rect">
             <a:avLst/>
@@ -26579,22 +24430,7 @@
               <a:srgbClr val="2A78D6"/>
             </a:solidFill>
           </a:ln>
-          <a:effectLst/>
-        </p:spPr>
-        <p:style>
-          <a:lnRef idx="1">
-            <a:schemeClr val="accent1"/>
-          </a:lnRef>
-          <a:fillRef idx="3">
-            <a:schemeClr val="accent1"/>
-          </a:fillRef>
-          <a:effectRef idx="2">
-            <a:schemeClr val="accent1"/>
-          </a:effectRef>
-          <a:fontRef idx="minor">
-            <a:schemeClr val="lt1"/>
-          </a:fontRef>
-        </p:style>
+        </p:spPr>
         <p:txBody>
           <a:bodyPr rtlCol="0" anchor="ctr" wrap="square" lIns="54864" rIns="54864" tIns="27432" bIns="27432"/>
           <a:lstStyle/>
@@ -26620,8 +24456,8 @@
         </p:nvSpPr>
         <p:spPr>
           <a:xfrm>
-            <a:off x="8366760" y="5486400"/>
-            <a:ext cx="1600200" cy="566928"/>
+            <a:off x="8001000" y="5532120"/>
+            <a:ext cx="1874520" cy="502920"/>
           </a:xfrm>
           <a:prstGeom prst="rect">
             <a:avLst/>
@@ -26634,22 +24470,7 @@
               <a:srgbClr val="2A78D6"/>
             </a:solidFill>
           </a:ln>
-          <a:effectLst/>
-        </p:spPr>
-        <p:style>
-          <a:lnRef idx="1">
-            <a:schemeClr val="accent1"/>
-          </a:lnRef>
-          <a:fillRef idx="3">
-            <a:schemeClr val="accent1"/>
-          </a:fillRef>
-          <a:effectRef idx="2">
-            <a:schemeClr val="accent1"/>
-          </a:effectRef>
-          <a:fontRef idx="minor">
-            <a:schemeClr val="lt1"/>
-          </a:fontRef>
-        </p:style>
+        </p:spPr>
         <p:txBody>
           <a:bodyPr rtlCol="0" anchor="ctr" wrap="square" lIns="54864" rIns="54864" tIns="27432" bIns="27432"/>
           <a:lstStyle/>
@@ -26675,8 +24496,8 @@
         </p:nvSpPr>
         <p:spPr>
           <a:xfrm>
-            <a:off x="2606040" y="5486400"/>
-            <a:ext cx="1600200" cy="566928"/>
+            <a:off x="274320" y="5532120"/>
+            <a:ext cx="1874520" cy="502920"/>
           </a:xfrm>
           <a:prstGeom prst="rect">
             <a:avLst/>
@@ -26689,22 +24510,7 @@
               <a:srgbClr val="2A78D6"/>
             </a:solidFill>
           </a:ln>
-          <a:effectLst/>
-        </p:spPr>
-        <p:style>
-          <a:lnRef idx="1">
-            <a:schemeClr val="accent1"/>
-          </a:lnRef>
-          <a:fillRef idx="3">
-            <a:schemeClr val="accent1"/>
-          </a:fillRef>
-          <a:effectRef idx="2">
-            <a:schemeClr val="accent1"/>
-          </a:effectRef>
-          <a:fontRef idx="minor">
-            <a:schemeClr val="lt1"/>
-          </a:fontRef>
-        </p:style>
+        </p:spPr>
         <p:txBody>
           <a:bodyPr rtlCol="0" anchor="ctr" wrap="square" lIns="54864" rIns="54864" tIns="27432" bIns="27432"/>
           <a:lstStyle/>
@@ -26730,8 +24536,8 @@
         </p:nvCxnSpPr>
         <p:spPr>
           <a:xfrm>
-            <a:off x="1874520" y="1197864"/>
-            <a:ext cx="411480" cy="196596"/>
+            <a:off x="1874520" y="1303020"/>
+            <a:ext cx="457200" cy="251460"/>
           </a:xfrm>
           <a:prstGeom prst="line">
             <a:avLst/>
@@ -26743,20 +24549,6 @@
             <a:tailEnd type="triangle" w="med" len="med"/>
           </a:ln>
         </p:spPr>
-        <p:style>
-          <a:lnRef idx="2">
-            <a:schemeClr val="accent1"/>
-          </a:lnRef>
-          <a:fillRef idx="0">
-            <a:schemeClr val="accent1"/>
-          </a:fillRef>
-          <a:effectRef idx="1">
-            <a:schemeClr val="accent1"/>
-          </a:effectRef>
-          <a:fontRef idx="minor">
-            <a:schemeClr val="tx1"/>
-          </a:fontRef>
-        </p:style>
       </p:cxnSp>
       <p:sp>
         <p:nvSpPr>
@@ -26766,8 +24558,8 @@
         </p:nvSpPr>
         <p:spPr>
           <a:xfrm>
-            <a:off x="1783080" y="1051560"/>
-            <a:ext cx="1645920" cy="274320"/>
+            <a:off x="1892808" y="1046988"/>
+            <a:ext cx="457200" cy="219456"/>
           </a:xfrm>
           <a:prstGeom prst="rect">
             <a:avLst/>
@@ -26784,7 +24576,7 @@
           <a:p>
             <a:pPr algn="ctr"/>
             <a:r>
-              <a:rPr sz="800" b="0" i="0">
+              <a:rPr sz="900" b="0" i="0">
                 <a:solidFill>
                   <a:srgbClr val="1E293B"/>
                 </a:solidFill>
@@ -26803,8 +24595,8 @@
         </p:nvCxnSpPr>
         <p:spPr>
           <a:xfrm flipV="1">
-            <a:off x="1874520" y="1668780"/>
-            <a:ext cx="411480" cy="397764"/>
+            <a:off x="1874520" y="1911096"/>
+            <a:ext cx="457200" cy="77724"/>
           </a:xfrm>
           <a:prstGeom prst="line">
             <a:avLst/>
@@ -26816,20 +24608,6 @@
             <a:tailEnd type="triangle" w="med" len="med"/>
           </a:ln>
         </p:spPr>
-        <p:style>
-          <a:lnRef idx="2">
-            <a:schemeClr val="accent1"/>
-          </a:lnRef>
-          <a:fillRef idx="0">
-            <a:schemeClr val="accent1"/>
-          </a:fillRef>
-          <a:effectRef idx="1">
-            <a:schemeClr val="accent1"/>
-          </a:effectRef>
-          <a:fontRef idx="minor">
-            <a:schemeClr val="tx1"/>
-          </a:fontRef>
-        </p:style>
       </p:cxnSp>
       <p:sp>
         <p:nvSpPr>
@@ -26839,8 +24617,8 @@
         </p:nvSpPr>
         <p:spPr>
           <a:xfrm>
-            <a:off x="1691640" y="1627632"/>
-            <a:ext cx="1645920" cy="274320"/>
+            <a:off x="1828800" y="2007108"/>
+            <a:ext cx="731520" cy="219456"/>
           </a:xfrm>
           <a:prstGeom prst="rect">
             <a:avLst/>
@@ -26857,13 +24635,13 @@
           <a:p>
             <a:pPr algn="ctr"/>
             <a:r>
-              <a:rPr sz="800" b="0" i="0">
-                <a:solidFill>
-                  <a:srgbClr val="1E293B"/>
-                </a:solidFill>
-                <a:latin typeface="Calibri"/>
-              </a:rPr>
-              <a:t>sale / rounds</a:t>
+              <a:rPr sz="900" b="0" i="0">
+                <a:solidFill>
+                  <a:srgbClr val="1E293B"/>
+                </a:solidFill>
+                <a:latin typeface="Calibri"/>
+              </a:rPr>
+              <a:t>sale, rounds</a:t>
             </a:r>
           </a:p>
         </p:txBody>
@@ -26876,8 +24654,8 @@
         </p:nvCxnSpPr>
         <p:spPr>
           <a:xfrm flipV="1">
-            <a:off x="1874520" y="1965960"/>
-            <a:ext cx="640080" cy="969264"/>
+            <a:off x="1874520" y="2130552"/>
+            <a:ext cx="731520" cy="544068"/>
           </a:xfrm>
           <a:prstGeom prst="line">
             <a:avLst/>
@@ -26889,20 +24667,6 @@
             <a:tailEnd type="triangle" w="med" len="med"/>
           </a:ln>
         </p:spPr>
-        <p:style>
-          <a:lnRef idx="2">
-            <a:schemeClr val="accent1"/>
-          </a:lnRef>
-          <a:fillRef idx="0">
-            <a:schemeClr val="accent1"/>
-          </a:fillRef>
-          <a:effectRef idx="1">
-            <a:schemeClr val="accent1"/>
-          </a:effectRef>
-          <a:fontRef idx="minor">
-            <a:schemeClr val="tx1"/>
-          </a:fontRef>
-        </p:style>
       </p:cxnSp>
       <p:sp>
         <p:nvSpPr>
@@ -26912,8 +24676,8 @@
         </p:nvSpPr>
         <p:spPr>
           <a:xfrm>
-            <a:off x="1645920" y="2423160"/>
-            <a:ext cx="1645920" cy="274320"/>
+            <a:off x="1856232" y="2692908"/>
+            <a:ext cx="548640" cy="219456"/>
           </a:xfrm>
           <a:prstGeom prst="rect">
             <a:avLst/>
@@ -26930,7 +24694,7 @@
           <a:p>
             <a:pPr algn="ctr"/>
             <a:r>
-              <a:rPr sz="800" b="0" i="0">
+              <a:rPr sz="900" b="0" i="0">
                 <a:solidFill>
                   <a:srgbClr val="1E293B"/>
                 </a:solidFill>
@@ -26948,9 +24712,68 @@
           <p:nvPr/>
         </p:nvCxnSpPr>
         <p:spPr>
-          <a:xfrm>
-            <a:off x="3223259" y="1965960"/>
-            <a:ext cx="1" cy="411480"/>
+          <a:xfrm flipH="1" flipV="1">
+            <a:off x="1874520" y="1161288"/>
+            <a:ext cx="6492240" cy="256032"/>
+          </a:xfrm>
+          <a:prstGeom prst="line">
+            <a:avLst/>
+          </a:prstGeom>
+          <a:ln w="15875">
+            <a:solidFill>
+              <a:srgbClr val="0D9488"/>
+            </a:solidFill>
+            <a:tailEnd type="triangle" w="med" len="med"/>
+          </a:ln>
+        </p:spPr>
+      </p:cxnSp>
+      <p:sp>
+        <p:nvSpPr>
+          <p:cNvPr id="61" name="TextBox 60"/>
+          <p:cNvSpPr txBox="1"/>
+          <p:nvPr/>
+        </p:nvSpPr>
+        <p:spPr>
+          <a:xfrm>
+            <a:off x="6903720" y="1051560"/>
+            <a:ext cx="822960" cy="219456"/>
+          </a:xfrm>
+          <a:prstGeom prst="rect">
+            <a:avLst/>
+          </a:prstGeom>
+          <a:solidFill>
+            <a:srgbClr val="FFFFFF"/>
+          </a:solidFill>
+        </p:spPr>
+        <p:txBody>
+          <a:bodyPr wrap="square" lIns="45720" rIns="45720" tIns="18288" bIns="18288" anchor="t">
+            <a:spAutoFit/>
+          </a:bodyPr>
+          <a:lstStyle/>
+          <a:p>
+            <a:pPr algn="ctr"/>
+            <a:r>
+              <a:rPr sz="900" b="0" i="0">
+                <a:solidFill>
+                  <a:srgbClr val="0B5E57"/>
+                </a:solidFill>
+                <a:latin typeface="Calibri"/>
+              </a:rPr>
+              <a:t>live tracking</a:t>
+            </a:r>
+          </a:p>
+        </p:txBody>
+      </p:sp>
+      <p:cxnSp>
+        <p:nvCxnSpPr>
+          <p:cNvPr id="62" name="Connector 61"/>
+          <p:cNvCxnSpPr/>
+          <p:nvPr/>
+        </p:nvCxnSpPr>
+        <p:spPr>
+          <a:xfrm>
+            <a:off x="3268979" y="2130552"/>
+            <a:ext cx="0" cy="356616"/>
           </a:xfrm>
           <a:prstGeom prst="line">
             <a:avLst/>
@@ -26962,31 +24785,17 @@
             <a:tailEnd type="triangle" w="med" len="med"/>
           </a:ln>
         </p:spPr>
-        <p:style>
-          <a:lnRef idx="2">
-            <a:schemeClr val="accent1"/>
-          </a:lnRef>
-          <a:fillRef idx="0">
-            <a:schemeClr val="accent1"/>
-          </a:fillRef>
-          <a:effectRef idx="1">
-            <a:schemeClr val="accent1"/>
-          </a:effectRef>
-          <a:fontRef idx="minor">
-            <a:schemeClr val="tx1"/>
-          </a:fontRef>
-        </p:style>
       </p:cxnSp>
       <p:sp>
         <p:nvSpPr>
-          <p:cNvPr id="61" name="TextBox 60"/>
+          <p:cNvPr id="63" name="TextBox 62"/>
           <p:cNvSpPr txBox="1"/>
           <p:nvPr/>
         </p:nvSpPr>
         <p:spPr>
           <a:xfrm>
-            <a:off x="3246120" y="2057400"/>
-            <a:ext cx="1645920" cy="274320"/>
+            <a:off x="2400299" y="2203704"/>
+            <a:ext cx="685800" cy="219456"/>
           </a:xfrm>
           <a:prstGeom prst="rect">
             <a:avLst/>
@@ -27003,7 +24812,7 @@
           <a:p>
             <a:pPr algn="ctr"/>
             <a:r>
-              <a:rPr sz="800" b="0" i="0">
+              <a:rPr sz="900" b="0" i="0">
                 <a:solidFill>
                   <a:srgbClr val="1E293B"/>
                 </a:solidFill>
@@ -27016,14 +24825,14 @@
       </p:sp>
       <p:cxnSp>
         <p:nvCxnSpPr>
-          <p:cNvPr id="62" name="Connector 61"/>
+          <p:cNvPr id="64" name="Connector 63"/>
           <p:cNvCxnSpPr/>
           <p:nvPr/>
         </p:nvCxnSpPr>
         <p:spPr>
           <a:xfrm flipH="1" flipV="1">
-            <a:off x="3977639" y="1965960"/>
-            <a:ext cx="1234441" cy="530352"/>
+            <a:off x="4069079" y="2130552"/>
+            <a:ext cx="1097281" cy="402336"/>
           </a:xfrm>
           <a:prstGeom prst="line">
             <a:avLst/>
@@ -27035,31 +24844,17 @@
             <a:tailEnd type="triangle" w="med" len="med"/>
           </a:ln>
         </p:spPr>
-        <p:style>
-          <a:lnRef idx="2">
-            <a:schemeClr val="accent1"/>
-          </a:lnRef>
-          <a:fillRef idx="0">
-            <a:schemeClr val="accent1"/>
-          </a:fillRef>
-          <a:effectRef idx="1">
-            <a:schemeClr val="accent1"/>
-          </a:effectRef>
-          <a:fontRef idx="minor">
-            <a:schemeClr val="tx1"/>
-          </a:fontRef>
-        </p:style>
       </p:cxnSp>
       <p:sp>
         <p:nvSpPr>
-          <p:cNvPr id="63" name="TextBox 62"/>
+          <p:cNvPr id="65" name="TextBox 64"/>
           <p:cNvSpPr txBox="1"/>
           <p:nvPr/>
         </p:nvSpPr>
         <p:spPr>
           <a:xfrm>
-            <a:off x="4160520" y="2057400"/>
-            <a:ext cx="1645920" cy="274320"/>
+            <a:off x="4480560" y="2185416"/>
+            <a:ext cx="457200" cy="219456"/>
           </a:xfrm>
           <a:prstGeom prst="rect">
             <a:avLst/>
@@ -27076,27 +24871,27 @@
           <a:p>
             <a:pPr algn="ctr"/>
             <a:r>
-              <a:rPr sz="800" b="0" i="0">
-                <a:solidFill>
-                  <a:srgbClr val="1E293B"/>
-                </a:solidFill>
-                <a:latin typeface="Calibri"/>
-              </a:rPr>
-              <a:t>prices, stock</a:t>
+              <a:rPr sz="900" b="0" i="0">
+                <a:solidFill>
+                  <a:srgbClr val="1E293B"/>
+                </a:solidFill>
+                <a:latin typeface="Calibri"/>
+              </a:rPr>
+              <a:t>prices</a:t>
             </a:r>
           </a:p>
         </p:txBody>
       </p:sp>
       <p:cxnSp>
         <p:nvCxnSpPr>
-          <p:cNvPr id="64" name="Connector 63"/>
+          <p:cNvPr id="66" name="Connector 65"/>
           <p:cNvCxnSpPr/>
           <p:nvPr/>
         </p:nvCxnSpPr>
         <p:spPr>
           <a:xfrm>
-            <a:off x="4160519" y="1577340"/>
-            <a:ext cx="1005841" cy="0"/>
+            <a:off x="4206239" y="1773936"/>
+            <a:ext cx="960121" cy="0"/>
           </a:xfrm>
           <a:prstGeom prst="line">
             <a:avLst/>
@@ -27108,31 +24903,17 @@
             <a:tailEnd type="triangle" w="med" len="med"/>
           </a:ln>
         </p:spPr>
-        <p:style>
-          <a:lnRef idx="2">
-            <a:schemeClr val="accent1"/>
-          </a:lnRef>
-          <a:fillRef idx="0">
-            <a:schemeClr val="accent1"/>
-          </a:fillRef>
-          <a:effectRef idx="1">
-            <a:schemeClr val="accent1"/>
-          </a:effectRef>
-          <a:fontRef idx="minor">
-            <a:schemeClr val="tx1"/>
-          </a:fontRef>
-        </p:style>
       </p:cxnSp>
       <p:sp>
         <p:nvSpPr>
-          <p:cNvPr id="65" name="TextBox 64"/>
+          <p:cNvPr id="67" name="TextBox 66"/>
           <p:cNvSpPr txBox="1"/>
           <p:nvPr/>
         </p:nvSpPr>
         <p:spPr>
           <a:xfrm>
-            <a:off x="4251960" y="1325880"/>
-            <a:ext cx="1645920" cy="274320"/>
+            <a:off x="4480559" y="1517904"/>
+            <a:ext cx="548640" cy="219456"/>
           </a:xfrm>
           <a:prstGeom prst="rect">
             <a:avLst/>
@@ -27149,7 +24930,7 @@
           <a:p>
             <a:pPr algn="ctr"/>
             <a:r>
-              <a:rPr sz="800" b="0" i="0">
+              <a:rPr sz="900" b="0" i="0">
                 <a:solidFill>
                   <a:srgbClr val="1E293B"/>
                 </a:solidFill>
@@ -27162,14 +24943,14 @@
       </p:sp>
       <p:cxnSp>
         <p:nvCxnSpPr>
-          <p:cNvPr id="66" name="Connector 65"/>
+          <p:cNvPr id="68" name="Connector 67"/>
           <p:cNvCxnSpPr/>
           <p:nvPr/>
         </p:nvCxnSpPr>
         <p:spPr>
-          <a:xfrm flipH="1">
-            <a:off x="6103619" y="1024128"/>
-            <a:ext cx="1" cy="164592"/>
+          <a:xfrm>
+            <a:off x="6103620" y="978408"/>
+            <a:ext cx="0" cy="438912"/>
           </a:xfrm>
           <a:prstGeom prst="line">
             <a:avLst/>
@@ -27182,36 +24963,24 @@
             <a:headEnd type="triangle" w="med" len="med"/>
           </a:ln>
         </p:spPr>
-        <p:style>
-          <a:lnRef idx="2">
-            <a:schemeClr val="accent1"/>
-          </a:lnRef>
-          <a:fillRef idx="0">
-            <a:schemeClr val="accent1"/>
-          </a:fillRef>
-          <a:effectRef idx="1">
-            <a:schemeClr val="accent1"/>
-          </a:effectRef>
-          <a:fontRef idx="minor">
-            <a:schemeClr val="tx1"/>
-          </a:fontRef>
-        </p:style>
       </p:cxnSp>
       <p:sp>
         <p:nvSpPr>
-          <p:cNvPr id="67" name="TextBox 66"/>
+          <p:cNvPr id="69" name="TextBox 68"/>
           <p:cNvSpPr txBox="1"/>
           <p:nvPr/>
         </p:nvSpPr>
         <p:spPr>
           <a:xfrm>
-            <a:off x="6949440" y="896112"/>
-            <a:ext cx="1188720" cy="274320"/>
-          </a:xfrm>
-          <a:prstGeom prst="rect">
-            <a:avLst/>
-          </a:prstGeom>
-          <a:noFill/>
+            <a:off x="6195060" y="1024128"/>
+            <a:ext cx="1005840" cy="219456"/>
+          </a:xfrm>
+          <a:prstGeom prst="rect">
+            <a:avLst/>
+          </a:prstGeom>
+          <a:solidFill>
+            <a:srgbClr val="FFFFFF"/>
+          </a:solidFill>
         </p:spPr>
         <p:txBody>
           <a:bodyPr wrap="square" lIns="45720" rIns="45720" tIns="18288" bIns="18288" anchor="t">
@@ -27219,9 +24988,9 @@
           </a:bodyPr>
           <a:lstStyle/>
           <a:p>
-            <a:pPr algn="l"/>
-            <a:r>
-              <a:rPr sz="800" b="0" i="0">
+            <a:pPr algn="ctr"/>
+            <a:r>
+              <a:rPr sz="900" b="0" i="0">
                 <a:solidFill>
                   <a:srgbClr val="1E293B"/>
                 </a:solidFill>
@@ -27234,14 +25003,14 @@
       </p:sp>
       <p:cxnSp>
         <p:nvCxnSpPr>
-          <p:cNvPr id="68" name="Connector 67"/>
+          <p:cNvPr id="70" name="Connector 69"/>
           <p:cNvCxnSpPr/>
           <p:nvPr/>
         </p:nvCxnSpPr>
         <p:spPr>
           <a:xfrm flipH="1">
-            <a:off x="4023360" y="1965960"/>
-            <a:ext cx="1325880" cy="411480"/>
+            <a:off x="4023359" y="2130552"/>
+            <a:ext cx="1280161" cy="356616"/>
           </a:xfrm>
           <a:prstGeom prst="line">
             <a:avLst/>
@@ -27253,31 +25022,17 @@
             <a:tailEnd type="triangle" w="med" len="med"/>
           </a:ln>
         </p:spPr>
-        <p:style>
-          <a:lnRef idx="2">
-            <a:schemeClr val="accent1"/>
-          </a:lnRef>
-          <a:fillRef idx="0">
-            <a:schemeClr val="accent1"/>
-          </a:fillRef>
-          <a:effectRef idx="1">
-            <a:schemeClr val="accent1"/>
-          </a:effectRef>
-          <a:fontRef idx="minor">
-            <a:schemeClr val="tx1"/>
-          </a:fontRef>
-        </p:style>
       </p:cxnSp>
       <p:sp>
         <p:nvSpPr>
-          <p:cNvPr id="69" name="TextBox 68"/>
+          <p:cNvPr id="71" name="TextBox 70"/>
           <p:cNvSpPr txBox="1"/>
           <p:nvPr/>
         </p:nvSpPr>
         <p:spPr>
           <a:xfrm>
-            <a:off x="4160520" y="1828800"/>
-            <a:ext cx="1645920" cy="274320"/>
+            <a:off x="4983480" y="2331720"/>
+            <a:ext cx="457200" cy="219456"/>
           </a:xfrm>
           <a:prstGeom prst="rect">
             <a:avLst/>
@@ -27294,7 +25049,7 @@
           <a:p>
             <a:pPr algn="ctr"/>
             <a:r>
-              <a:rPr sz="800" b="0" i="0">
+              <a:rPr sz="900" b="0" i="0">
                 <a:solidFill>
                   <a:srgbClr val="1E293B"/>
                 </a:solidFill>
@@ -27307,14 +25062,14 @@
       </p:sp>
       <p:cxnSp>
         <p:nvCxnSpPr>
-          <p:cNvPr id="70" name="Connector 69"/>
+          <p:cNvPr id="72" name="Connector 71"/>
           <p:cNvCxnSpPr/>
           <p:nvPr/>
         </p:nvCxnSpPr>
         <p:spPr>
           <a:xfrm>
-            <a:off x="7040879" y="1577340"/>
-            <a:ext cx="1005841" cy="0"/>
+            <a:off x="7040879" y="1773936"/>
+            <a:ext cx="960121" cy="0"/>
           </a:xfrm>
           <a:prstGeom prst="line">
             <a:avLst/>
@@ -27326,31 +25081,17 @@
             <a:tailEnd type="triangle" w="med" len="med"/>
           </a:ln>
         </p:spPr>
-        <p:style>
-          <a:lnRef idx="2">
-            <a:schemeClr val="accent1"/>
-          </a:lnRef>
-          <a:fillRef idx="0">
-            <a:schemeClr val="accent1"/>
-          </a:fillRef>
-          <a:effectRef idx="1">
-            <a:schemeClr val="accent1"/>
-          </a:effectRef>
-          <a:fontRef idx="minor">
-            <a:schemeClr val="tx1"/>
-          </a:fontRef>
-        </p:style>
       </p:cxnSp>
       <p:sp>
         <p:nvSpPr>
-          <p:cNvPr id="71" name="TextBox 70"/>
+          <p:cNvPr id="73" name="TextBox 72"/>
           <p:cNvSpPr txBox="1"/>
           <p:nvPr/>
         </p:nvSpPr>
         <p:spPr>
           <a:xfrm>
-            <a:off x="7132320" y="1325880"/>
-            <a:ext cx="1645920" cy="274320"/>
+            <a:off x="7178039" y="1517904"/>
+            <a:ext cx="868680" cy="219456"/>
           </a:xfrm>
           <a:prstGeom prst="rect">
             <a:avLst/>
@@ -27367,7 +25108,7 @@
           <a:p>
             <a:pPr algn="ctr"/>
             <a:r>
-              <a:rPr sz="800" b="0" i="0">
+              <a:rPr sz="900" b="0" i="0">
                 <a:solidFill>
                   <a:srgbClr val="1E293B"/>
                 </a:solidFill>
@@ -27380,14 +25121,73 @@
       </p:sp>
       <p:cxnSp>
         <p:nvCxnSpPr>
-          <p:cNvPr id="72" name="Connector 71"/>
+          <p:cNvPr id="74" name="Connector 73"/>
           <p:cNvCxnSpPr/>
           <p:nvPr/>
         </p:nvCxnSpPr>
         <p:spPr>
           <a:xfrm flipV="1">
-            <a:off x="9921239" y="1152144"/>
-            <a:ext cx="411481" cy="288036"/>
+            <a:off x="9875519" y="1513332"/>
+            <a:ext cx="411481" cy="150876"/>
+          </a:xfrm>
+          <a:prstGeom prst="line">
+            <a:avLst/>
+          </a:prstGeom>
+          <a:ln w="15875">
+            <a:solidFill>
+              <a:srgbClr val="0D9488"/>
+            </a:solidFill>
+            <a:tailEnd type="triangle" w="med" len="med"/>
+          </a:ln>
+        </p:spPr>
+      </p:cxnSp>
+      <p:sp>
+        <p:nvSpPr>
+          <p:cNvPr id="75" name="TextBox 74"/>
+          <p:cNvSpPr txBox="1"/>
+          <p:nvPr/>
+        </p:nvSpPr>
+        <p:spPr>
+          <a:xfrm>
+            <a:off x="9921239" y="1408176"/>
+            <a:ext cx="411480" cy="219456"/>
+          </a:xfrm>
+          <a:prstGeom prst="rect">
+            <a:avLst/>
+          </a:prstGeom>
+          <a:solidFill>
+            <a:srgbClr val="FFFFFF"/>
+          </a:solidFill>
+        </p:spPr>
+        <p:txBody>
+          <a:bodyPr wrap="square" lIns="45720" rIns="45720" tIns="18288" bIns="18288" anchor="t">
+            <a:spAutoFit/>
+          </a:bodyPr>
+          <a:lstStyle/>
+          <a:p>
+            <a:pPr algn="ctr"/>
+            <a:r>
+              <a:rPr sz="900" b="0" i="0">
+                <a:solidFill>
+                  <a:srgbClr val="0B5E57"/>
+                </a:solidFill>
+                <a:latin typeface="Calibri"/>
+              </a:rPr>
+              <a:t>offer</a:t>
+            </a:r>
+          </a:p>
+        </p:txBody>
+      </p:sp>
+      <p:cxnSp>
+        <p:nvCxnSpPr>
+          <p:cNvPr id="76" name="Connector 75"/>
+          <p:cNvCxnSpPr/>
+          <p:nvPr/>
+        </p:nvCxnSpPr>
+        <p:spPr>
+          <a:xfrm flipH="1">
+            <a:off x="9875519" y="1732788"/>
+            <a:ext cx="411481" cy="150876"/>
           </a:xfrm>
           <a:prstGeom prst="line">
             <a:avLst/>
@@ -27399,31 +25199,17 @@
             <a:tailEnd type="triangle" w="med" len="med"/>
           </a:ln>
         </p:spPr>
-        <p:style>
-          <a:lnRef idx="2">
-            <a:schemeClr val="accent1"/>
-          </a:lnRef>
-          <a:fillRef idx="0">
-            <a:schemeClr val="accent1"/>
-          </a:fillRef>
-          <a:effectRef idx="1">
-            <a:schemeClr val="accent1"/>
-          </a:effectRef>
-          <a:fontRef idx="minor">
-            <a:schemeClr val="tx1"/>
-          </a:fontRef>
-        </p:style>
       </p:cxnSp>
       <p:sp>
         <p:nvSpPr>
-          <p:cNvPr id="73" name="TextBox 72"/>
+          <p:cNvPr id="77" name="TextBox 76"/>
           <p:cNvSpPr txBox="1"/>
           <p:nvPr/>
         </p:nvSpPr>
         <p:spPr>
           <a:xfrm>
-            <a:off x="9829800" y="960120"/>
-            <a:ext cx="1645920" cy="274320"/>
+            <a:off x="9829799" y="1920240"/>
+            <a:ext cx="914400" cy="219456"/>
           </a:xfrm>
           <a:prstGeom prst="rect">
             <a:avLst/>
@@ -27440,100 +25226,27 @@
           <a:p>
             <a:pPr algn="ctr"/>
             <a:r>
-              <a:rPr sz="800" b="0" i="0">
-                <a:solidFill>
-                  <a:srgbClr val="1E293B"/>
-                </a:solidFill>
-                <a:latin typeface="Calibri"/>
-              </a:rPr>
-              <a:t>offer</a:t>
+              <a:rPr sz="900" b="0" i="0">
+                <a:solidFill>
+                  <a:srgbClr val="1E293B"/>
+                </a:solidFill>
+                <a:latin typeface="Calibri"/>
+              </a:rPr>
+              <a:t>GPS, code, cash</a:t>
             </a:r>
           </a:p>
         </p:txBody>
       </p:sp>
       <p:cxnSp>
         <p:nvCxnSpPr>
-          <p:cNvPr id="74" name="Connector 73"/>
+          <p:cNvPr id="78" name="Connector 77"/>
           <p:cNvCxnSpPr/>
           <p:nvPr/>
         </p:nvCxnSpPr>
         <p:spPr>
-          <a:xfrm flipH="1">
-            <a:off x="9921239" y="1426464"/>
-            <a:ext cx="411481" cy="288036"/>
-          </a:xfrm>
-          <a:prstGeom prst="line">
-            <a:avLst/>
-          </a:prstGeom>
-          <a:ln w="15875">
-            <a:solidFill>
-              <a:srgbClr val="64748B"/>
-            </a:solidFill>
-            <a:tailEnd type="triangle" w="med" len="med"/>
-          </a:ln>
-        </p:spPr>
-        <p:style>
-          <a:lnRef idx="2">
-            <a:schemeClr val="accent1"/>
-          </a:lnRef>
-          <a:fillRef idx="0">
-            <a:schemeClr val="accent1"/>
-          </a:fillRef>
-          <a:effectRef idx="1">
-            <a:schemeClr val="accent1"/>
-          </a:effectRef>
-          <a:fontRef idx="minor">
-            <a:schemeClr val="tx1"/>
-          </a:fontRef>
-        </p:style>
-      </p:cxnSp>
-      <p:sp>
-        <p:nvSpPr>
-          <p:cNvPr id="75" name="TextBox 74"/>
-          <p:cNvSpPr txBox="1"/>
-          <p:nvPr/>
-        </p:nvSpPr>
-        <p:spPr>
-          <a:xfrm>
-            <a:off x="9829800" y="1572768"/>
-            <a:ext cx="1645920" cy="274320"/>
-          </a:xfrm>
-          <a:prstGeom prst="rect">
-            <a:avLst/>
-          </a:prstGeom>
-          <a:solidFill>
-            <a:srgbClr val="FFFFFF"/>
-          </a:solidFill>
-        </p:spPr>
-        <p:txBody>
-          <a:bodyPr wrap="square" lIns="45720" rIns="45720" tIns="18288" bIns="18288" anchor="t">
-            <a:spAutoFit/>
-          </a:bodyPr>
-          <a:lstStyle/>
-          <a:p>
-            <a:pPr algn="ctr"/>
-            <a:r>
-              <a:rPr sz="800" b="0" i="0">
-                <a:solidFill>
-                  <a:srgbClr val="1E293B"/>
-                </a:solidFill>
-                <a:latin typeface="Calibri"/>
-              </a:rPr>
-              <a:t>GPS, code, cash</a:t>
-            </a:r>
-          </a:p>
-        </p:txBody>
-      </p:sp>
-      <p:cxnSp>
-        <p:nvCxnSpPr>
-          <p:cNvPr id="76" name="Connector 75"/>
-          <p:cNvCxnSpPr/>
-          <p:nvPr/>
-        </p:nvCxnSpPr>
-        <p:spPr>
-          <a:xfrm>
-            <a:off x="8983979" y="1965960"/>
-            <a:ext cx="1" cy="411480"/>
+          <a:xfrm>
+            <a:off x="8938259" y="2130552"/>
+            <a:ext cx="0" cy="356616"/>
           </a:xfrm>
           <a:prstGeom prst="line">
             <a:avLst/>
@@ -27546,94 +25259,7 @@
             <a:headEnd type="triangle" w="med" len="med"/>
           </a:ln>
         </p:spPr>
-        <p:style>
-          <a:lnRef idx="2">
-            <a:schemeClr val="accent1"/>
-          </a:lnRef>
-          <a:fillRef idx="0">
-            <a:schemeClr val="accent1"/>
-          </a:fillRef>
-          <a:effectRef idx="1">
-            <a:schemeClr val="accent1"/>
-          </a:effectRef>
-          <a:fontRef idx="minor">
-            <a:schemeClr val="tx1"/>
-          </a:fontRef>
-        </p:style>
       </p:cxnSp>
-      <p:cxnSp>
-        <p:nvCxnSpPr>
-          <p:cNvPr id="77" name="Connector 76"/>
-          <p:cNvCxnSpPr/>
-          <p:nvPr/>
-        </p:nvCxnSpPr>
-        <p:spPr>
-          <a:xfrm flipH="1" flipV="1">
-            <a:off x="1440180" y="914400"/>
-            <a:ext cx="6743700" cy="274320"/>
-          </a:xfrm>
-          <a:prstGeom prst="line">
-            <a:avLst/>
-          </a:prstGeom>
-          <a:ln w="15875">
-            <a:solidFill>
-              <a:srgbClr val="0D9488"/>
-            </a:solidFill>
-            <a:tailEnd type="triangle" w="med" len="med"/>
-          </a:ln>
-        </p:spPr>
-        <p:style>
-          <a:lnRef idx="2">
-            <a:schemeClr val="accent1"/>
-          </a:lnRef>
-          <a:fillRef idx="0">
-            <a:schemeClr val="accent1"/>
-          </a:fillRef>
-          <a:effectRef idx="1">
-            <a:schemeClr val="accent1"/>
-          </a:effectRef>
-          <a:fontRef idx="minor">
-            <a:schemeClr val="tx1"/>
-          </a:fontRef>
-        </p:style>
-      </p:cxnSp>
-      <p:sp>
-        <p:nvSpPr>
-          <p:cNvPr id="78" name="TextBox 77"/>
-          <p:cNvSpPr txBox="1"/>
-          <p:nvPr/>
-        </p:nvSpPr>
-        <p:spPr>
-          <a:xfrm>
-            <a:off x="4480560" y="640080"/>
-            <a:ext cx="1645920" cy="274320"/>
-          </a:xfrm>
-          <a:prstGeom prst="rect">
-            <a:avLst/>
-          </a:prstGeom>
-          <a:solidFill>
-            <a:srgbClr val="FFFFFF"/>
-          </a:solidFill>
-        </p:spPr>
-        <p:txBody>
-          <a:bodyPr wrap="square" lIns="45720" rIns="45720" tIns="18288" bIns="18288" anchor="t">
-            <a:spAutoFit/>
-          </a:bodyPr>
-          <a:lstStyle/>
-          <a:p>
-            <a:pPr algn="ctr"/>
-            <a:r>
-              <a:rPr sz="800" b="0" i="0">
-                <a:solidFill>
-                  <a:srgbClr val="1E293B"/>
-                </a:solidFill>
-                <a:latin typeface="Calibri"/>
-              </a:rPr>
-              <a:t>live tracking</a:t>
-            </a:r>
-          </a:p>
-        </p:txBody>
-      </p:sp>
       <p:cxnSp>
         <p:nvCxnSpPr>
           <p:cNvPr id="79" name="Connector 78"/>
@@ -27641,9 +25267,9 @@
           <p:nvPr/>
         </p:nvCxnSpPr>
         <p:spPr>
-          <a:xfrm flipH="1">
-            <a:off x="3223259" y="2761488"/>
-            <a:ext cx="1" cy="484632"/>
+          <a:xfrm>
+            <a:off x="3268979" y="2871216"/>
+            <a:ext cx="0" cy="438912"/>
           </a:xfrm>
           <a:prstGeom prst="line">
             <a:avLst/>
@@ -27655,20 +25281,6 @@
             <a:tailEnd type="triangle" w="med" len="med"/>
           </a:ln>
         </p:spPr>
-        <p:style>
-          <a:lnRef idx="2">
-            <a:schemeClr val="accent1"/>
-          </a:lnRef>
-          <a:fillRef idx="0">
-            <a:schemeClr val="accent1"/>
-          </a:fillRef>
-          <a:effectRef idx="1">
-            <a:schemeClr val="accent1"/>
-          </a:effectRef>
-          <a:fontRef idx="minor">
-            <a:schemeClr val="tx1"/>
-          </a:fontRef>
-        </p:style>
       </p:cxnSp>
       <p:sp>
         <p:nvSpPr>
@@ -27678,8 +25290,8 @@
         </p:nvSpPr>
         <p:spPr>
           <a:xfrm>
-            <a:off x="1691640" y="2834640"/>
-            <a:ext cx="1645920" cy="274320"/>
+            <a:off x="3314699" y="2980944"/>
+            <a:ext cx="960120" cy="219456"/>
           </a:xfrm>
           <a:prstGeom prst="rect">
             <a:avLst/>
@@ -27696,7 +25308,7 @@
           <a:p>
             <a:pPr algn="ctr"/>
             <a:r>
-              <a:rPr sz="800" b="0" i="0">
+              <a:rPr sz="900" b="0" i="0">
                 <a:solidFill>
                   <a:srgbClr val="1E293B"/>
                 </a:solidFill>
@@ -27714,9 +25326,9 @@
           <p:nvPr/>
         </p:nvCxnSpPr>
         <p:spPr>
-          <a:xfrm flipV="1">
-            <a:off x="1874520" y="3634740"/>
-            <a:ext cx="411480" cy="534924"/>
+          <a:xfrm>
+            <a:off x="1874520" y="3406140"/>
+            <a:ext cx="457200" cy="169164"/>
           </a:xfrm>
           <a:prstGeom prst="line">
             <a:avLst/>
@@ -27728,20 +25340,6 @@
             <a:tailEnd type="triangle" w="med" len="med"/>
           </a:ln>
         </p:spPr>
-        <p:style>
-          <a:lnRef idx="2">
-            <a:schemeClr val="accent1"/>
-          </a:lnRef>
-          <a:fillRef idx="0">
-            <a:schemeClr val="accent1"/>
-          </a:fillRef>
-          <a:effectRef idx="1">
-            <a:schemeClr val="accent1"/>
-          </a:effectRef>
-          <a:fontRef idx="minor">
-            <a:schemeClr val="tx1"/>
-          </a:fontRef>
-        </p:style>
       </p:cxnSp>
       <p:sp>
         <p:nvSpPr>
@@ -27751,8 +25349,8 @@
         </p:nvSpPr>
         <p:spPr>
           <a:xfrm>
-            <a:off x="1737360" y="3429000"/>
-            <a:ext cx="1645920" cy="274320"/>
+            <a:off x="1892808" y="3150108"/>
+            <a:ext cx="685800" cy="219456"/>
           </a:xfrm>
           <a:prstGeom prst="rect">
             <a:avLst/>
@@ -27769,13 +25367,13 @@
           <a:p>
             <a:pPr algn="ctr"/>
             <a:r>
-              <a:rPr sz="800" b="0" i="0">
-                <a:solidFill>
-                  <a:srgbClr val="1E293B"/>
-                </a:solidFill>
-                <a:latin typeface="Calibri"/>
-              </a:rPr>
-              <a:t>paid</a:t>
+              <a:rPr sz="900" b="0" i="0">
+                <a:solidFill>
+                  <a:srgbClr val="1E293B"/>
+                </a:solidFill>
+                <a:latin typeface="Calibri"/>
+              </a:rPr>
+              <a:t>paid / failed</a:t>
             </a:r>
           </a:p>
         </p:txBody>
@@ -27788,8 +25386,8 @@
         </p:nvCxnSpPr>
         <p:spPr>
           <a:xfrm flipH="1">
-            <a:off x="1874520" y="3886200"/>
-            <a:ext cx="411480" cy="1106424"/>
+            <a:off x="1874520" y="3867912"/>
+            <a:ext cx="457200" cy="224028"/>
           </a:xfrm>
           <a:prstGeom prst="line">
             <a:avLst/>
@@ -27802,20 +25400,6 @@
             <a:headEnd type="triangle" w="med" len="med"/>
           </a:ln>
         </p:spPr>
-        <p:style>
-          <a:lnRef idx="2">
-            <a:schemeClr val="accent1"/>
-          </a:lnRef>
-          <a:fillRef idx="0">
-            <a:schemeClr val="accent1"/>
-          </a:fillRef>
-          <a:effectRef idx="1">
-            <a:schemeClr val="accent1"/>
-          </a:effectRef>
-          <a:fontRef idx="minor">
-            <a:schemeClr val="tx1"/>
-          </a:fontRef>
-        </p:style>
       </p:cxnSp>
       <p:sp>
         <p:nvSpPr>
@@ -27825,8 +25409,8 @@
         </p:nvSpPr>
         <p:spPr>
           <a:xfrm>
-            <a:off x="1737360" y="4297680"/>
-            <a:ext cx="1645920" cy="274320"/>
+            <a:off x="1828800" y="4119372"/>
+            <a:ext cx="960120" cy="219456"/>
           </a:xfrm>
           <a:prstGeom prst="rect">
             <a:avLst/>
@@ -27843,13 +25427,13 @@
           <a:p>
             <a:pPr algn="ctr"/>
             <a:r>
-              <a:rPr sz="800" b="0" i="0">
-                <a:solidFill>
-                  <a:srgbClr val="1E293B"/>
-                </a:solidFill>
-                <a:latin typeface="Calibri"/>
-              </a:rPr>
-              <a:t>invoice → FBR no.</a:t>
+              <a:rPr sz="900" b="0" i="0">
+                <a:solidFill>
+                  <a:srgbClr val="1E293B"/>
+                </a:solidFill>
+                <a:latin typeface="Calibri"/>
+              </a:rPr>
+              <a:t>invoice ⇄ FBR no.</a:t>
             </a:r>
           </a:p>
         </p:txBody>
@@ -27862,8 +25446,8 @@
         </p:nvCxnSpPr>
         <p:spPr>
           <a:xfrm>
-            <a:off x="3223259" y="4023360"/>
-            <a:ext cx="1" cy="411480"/>
+            <a:off x="3268979" y="4023360"/>
+            <a:ext cx="0" cy="411480"/>
           </a:xfrm>
           <a:prstGeom prst="line">
             <a:avLst/>
@@ -27875,20 +25459,6 @@
             <a:tailEnd type="triangle" w="med" len="med"/>
           </a:ln>
         </p:spPr>
-        <p:style>
-          <a:lnRef idx="2">
-            <a:schemeClr val="accent1"/>
-          </a:lnRef>
-          <a:fillRef idx="0">
-            <a:schemeClr val="accent1"/>
-          </a:fillRef>
-          <a:effectRef idx="1">
-            <a:schemeClr val="accent1"/>
-          </a:effectRef>
-          <a:fontRef idx="minor">
-            <a:schemeClr val="tx1"/>
-          </a:fontRef>
-        </p:style>
       </p:cxnSp>
       <p:sp>
         <p:nvSpPr>
@@ -27898,8 +25468,8 @@
         </p:nvSpPr>
         <p:spPr>
           <a:xfrm>
-            <a:off x="3246120" y="4114800"/>
-            <a:ext cx="1645920" cy="274320"/>
+            <a:off x="3314699" y="4133088"/>
+            <a:ext cx="960120" cy="219456"/>
           </a:xfrm>
           <a:prstGeom prst="rect">
             <a:avLst/>
@@ -27916,7 +25486,7 @@
           <a:p>
             <a:pPr algn="ctr"/>
             <a:r>
-              <a:rPr sz="800" b="0" i="0">
+              <a:rPr sz="900" b="0" i="0">
                 <a:solidFill>
                   <a:srgbClr val="1E293B"/>
                 </a:solidFill>
@@ -27935,8 +25505,8 @@
         </p:nvCxnSpPr>
         <p:spPr>
           <a:xfrm>
-            <a:off x="4114800" y="2660904"/>
-            <a:ext cx="1051560" cy="768096"/>
+            <a:off x="3931919" y="2871216"/>
+            <a:ext cx="1508761" cy="438912"/>
           </a:xfrm>
           <a:prstGeom prst="line">
             <a:avLst/>
@@ -27948,20 +25518,6 @@
             <a:tailEnd type="triangle" w="med" len="med"/>
           </a:ln>
         </p:spPr>
-        <p:style>
-          <a:lnRef idx="2">
-            <a:schemeClr val="accent1"/>
-          </a:lnRef>
-          <a:fillRef idx="0">
-            <a:schemeClr val="accent1"/>
-          </a:fillRef>
-          <a:effectRef idx="1">
-            <a:schemeClr val="accent1"/>
-          </a:effectRef>
-          <a:fontRef idx="minor">
-            <a:schemeClr val="tx1"/>
-          </a:fontRef>
-        </p:style>
       </p:cxnSp>
       <p:sp>
         <p:nvSpPr>
@@ -27971,8 +25527,8 @@
         </p:nvSpPr>
         <p:spPr>
           <a:xfrm>
-            <a:off x="4114800" y="2788920"/>
-            <a:ext cx="1645920" cy="274320"/>
+            <a:off x="4251959" y="3145536"/>
+            <a:ext cx="1005840" cy="219456"/>
           </a:xfrm>
           <a:prstGeom prst="rect">
             <a:avLst/>
@@ -27989,7 +25545,7 @@
           <a:p>
             <a:pPr algn="ctr"/>
             <a:r>
-              <a:rPr sz="800" b="0" i="0">
+              <a:rPr sz="900" b="0" i="0">
                 <a:solidFill>
                   <a:srgbClr val="1E293B"/>
                 </a:solidFill>
@@ -28007,9 +25563,9 @@
           <p:nvPr/>
         </p:nvCxnSpPr>
         <p:spPr>
-          <a:xfrm flipH="1">
-            <a:off x="6103619" y="2761488"/>
-            <a:ext cx="1" cy="484632"/>
+          <a:xfrm>
+            <a:off x="6103619" y="2871216"/>
+            <a:ext cx="0" cy="438912"/>
           </a:xfrm>
           <a:prstGeom prst="line">
             <a:avLst/>
@@ -28021,20 +25577,6 @@
             <a:tailEnd type="triangle" w="med" len="med"/>
           </a:ln>
         </p:spPr>
-        <p:style>
-          <a:lnRef idx="2">
-            <a:schemeClr val="accent1"/>
-          </a:lnRef>
-          <a:fillRef idx="0">
-            <a:schemeClr val="accent1"/>
-          </a:fillRef>
-          <a:effectRef idx="1">
-            <a:schemeClr val="accent1"/>
-          </a:effectRef>
-          <a:fontRef idx="minor">
-            <a:schemeClr val="tx1"/>
-          </a:fontRef>
-        </p:style>
       </p:cxnSp>
       <p:sp>
         <p:nvSpPr>
@@ -28044,8 +25586,8 @@
         </p:nvSpPr>
         <p:spPr>
           <a:xfrm>
-            <a:off x="6172200" y="2834640"/>
-            <a:ext cx="1645920" cy="274320"/>
+            <a:off x="6149339" y="2944368"/>
+            <a:ext cx="457200" cy="219456"/>
           </a:xfrm>
           <a:prstGeom prst="rect">
             <a:avLst/>
@@ -28062,7 +25604,7 @@
           <a:p>
             <a:pPr algn="ctr"/>
             <a:r>
-              <a:rPr sz="800" b="0" i="0">
+              <a:rPr sz="900" b="0" i="0">
                 <a:solidFill>
                   <a:srgbClr val="1E293B"/>
                 </a:solidFill>
@@ -28082,7 +25624,7 @@
         <p:spPr>
           <a:xfrm>
             <a:off x="6103619" y="4023360"/>
-            <a:ext cx="1" cy="411480"/>
+            <a:ext cx="0" cy="685800"/>
           </a:xfrm>
           <a:prstGeom prst="line">
             <a:avLst/>
@@ -28094,20 +25636,6 @@
             <a:tailEnd type="triangle" w="med" len="med"/>
           </a:ln>
         </p:spPr>
-        <p:style>
-          <a:lnRef idx="2">
-            <a:schemeClr val="accent1"/>
-          </a:lnRef>
-          <a:fillRef idx="0">
-            <a:schemeClr val="accent1"/>
-          </a:fillRef>
-          <a:effectRef idx="1">
-            <a:schemeClr val="accent1"/>
-          </a:effectRef>
-          <a:fontRef idx="minor">
-            <a:schemeClr val="tx1"/>
-          </a:fontRef>
-        </p:style>
       </p:cxnSp>
       <p:sp>
         <p:nvSpPr>
@@ -28117,8 +25645,8 @@
         </p:nvSpPr>
         <p:spPr>
           <a:xfrm>
-            <a:off x="6172200" y="4114800"/>
-            <a:ext cx="1645920" cy="274320"/>
+            <a:off x="6149339" y="4315968"/>
+            <a:ext cx="868680" cy="219456"/>
           </a:xfrm>
           <a:prstGeom prst="rect">
             <a:avLst/>
@@ -28135,7 +25663,7 @@
           <a:p>
             <a:pPr algn="ctr"/>
             <a:r>
-              <a:rPr sz="800" b="0" i="0">
+              <a:rPr sz="900" b="0" i="0">
                 <a:solidFill>
                   <a:srgbClr val="1E293B"/>
                 </a:solidFill>
@@ -28154,8 +25682,8 @@
         </p:nvCxnSpPr>
         <p:spPr>
           <a:xfrm flipH="1">
-            <a:off x="4206240" y="4818888"/>
-            <a:ext cx="1348740" cy="950976"/>
+            <a:off x="2148840" y="4992624"/>
+            <a:ext cx="3017520" cy="630936"/>
           </a:xfrm>
           <a:prstGeom prst="line">
             <a:avLst/>
@@ -28167,20 +25695,6 @@
             <a:tailEnd type="triangle" w="med" len="med"/>
           </a:ln>
         </p:spPr>
-        <p:style>
-          <a:lnRef idx="2">
-            <a:schemeClr val="accent1"/>
-          </a:lnRef>
-          <a:fillRef idx="0">
-            <a:schemeClr val="accent1"/>
-          </a:fillRef>
-          <a:effectRef idx="1">
-            <a:schemeClr val="accent1"/>
-          </a:effectRef>
-          <a:fontRef idx="minor">
-            <a:schemeClr val="tx1"/>
-          </a:fontRef>
-        </p:style>
       </p:cxnSp>
       <p:sp>
         <p:nvSpPr>
@@ -28190,8 +25704,8 @@
         </p:nvSpPr>
         <p:spPr>
           <a:xfrm>
-            <a:off x="4251960" y="5074920"/>
-            <a:ext cx="1645920" cy="274320"/>
+            <a:off x="2057400" y="5166360"/>
+            <a:ext cx="960120" cy="219456"/>
           </a:xfrm>
           <a:prstGeom prst="rect">
             <a:avLst/>
@@ -28208,7 +25722,7 @@
           <a:p>
             <a:pPr algn="ctr"/>
             <a:r>
-              <a:rPr sz="800" b="0" i="0">
+              <a:rPr sz="900" b="0" i="0">
                 <a:solidFill>
                   <a:srgbClr val="1E293B"/>
                 </a:solidFill>
@@ -28227,8 +25741,8 @@
         </p:nvCxnSpPr>
         <p:spPr>
           <a:xfrm flipV="1">
-            <a:off x="4114800" y="3840480"/>
-            <a:ext cx="3931920" cy="694944"/>
+            <a:off x="4206239" y="4023360"/>
+            <a:ext cx="3886201" cy="557784"/>
           </a:xfrm>
           <a:prstGeom prst="line">
             <a:avLst/>
@@ -28240,20 +25754,6 @@
             <a:tailEnd type="triangle" w="med" len="med"/>
           </a:ln>
         </p:spPr>
-        <p:style>
-          <a:lnRef idx="2">
-            <a:schemeClr val="accent1"/>
-          </a:lnRef>
-          <a:fillRef idx="0">
-            <a:schemeClr val="accent1"/>
-          </a:fillRef>
-          <a:effectRef idx="1">
-            <a:schemeClr val="accent1"/>
-          </a:effectRef>
-          <a:fontRef idx="minor">
-            <a:schemeClr val="tx1"/>
-          </a:fontRef>
-        </p:style>
       </p:cxnSp>
       <p:sp>
         <p:nvSpPr>
@@ -28263,8 +25763,8 @@
         </p:nvSpPr>
         <p:spPr>
           <a:xfrm>
-            <a:off x="6309360" y="3950208"/>
-            <a:ext cx="1645920" cy="274320"/>
+            <a:off x="7132320" y="4105656"/>
+            <a:ext cx="960120" cy="219456"/>
           </a:xfrm>
           <a:prstGeom prst="rect">
             <a:avLst/>
@@ -28281,7 +25781,7 @@
           <a:p>
             <a:pPr algn="ctr"/>
             <a:r>
-              <a:rPr sz="800" b="0" i="0">
+              <a:rPr sz="900" b="0" i="0">
                 <a:solidFill>
                   <a:srgbClr val="1E293B"/>
                 </a:solidFill>
@@ -28300,8 +25800,8 @@
         </p:nvCxnSpPr>
         <p:spPr>
           <a:xfrm>
-            <a:off x="8983979" y="4023360"/>
-            <a:ext cx="1" cy="411480"/>
+            <a:off x="8938259" y="4023360"/>
+            <a:ext cx="0" cy="411480"/>
           </a:xfrm>
           <a:prstGeom prst="line">
             <a:avLst/>
@@ -28314,20 +25814,6 @@
             <a:headEnd type="triangle" w="med" len="med"/>
           </a:ln>
         </p:spPr>
-        <p:style>
-          <a:lnRef idx="2">
-            <a:schemeClr val="accent1"/>
-          </a:lnRef>
-          <a:fillRef idx="0">
-            <a:schemeClr val="accent1"/>
-          </a:fillRef>
-          <a:effectRef idx="1">
-            <a:schemeClr val="accent1"/>
-          </a:effectRef>
-          <a:fontRef idx="minor">
-            <a:schemeClr val="tx1"/>
-          </a:fontRef>
-        </p:style>
       </p:cxnSp>
       <p:cxnSp>
         <p:nvCxnSpPr>
@@ -28337,8 +25823,8 @@
         </p:nvCxnSpPr>
         <p:spPr>
           <a:xfrm flipV="1">
-            <a:off x="9921239" y="3621024"/>
-            <a:ext cx="411481" cy="13716"/>
+            <a:off x="9875519" y="2994660"/>
+            <a:ext cx="411481" cy="580644"/>
           </a:xfrm>
           <a:prstGeom prst="line">
             <a:avLst/>
@@ -28350,20 +25836,6 @@
             <a:tailEnd type="triangle" w="med" len="med"/>
           </a:ln>
         </p:spPr>
-        <p:style>
-          <a:lnRef idx="2">
-            <a:schemeClr val="accent1"/>
-          </a:lnRef>
-          <a:fillRef idx="0">
-            <a:schemeClr val="accent1"/>
-          </a:fillRef>
-          <a:effectRef idx="1">
-            <a:schemeClr val="accent1"/>
-          </a:effectRef>
-          <a:fontRef idx="minor">
-            <a:schemeClr val="tx1"/>
-          </a:fontRef>
-        </p:style>
       </p:cxnSp>
       <p:sp>
         <p:nvSpPr>
@@ -28373,8 +25845,8 @@
         </p:nvSpPr>
         <p:spPr>
           <a:xfrm>
-            <a:off x="9829800" y="3383280"/>
-            <a:ext cx="1645920" cy="274320"/>
+            <a:off x="9921239" y="3227832"/>
+            <a:ext cx="731520" cy="219456"/>
           </a:xfrm>
           <a:prstGeom prst="rect">
             <a:avLst/>
@@ -28391,9 +25863,9 @@
           <a:p>
             <a:pPr algn="ctr"/>
             <a:r>
-              <a:rPr sz="800" b="0" i="0">
-                <a:solidFill>
-                  <a:srgbClr val="1E293B"/>
+              <a:rPr sz="900" b="0" i="0">
+                <a:solidFill>
+                  <a:srgbClr val="0B5E57"/>
                 </a:solidFill>
                 <a:latin typeface="Calibri"/>
               </a:rPr>
@@ -28409,46 +25881,9 @@
           <p:nvPr/>
         </p:nvCxnSpPr>
         <p:spPr>
-          <a:xfrm>
-            <a:off x="11132820" y="1572768"/>
-            <a:ext cx="0" cy="1764792"/>
-          </a:xfrm>
-          <a:prstGeom prst="line">
-            <a:avLst/>
-          </a:prstGeom>
-          <a:ln w="15875">
-            <a:solidFill>
-              <a:srgbClr val="CBD5E1"/>
-            </a:solidFill>
-            <a:prstDash val="dash"/>
-            <a:tailEnd type="triangle" w="med" len="med"/>
-          </a:ln>
-        </p:spPr>
-        <p:style>
-          <a:lnRef idx="2">
-            <a:schemeClr val="accent1"/>
-          </a:lnRef>
-          <a:fillRef idx="0">
-            <a:schemeClr val="accent1"/>
-          </a:fillRef>
-          <a:effectRef idx="1">
-            <a:schemeClr val="accent1"/>
-          </a:effectRef>
-          <a:fontRef idx="minor">
-            <a:schemeClr val="tx1"/>
-          </a:fontRef>
-        </p:style>
-      </p:cxnSp>
-      <p:cxnSp>
-        <p:nvCxnSpPr>
-          <p:cNvPr id="101" name="Connector 100"/>
-          <p:cNvCxnSpPr/>
-          <p:nvPr/>
-        </p:nvCxnSpPr>
-        <p:spPr>
-          <a:xfrm>
-            <a:off x="1691640" y="1481328"/>
-            <a:ext cx="6629400" cy="1764792"/>
+          <a:xfrm flipH="1">
+            <a:off x="9875519" y="3246120"/>
+            <a:ext cx="685801" cy="585216"/>
           </a:xfrm>
           <a:prstGeom prst="line">
             <a:avLst/>
@@ -28457,35 +25892,20 @@
             <a:solidFill>
               <a:srgbClr val="64748B"/>
             </a:solidFill>
-            <a:prstDash val="dash"/>
             <a:tailEnd type="triangle" w="med" len="med"/>
           </a:ln>
         </p:spPr>
-        <p:style>
-          <a:lnRef idx="2">
-            <a:schemeClr val="accent1"/>
-          </a:lnRef>
-          <a:fillRef idx="0">
-            <a:schemeClr val="accent1"/>
-          </a:fillRef>
-          <a:effectRef idx="1">
-            <a:schemeClr val="accent1"/>
-          </a:effectRef>
-          <a:fontRef idx="minor">
-            <a:schemeClr val="tx1"/>
-          </a:fontRef>
-        </p:style>
       </p:cxnSp>
       <p:sp>
         <p:nvSpPr>
-          <p:cNvPr id="102" name="TextBox 101"/>
+          <p:cNvPr id="101" name="TextBox 100"/>
           <p:cNvSpPr txBox="1"/>
           <p:nvPr/>
         </p:nvSpPr>
         <p:spPr>
           <a:xfrm>
-            <a:off x="7315200" y="2880360"/>
-            <a:ext cx="1645920" cy="274320"/>
+            <a:off x="10012679" y="3849624"/>
+            <a:ext cx="457200" cy="219456"/>
           </a:xfrm>
           <a:prstGeom prst="rect">
             <a:avLst/>
@@ -28502,7 +25922,7 @@
           <a:p>
             <a:pPr algn="ctr"/>
             <a:r>
-              <a:rPr sz="800" b="0" i="0">
+              <a:rPr sz="900" b="0" i="0">
                 <a:solidFill>
                   <a:srgbClr val="1E293B"/>
                 </a:solidFill>
@@ -28513,6 +25933,28 @@
           </a:p>
         </p:txBody>
       </p:sp>
+      <p:cxnSp>
+        <p:nvCxnSpPr>
+          <p:cNvPr id="102" name="Connector 101"/>
+          <p:cNvCxnSpPr/>
+          <p:nvPr/>
+        </p:nvCxnSpPr>
+        <p:spPr>
+          <a:xfrm>
+            <a:off x="3268979" y="4818888"/>
+            <a:ext cx="1897381" cy="886968"/>
+          </a:xfrm>
+          <a:prstGeom prst="line">
+            <a:avLst/>
+          </a:prstGeom>
+          <a:ln w="15875">
+            <a:solidFill>
+              <a:srgbClr val="64748B"/>
+            </a:solidFill>
+            <a:tailEnd type="triangle" w="med" len="med"/>
+          </a:ln>
+        </p:spPr>
+      </p:cxnSp>
       <p:cxnSp>
         <p:nvCxnSpPr>
           <p:cNvPr id="103" name="Connector 102"/>
@@ -28521,33 +25963,19 @@
         </p:nvCxnSpPr>
         <p:spPr>
           <a:xfrm>
-            <a:off x="3223260" y="4864608"/>
-            <a:ext cx="2331719" cy="438912"/>
+            <a:off x="6103619" y="5093208"/>
+            <a:ext cx="0" cy="347472"/>
           </a:xfrm>
           <a:prstGeom prst="line">
             <a:avLst/>
           </a:prstGeom>
           <a:ln w="15875">
             <a:solidFill>
-              <a:srgbClr val="CBD5E1"/>
+              <a:srgbClr val="64748B"/>
             </a:solidFill>
             <a:tailEnd type="triangle" w="med" len="med"/>
           </a:ln>
         </p:spPr>
-        <p:style>
-          <a:lnRef idx="2">
-            <a:schemeClr val="accent1"/>
-          </a:lnRef>
-          <a:fillRef idx="0">
-            <a:schemeClr val="accent1"/>
-          </a:fillRef>
-          <a:effectRef idx="1">
-            <a:schemeClr val="accent1"/>
-          </a:effectRef>
-          <a:fontRef idx="minor">
-            <a:schemeClr val="tx1"/>
-          </a:fontRef>
-        </p:style>
       </p:cxnSp>
       <p:cxnSp>
         <p:nvCxnSpPr>
@@ -28557,33 +25985,19 @@
         </p:nvCxnSpPr>
         <p:spPr>
           <a:xfrm flipH="1">
-            <a:off x="6103619" y="4864608"/>
-            <a:ext cx="1" cy="438912"/>
+            <a:off x="7040879" y="4818888"/>
+            <a:ext cx="1897380" cy="758952"/>
           </a:xfrm>
           <a:prstGeom prst="line">
             <a:avLst/>
           </a:prstGeom>
           <a:ln w="15875">
             <a:solidFill>
-              <a:srgbClr val="CBD5E1"/>
+              <a:srgbClr val="64748B"/>
             </a:solidFill>
             <a:tailEnd type="triangle" w="med" len="med"/>
           </a:ln>
         </p:spPr>
-        <p:style>
-          <a:lnRef idx="2">
-            <a:schemeClr val="accent1"/>
-          </a:lnRef>
-          <a:fillRef idx="0">
-            <a:schemeClr val="accent1"/>
-          </a:fillRef>
-          <a:effectRef idx="1">
-            <a:schemeClr val="accent1"/>
-          </a:effectRef>
-          <a:fontRef idx="minor">
-            <a:schemeClr val="tx1"/>
-          </a:fontRef>
-        </p:style>
       </p:cxnSp>
       <p:cxnSp>
         <p:nvCxnSpPr>
@@ -28592,45 +26006,9 @@
           <p:nvPr/>
         </p:nvCxnSpPr>
         <p:spPr>
-          <a:xfrm flipH="1">
-            <a:off x="6652259" y="4864608"/>
-            <a:ext cx="2331721" cy="438912"/>
-          </a:xfrm>
-          <a:prstGeom prst="line">
-            <a:avLst/>
-          </a:prstGeom>
-          <a:ln w="15875">
-            <a:solidFill>
-              <a:srgbClr val="CBD5E1"/>
-            </a:solidFill>
-            <a:tailEnd type="triangle" w="med" len="med"/>
-          </a:ln>
-        </p:spPr>
-        <p:style>
-          <a:lnRef idx="2">
-            <a:schemeClr val="accent1"/>
-          </a:lnRef>
-          <a:fillRef idx="0">
-            <a:schemeClr val="accent1"/>
-          </a:fillRef>
-          <a:effectRef idx="1">
-            <a:schemeClr val="accent1"/>
-          </a:effectRef>
-          <a:fontRef idx="minor">
-            <a:schemeClr val="tx1"/>
-          </a:fontRef>
-        </p:style>
-      </p:cxnSp>
-      <p:cxnSp>
-        <p:nvCxnSpPr>
-          <p:cNvPr id="106" name="Connector 105"/>
-          <p:cNvCxnSpPr/>
-          <p:nvPr/>
-        </p:nvCxnSpPr>
-        <p:spPr>
-          <a:xfrm>
-            <a:off x="7040879" y="5692140"/>
-            <a:ext cx="1325881" cy="77724"/>
+          <a:xfrm flipV="1">
+            <a:off x="7040879" y="5783580"/>
+            <a:ext cx="960121" cy="150876"/>
           </a:xfrm>
           <a:prstGeom prst="line">
             <a:avLst/>
@@ -28642,31 +26020,17 @@
             <a:tailEnd type="triangle" w="med" len="med"/>
           </a:ln>
         </p:spPr>
-        <p:style>
-          <a:lnRef idx="2">
-            <a:schemeClr val="accent1"/>
-          </a:lnRef>
-          <a:fillRef idx="0">
-            <a:schemeClr val="accent1"/>
-          </a:fillRef>
-          <a:effectRef idx="1">
-            <a:schemeClr val="accent1"/>
-          </a:effectRef>
-          <a:fontRef idx="minor">
-            <a:schemeClr val="tx1"/>
-          </a:fontRef>
-        </p:style>
       </p:cxnSp>
       <p:sp>
         <p:nvSpPr>
-          <p:cNvPr id="107" name="TextBox 106"/>
+          <p:cNvPr id="106" name="TextBox 105"/>
           <p:cNvSpPr txBox="1"/>
           <p:nvPr/>
         </p:nvSpPr>
         <p:spPr>
           <a:xfrm>
-            <a:off x="7086600" y="5852160"/>
-            <a:ext cx="1645920" cy="274320"/>
+            <a:off x="7132319" y="5980176"/>
+            <a:ext cx="1051560" cy="219456"/>
           </a:xfrm>
           <a:prstGeom prst="rect">
             <a:avLst/>
@@ -28683,13 +26047,48 @@
           <a:p>
             <a:pPr algn="ctr"/>
             <a:r>
-              <a:rPr sz="800" b="0" i="0">
-                <a:solidFill>
-                  <a:srgbClr val="1E293B"/>
+              <a:rPr sz="900" b="0" i="0">
+                <a:solidFill>
+                  <a:srgbClr val="0B5E57"/>
                 </a:solidFill>
                 <a:latin typeface="Calibri"/>
               </a:rPr>
               <a:t>dashboard, reports</a:t>
+            </a:r>
+          </a:p>
+        </p:txBody>
+      </p:sp>
+      <p:sp>
+        <p:nvSpPr>
+          <p:cNvPr id="107" name="TextBox 106"/>
+          <p:cNvSpPr txBox="1"/>
+          <p:nvPr/>
+        </p:nvSpPr>
+        <p:spPr>
+          <a:xfrm>
+            <a:off x="8229600" y="6263640"/>
+            <a:ext cx="3657600" cy="228600"/>
+          </a:xfrm>
+          <a:prstGeom prst="rect">
+            <a:avLst/>
+          </a:prstGeom>
+          <a:noFill/>
+        </p:spPr>
+        <p:txBody>
+          <a:bodyPr wrap="square" lIns="45720" rIns="45720" tIns="18288" bIns="18288" anchor="t">
+            <a:spAutoFit/>
+          </a:bodyPr>
+          <a:lstStyle/>
+          <a:p>
+            <a:pPr algn="r"/>
+            <a:r>
+              <a:rPr sz="900" b="0" i="1">
+                <a:solidFill>
+                  <a:srgbClr val="64748B"/>
+                </a:solidFill>
+                <a:latin typeface="Calibri"/>
+              </a:rPr>
+              <a:t>Orange: data stores (D1–D6) · Teal boxes: processes</a:t>
             </a:r>
           </a:p>
         </p:txBody>

--- a/docs/Restaurant_OS_FSD.pptx
+++ b/docs/Restaurant_OS_FSD.pptx
@@ -6502,6 +6502,40 @@
                 <a:latin typeface="Calibri"/>
               </a:rPr>
               <a:t> Receipt: company logo, 80 / 58 mm or A4, auto-print option</a:t>
+            </a:r>
+          </a:p>
+          <a:p>
+            <a:pPr>
+              <a:spcAft>
+                <a:spcPts val="900"/>
+              </a:spcAft>
+            </a:pPr>
+            <a:r>
+              <a:rPr sz="1500" b="1" i="0">
+                <a:solidFill>
+                  <a:srgbClr val="0D9488"/>
+                </a:solidFill>
+                <a:latin typeface="Calibri"/>
+              </a:rPr>
+              <a:t>•  </a:t>
+            </a:r>
+            <a:r>
+              <a:rPr sz="1500" b="1" i="0">
+                <a:solidFill>
+                  <a:srgbClr val="1E293B"/>
+                </a:solidFill>
+                <a:latin typeface="Calibri"/>
+              </a:rPr>
+              <a:t>FR-2.9 </a:t>
+            </a:r>
+            <a:r>
+              <a:rPr sz="1500" b="0" i="0">
+                <a:solidFill>
+                  <a:srgbClr val="1E293B"/>
+                </a:solidFill>
+                <a:latin typeface="Calibri"/>
+              </a:rPr>
+              <a:t> Customer-facing display (/ros/display): live cart with dish photos and offers, amount to pay / change, thank-you with FBR QR; menu &amp; offers slideshow between customers</a:t>
             </a:r>
           </a:p>
         </p:txBody>
@@ -14990,7 +15024,7 @@
                 </a:solidFill>
                 <a:latin typeface="Calibri"/>
               </a:rPr>
-              <a:t> receipt printer — POS terminal → Printer; KDS — open /ros/kds on the kitchen screen and pick its station; kiosk — /ros/kiosk in full-screen; riders — /ros/rider on their phones</a:t>
+              <a:t> receipt printer — POS terminal → Printer; customer display — terminal → Customer display (2nd monitor); KDS — /ros/kds on the kitchen screen, pick its station; kiosk — /ros/kiosk full-screen; riders — /ros/rider on their phones</a:t>
             </a:r>
           </a:p>
           <a:p>
@@ -15885,7 +15919,7 @@
         <p:spPr>
           <a:xfrm>
             <a:off x="502920" y="1463040"/>
-            <a:ext cx="1161288" cy="1143000"/>
+            <a:ext cx="1161288" cy="640080"/>
           </a:xfrm>
           <a:prstGeom prst="homePlate">
             <a:avLst/>
@@ -15913,8 +15947,8 @@
         </p:nvSpPr>
         <p:spPr>
           <a:xfrm>
-            <a:off x="667512" y="1572768"/>
-            <a:ext cx="886968" cy="365760"/>
+            <a:off x="640080" y="1572768"/>
+            <a:ext cx="886968" cy="411480"/>
           </a:xfrm>
           <a:prstGeom prst="rect">
             <a:avLst/>
@@ -15948,8 +15982,8 @@
         </p:nvSpPr>
         <p:spPr>
           <a:xfrm>
-            <a:off x="667512" y="1938528"/>
-            <a:ext cx="886968" cy="640080"/>
+            <a:off x="457200" y="2148840"/>
+            <a:ext cx="1252728" cy="502920"/>
           </a:xfrm>
           <a:prstGeom prst="rect">
             <a:avLst/>
@@ -15966,7 +16000,7 @@
             <a:r>
               <a:rPr sz="1100" b="1" i="0">
                 <a:solidFill>
-                  <a:srgbClr val="FFFFFF"/>
+                  <a:srgbClr val="0B5E57"/>
                 </a:solidFill>
                 <a:latin typeface="Calibri"/>
               </a:rPr>
@@ -15978,7 +16012,7 @@
             <a:r>
               <a:rPr sz="1100" b="1" i="0">
                 <a:solidFill>
-                  <a:srgbClr val="FFFFFF"/>
+                  <a:srgbClr val="0B5E57"/>
                 </a:solidFill>
                 <a:latin typeface="Calibri"/>
               </a:rPr>
@@ -15996,7 +16030,7 @@
         <p:spPr>
           <a:xfrm>
             <a:off x="1773936" y="1463040"/>
-            <a:ext cx="1161288" cy="1143000"/>
+            <a:ext cx="1161288" cy="640080"/>
           </a:xfrm>
           <a:prstGeom prst="chevron">
             <a:avLst/>
@@ -16024,8 +16058,8 @@
         </p:nvSpPr>
         <p:spPr>
           <a:xfrm>
-            <a:off x="1938528" y="1572768"/>
-            <a:ext cx="886968" cy="365760"/>
+            <a:off x="1911096" y="1572768"/>
+            <a:ext cx="886968" cy="411480"/>
           </a:xfrm>
           <a:prstGeom prst="rect">
             <a:avLst/>
@@ -16059,8 +16093,8 @@
         </p:nvSpPr>
         <p:spPr>
           <a:xfrm>
-            <a:off x="1938528" y="1938528"/>
-            <a:ext cx="886968" cy="640080"/>
+            <a:off x="1728216" y="2148840"/>
+            <a:ext cx="1252728" cy="502920"/>
           </a:xfrm>
           <a:prstGeom prst="rect">
             <a:avLst/>
@@ -16077,7 +16111,7 @@
             <a:r>
               <a:rPr sz="1100" b="1" i="0">
                 <a:solidFill>
-                  <a:srgbClr val="FFFFFF"/>
+                  <a:srgbClr val="0B5E57"/>
                 </a:solidFill>
                 <a:latin typeface="Calibri"/>
               </a:rPr>
@@ -16089,7 +16123,7 @@
             <a:r>
               <a:rPr sz="1100" b="1" i="0">
                 <a:solidFill>
-                  <a:srgbClr val="FFFFFF"/>
+                  <a:srgbClr val="0B5E57"/>
                 </a:solidFill>
                 <a:latin typeface="Calibri"/>
               </a:rPr>
@@ -16107,7 +16141,7 @@
         <p:spPr>
           <a:xfrm>
             <a:off x="3044952" y="1463040"/>
-            <a:ext cx="1161288" cy="1143000"/>
+            <a:ext cx="1161288" cy="640080"/>
           </a:xfrm>
           <a:prstGeom prst="chevron">
             <a:avLst/>
@@ -16135,8 +16169,8 @@
         </p:nvSpPr>
         <p:spPr>
           <a:xfrm>
-            <a:off x="3209544" y="1572768"/>
-            <a:ext cx="886968" cy="365760"/>
+            <a:off x="3182112" y="1572768"/>
+            <a:ext cx="886968" cy="411480"/>
           </a:xfrm>
           <a:prstGeom prst="rect">
             <a:avLst/>
@@ -16170,8 +16204,8 @@
         </p:nvSpPr>
         <p:spPr>
           <a:xfrm>
-            <a:off x="3209544" y="1938528"/>
-            <a:ext cx="886968" cy="640080"/>
+            <a:off x="2999232" y="2148840"/>
+            <a:ext cx="1252728" cy="502920"/>
           </a:xfrm>
           <a:prstGeom prst="rect">
             <a:avLst/>
@@ -16188,7 +16222,7 @@
             <a:r>
               <a:rPr sz="1100" b="1" i="0">
                 <a:solidFill>
-                  <a:srgbClr val="FFFFFF"/>
+                  <a:srgbClr val="0B5E57"/>
                 </a:solidFill>
                 <a:latin typeface="Calibri"/>
               </a:rPr>
@@ -16200,7 +16234,7 @@
             <a:r>
               <a:rPr sz="1100" b="1" i="0">
                 <a:solidFill>
-                  <a:srgbClr val="FFFFFF"/>
+                  <a:srgbClr val="0B5E57"/>
                 </a:solidFill>
                 <a:latin typeface="Calibri"/>
               </a:rPr>
@@ -16218,7 +16252,7 @@
         <p:spPr>
           <a:xfrm>
             <a:off x="4315968" y="1463040"/>
-            <a:ext cx="1161288" cy="1143000"/>
+            <a:ext cx="1161288" cy="640080"/>
           </a:xfrm>
           <a:prstGeom prst="chevron">
             <a:avLst/>
@@ -16246,8 +16280,8 @@
         </p:nvSpPr>
         <p:spPr>
           <a:xfrm>
-            <a:off x="4480560" y="1572768"/>
-            <a:ext cx="886968" cy="365760"/>
+            <a:off x="4453128" y="1572768"/>
+            <a:ext cx="886968" cy="411480"/>
           </a:xfrm>
           <a:prstGeom prst="rect">
             <a:avLst/>
@@ -16281,8 +16315,8 @@
         </p:nvSpPr>
         <p:spPr>
           <a:xfrm>
-            <a:off x="4480560" y="1938528"/>
-            <a:ext cx="886968" cy="640080"/>
+            <a:off x="4270248" y="2148840"/>
+            <a:ext cx="1252728" cy="502920"/>
           </a:xfrm>
           <a:prstGeom prst="rect">
             <a:avLst/>
@@ -16299,7 +16333,7 @@
             <a:r>
               <a:rPr sz="1100" b="1" i="0">
                 <a:solidFill>
-                  <a:srgbClr val="FFFFFF"/>
+                  <a:srgbClr val="0B5E57"/>
                 </a:solidFill>
                 <a:latin typeface="Calibri"/>
               </a:rPr>
@@ -16311,7 +16345,7 @@
             <a:r>
               <a:rPr sz="1100" b="1" i="0">
                 <a:solidFill>
-                  <a:srgbClr val="FFFFFF"/>
+                  <a:srgbClr val="0B5E57"/>
                 </a:solidFill>
                 <a:latin typeface="Calibri"/>
               </a:rPr>
@@ -16329,7 +16363,7 @@
         <p:spPr>
           <a:xfrm>
             <a:off x="5586984" y="1463040"/>
-            <a:ext cx="1161288" cy="1143000"/>
+            <a:ext cx="1161288" cy="640080"/>
           </a:xfrm>
           <a:prstGeom prst="chevron">
             <a:avLst/>
@@ -16357,8 +16391,8 @@
         </p:nvSpPr>
         <p:spPr>
           <a:xfrm>
-            <a:off x="5751576" y="1572768"/>
-            <a:ext cx="886968" cy="365760"/>
+            <a:off x="5724144" y="1572768"/>
+            <a:ext cx="886968" cy="411480"/>
           </a:xfrm>
           <a:prstGeom prst="rect">
             <a:avLst/>
@@ -16392,8 +16426,8 @@
         </p:nvSpPr>
         <p:spPr>
           <a:xfrm>
-            <a:off x="5751576" y="1938528"/>
-            <a:ext cx="886968" cy="640080"/>
+            <a:off x="5541264" y="2148840"/>
+            <a:ext cx="1252728" cy="502920"/>
           </a:xfrm>
           <a:prstGeom prst="rect">
             <a:avLst/>
@@ -16410,7 +16444,7 @@
             <a:r>
               <a:rPr sz="1100" b="1" i="0">
                 <a:solidFill>
-                  <a:srgbClr val="FFFFFF"/>
+                  <a:srgbClr val="0B5E57"/>
                 </a:solidFill>
                 <a:latin typeface="Calibri"/>
               </a:rPr>
@@ -16422,7 +16456,7 @@
             <a:r>
               <a:rPr sz="1100" b="1" i="0">
                 <a:solidFill>
-                  <a:srgbClr val="FFFFFF"/>
+                  <a:srgbClr val="0B5E57"/>
                 </a:solidFill>
                 <a:latin typeface="Calibri"/>
               </a:rPr>
@@ -16440,7 +16474,7 @@
         <p:spPr>
           <a:xfrm>
             <a:off x="6858000" y="1463040"/>
-            <a:ext cx="1161288" cy="1143000"/>
+            <a:ext cx="1161288" cy="640080"/>
           </a:xfrm>
           <a:prstGeom prst="chevron">
             <a:avLst/>
@@ -16468,8 +16502,8 @@
         </p:nvSpPr>
         <p:spPr>
           <a:xfrm>
-            <a:off x="7022592" y="1572768"/>
-            <a:ext cx="886968" cy="365760"/>
+            <a:off x="6995160" y="1572768"/>
+            <a:ext cx="886968" cy="411480"/>
           </a:xfrm>
           <a:prstGeom prst="rect">
             <a:avLst/>
@@ -16503,8 +16537,8 @@
         </p:nvSpPr>
         <p:spPr>
           <a:xfrm>
-            <a:off x="7022592" y="1938528"/>
-            <a:ext cx="886968" cy="640080"/>
+            <a:off x="6812280" y="2148840"/>
+            <a:ext cx="1252728" cy="502920"/>
           </a:xfrm>
           <a:prstGeom prst="rect">
             <a:avLst/>
@@ -16521,7 +16555,7 @@
             <a:r>
               <a:rPr sz="1100" b="1" i="0">
                 <a:solidFill>
-                  <a:srgbClr val="FFFFFF"/>
+                  <a:srgbClr val="0B5E57"/>
                 </a:solidFill>
                 <a:latin typeface="Calibri"/>
               </a:rPr>
@@ -16539,7 +16573,7 @@
         <p:spPr>
           <a:xfrm>
             <a:off x="8129016" y="1463040"/>
-            <a:ext cx="1161288" cy="1143000"/>
+            <a:ext cx="1161288" cy="640080"/>
           </a:xfrm>
           <a:prstGeom prst="chevron">
             <a:avLst/>
@@ -16567,8 +16601,8 @@
         </p:nvSpPr>
         <p:spPr>
           <a:xfrm>
-            <a:off x="8293608" y="1572768"/>
-            <a:ext cx="886968" cy="365760"/>
+            <a:off x="8266176" y="1572768"/>
+            <a:ext cx="886968" cy="411480"/>
           </a:xfrm>
           <a:prstGeom prst="rect">
             <a:avLst/>
@@ -16602,8 +16636,8 @@
         </p:nvSpPr>
         <p:spPr>
           <a:xfrm>
-            <a:off x="8293608" y="1938528"/>
-            <a:ext cx="886968" cy="640080"/>
+            <a:off x="8083296" y="2148840"/>
+            <a:ext cx="1252728" cy="502920"/>
           </a:xfrm>
           <a:prstGeom prst="rect">
             <a:avLst/>
@@ -16620,7 +16654,7 @@
             <a:r>
               <a:rPr sz="1100" b="1" i="0">
                 <a:solidFill>
-                  <a:srgbClr val="FFFFFF"/>
+                  <a:srgbClr val="0B5E57"/>
                 </a:solidFill>
                 <a:latin typeface="Calibri"/>
               </a:rPr>
@@ -16638,7 +16672,7 @@
         <p:spPr>
           <a:xfrm>
             <a:off x="9400032" y="1463040"/>
-            <a:ext cx="1161288" cy="1143000"/>
+            <a:ext cx="1161288" cy="640080"/>
           </a:xfrm>
           <a:prstGeom prst="chevron">
             <a:avLst/>
@@ -16666,8 +16700,8 @@
         </p:nvSpPr>
         <p:spPr>
           <a:xfrm>
-            <a:off x="9564624" y="1572768"/>
-            <a:ext cx="886968" cy="365760"/>
+            <a:off x="9537192" y="1572768"/>
+            <a:ext cx="886968" cy="411480"/>
           </a:xfrm>
           <a:prstGeom prst="rect">
             <a:avLst/>
@@ -16701,8 +16735,8 @@
         </p:nvSpPr>
         <p:spPr>
           <a:xfrm>
-            <a:off x="9564624" y="1938528"/>
-            <a:ext cx="886968" cy="640080"/>
+            <a:off x="9354312" y="2148840"/>
+            <a:ext cx="1252728" cy="502920"/>
           </a:xfrm>
           <a:prstGeom prst="rect">
             <a:avLst/>
@@ -16719,7 +16753,7 @@
             <a:r>
               <a:rPr sz="1100" b="1" i="0">
                 <a:solidFill>
-                  <a:srgbClr val="FFFFFF"/>
+                  <a:srgbClr val="0B5E57"/>
                 </a:solidFill>
                 <a:latin typeface="Calibri"/>
               </a:rPr>
@@ -16731,7 +16765,7 @@
             <a:r>
               <a:rPr sz="1100" b="1" i="0">
                 <a:solidFill>
-                  <a:srgbClr val="FFFFFF"/>
+                  <a:srgbClr val="0B5E57"/>
                 </a:solidFill>
                 <a:latin typeface="Calibri"/>
               </a:rPr>
@@ -16749,7 +16783,7 @@
         <p:spPr>
           <a:xfrm>
             <a:off x="10671048" y="1463040"/>
-            <a:ext cx="1161288" cy="1143000"/>
+            <a:ext cx="1161288" cy="640080"/>
           </a:xfrm>
           <a:prstGeom prst="chevron">
             <a:avLst/>
@@ -16777,8 +16811,8 @@
         </p:nvSpPr>
         <p:spPr>
           <a:xfrm>
-            <a:off x="10835640" y="1572768"/>
-            <a:ext cx="886968" cy="365760"/>
+            <a:off x="10808208" y="1572768"/>
+            <a:ext cx="886968" cy="411480"/>
           </a:xfrm>
           <a:prstGeom prst="rect">
             <a:avLst/>
@@ -16812,8 +16846,8 @@
         </p:nvSpPr>
         <p:spPr>
           <a:xfrm>
-            <a:off x="10835640" y="1938528"/>
-            <a:ext cx="886968" cy="640080"/>
+            <a:off x="10625328" y="2148840"/>
+            <a:ext cx="1252728" cy="502920"/>
           </a:xfrm>
           <a:prstGeom prst="rect">
             <a:avLst/>
@@ -16830,7 +16864,7 @@
             <a:r>
               <a:rPr sz="1100" b="1" i="0">
                 <a:solidFill>
-                  <a:srgbClr val="FFFFFF"/>
+                  <a:srgbClr val="0B5E57"/>
                 </a:solidFill>
                 <a:latin typeface="Calibri"/>
               </a:rPr>
@@ -17628,7 +17662,7 @@
         </p:nvGraphicFramePr>
         <p:xfrm>
           <a:off x="502920" y="1188720"/>
-          <a:ext cx="11155680" cy="4114800"/>
+          <a:ext cx="11155680" cy="4206240"/>
         </p:xfrm>
         <a:graphic>
           <a:graphicData uri="http://schemas.openxmlformats.org/drawingml/2006/table">
@@ -17642,7 +17676,7 @@
                 <a:gridCol w="4480560"/>
                 <a:gridCol w="2834640"/>
               </a:tblGrid>
-              <a:tr h="457200">
+              <a:tr h="420624">
                 <a:tc>
                   <a:txBody>
                     <a:bodyPr wrap="square"/>
@@ -17732,7 +17766,7 @@
                   </a:tcPr>
                 </a:tc>
               </a:tr>
-              <a:tr h="457200">
+              <a:tr h="420624">
                 <a:tc>
                   <a:txBody>
                     <a:bodyPr wrap="square"/>
@@ -17822,7 +17856,7 @@
                   </a:tcPr>
                 </a:tc>
               </a:tr>
-              <a:tr h="457200">
+              <a:tr h="420624">
                 <a:tc>
                   <a:txBody>
                     <a:bodyPr wrap="square"/>
@@ -17835,7 +17869,7 @@
                           </a:solidFill>
                           <a:latin typeface="Calibri"/>
                         </a:rPr>
-                        <a:t>Waiter / host</a:t>
+                        <a:t>Customer at counter</a:t>
                       </a:r>
                     </a:p>
                   </a:txBody>
@@ -17857,7 +17891,7 @@
                           </a:solidFill>
                           <a:latin typeface="Calibri"/>
                         </a:rPr>
-                        <a:t>Tablet — Table map</a:t>
+                        <a:t>2nd monitor — Customer display</a:t>
                       </a:r>
                     </a:p>
                   </a:txBody>
@@ -17879,7 +17913,7 @@
                           </a:solidFill>
                           <a:latin typeface="Calibri"/>
                         </a:rPr>
-                        <a:t>Seat guests, send rounds to kitchen, move table, settle bill</a:t>
+                        <a:t>Sees items, offers, total, change and FBR QR as the cashier rings up</a:t>
                       </a:r>
                     </a:p>
                   </a:txBody>
@@ -17901,7 +17935,7 @@
                           </a:solidFill>
                           <a:latin typeface="Calibri"/>
                         </a:rPr>
-                        <a:t>Restaurant Order write</a:t>
+                        <a:t>None (mirrors the terminal on the same PC)</a:t>
                       </a:r>
                     </a:p>
                   </a:txBody>
@@ -17912,7 +17946,7 @@
                   </a:tcPr>
                 </a:tc>
               </a:tr>
-              <a:tr h="457200">
+              <a:tr h="420624">
                 <a:tc>
                   <a:txBody>
                     <a:bodyPr wrap="square"/>
@@ -17925,7 +17959,7 @@
                           </a:solidFill>
                           <a:latin typeface="Calibri"/>
                         </a:rPr>
-                        <a:t>Kitchen staff</a:t>
+                        <a:t>Waiter / host</a:t>
                       </a:r>
                     </a:p>
                   </a:txBody>
@@ -17947,7 +17981,7 @@
                           </a:solidFill>
                           <a:latin typeface="Calibri"/>
                         </a:rPr>
-                        <a:t>Wall screen — KDS</a:t>
+                        <a:t>Tablet — Table map</a:t>
                       </a:r>
                     </a:p>
                   </a:txBody>
@@ -17969,7 +18003,7 @@
                           </a:solidFill>
                           <a:latin typeface="Calibri"/>
                         </a:rPr>
-                        <a:t>See tickets by station, bump lines, recall, assign rider</a:t>
+                        <a:t>Seat guests, send rounds to kitchen, move table, settle bill</a:t>
                       </a:r>
                     </a:p>
                   </a:txBody>
@@ -17991,7 +18025,7 @@
                           </a:solidFill>
                           <a:latin typeface="Calibri"/>
                         </a:rPr>
-                        <a:t>Restaurant Order read</a:t>
+                        <a:t>Restaurant Order write</a:t>
                       </a:r>
                     </a:p>
                   </a:txBody>
@@ -18002,7 +18036,7 @@
                   </a:tcPr>
                 </a:tc>
               </a:tr>
-              <a:tr h="457200">
+              <a:tr h="420624">
                 <a:tc>
                   <a:txBody>
                     <a:bodyPr wrap="square"/>
@@ -18015,7 +18049,7 @@
                           </a:solidFill>
                           <a:latin typeface="Calibri"/>
                         </a:rPr>
-                        <a:t>Dispatcher</a:t>
+                        <a:t>Kitchen staff</a:t>
                       </a:r>
                     </a:p>
                   </a:txBody>
@@ -18037,7 +18071,7 @@
                           </a:solidFill>
                           <a:latin typeface="Calibri"/>
                         </a:rPr>
-                        <a:t>PC — Dispatch map</a:t>
+                        <a:t>Wall screen — KDS</a:t>
                       </a:r>
                     </a:p>
                   </a:txBody>
@@ -18059,7 +18093,7 @@
                           </a:solidFill>
                           <a:latin typeface="Calibri"/>
                         </a:rPr>
-                        <a:t>Phone orders, assign riders, collect rider cash</a:t>
+                        <a:t>See tickets by station, bump lines, recall, assign rider</a:t>
                       </a:r>
                     </a:p>
                   </a:txBody>
@@ -18081,7 +18115,7 @@
                           </a:solidFill>
                           <a:latin typeface="Calibri"/>
                         </a:rPr>
-                        <a:t>Restaurant Order write</a:t>
+                        <a:t>Restaurant Order read</a:t>
                       </a:r>
                     </a:p>
                   </a:txBody>
@@ -18092,7 +18126,7 @@
                   </a:tcPr>
                 </a:tc>
               </a:tr>
-              <a:tr h="457200">
+              <a:tr h="420624">
                 <a:tc>
                   <a:txBody>
                     <a:bodyPr wrap="square"/>
@@ -18105,7 +18139,7 @@
                           </a:solidFill>
                           <a:latin typeface="Calibri"/>
                         </a:rPr>
-                        <a:t>Rider</a:t>
+                        <a:t>Dispatcher</a:t>
                       </a:r>
                     </a:p>
                   </a:txBody>
@@ -18127,7 +18161,7 @@
                           </a:solidFill>
                           <a:latin typeface="Calibri"/>
                         </a:rPr>
-                        <a:t>Phone — Rider app</a:t>
+                        <a:t>PC — Dispatch map</a:t>
                       </a:r>
                     </a:p>
                   </a:txBody>
@@ -18149,7 +18183,7 @@
                           </a:solidFill>
                           <a:latin typeface="Calibri"/>
                         </a:rPr>
-                        <a:t>Go on duty, accept / reject, pick up, deliver (code, photo, cash)</a:t>
+                        <a:t>Phone orders, assign riders, collect rider cash</a:t>
                       </a:r>
                     </a:p>
                   </a:txBody>
@@ -18171,7 +18205,7 @@
                           </a:solidFill>
                           <a:latin typeface="Calibri"/>
                         </a:rPr>
-                        <a:t>Own deliveries only</a:t>
+                        <a:t>Restaurant Order write</a:t>
                       </a:r>
                     </a:p>
                   </a:txBody>
@@ -18182,7 +18216,7 @@
                   </a:tcPr>
                 </a:tc>
               </a:tr>
-              <a:tr h="457200">
+              <a:tr h="420624">
                 <a:tc>
                   <a:txBody>
                     <a:bodyPr wrap="square"/>
@@ -18195,7 +18229,7 @@
                           </a:solidFill>
                           <a:latin typeface="Calibri"/>
                         </a:rPr>
-                        <a:t>Customer</a:t>
+                        <a:t>Rider</a:t>
                       </a:r>
                     </a:p>
                   </a:txBody>
@@ -18217,7 +18251,7 @@
                           </a:solidFill>
                           <a:latin typeface="Calibri"/>
                         </a:rPr>
-                        <a:t>Phone / web — Ordering site, tracking</a:t>
+                        <a:t>Phone — Rider app</a:t>
                       </a:r>
                     </a:p>
                   </a:txBody>
@@ -18239,7 +18273,187 @@
                           </a:solidFill>
                           <a:latin typeface="Calibri"/>
                         </a:rPr>
+                        <a:t>Go on duty, accept / reject, pick up, deliver (code, photo, cash)</a:t>
+                      </a:r>
+                    </a:p>
+                  </a:txBody>
+                  <a:tcPr marL="64008" marR="64008" marT="27432" marB="27432" anchor="ctr">
+                    <a:solidFill>
+                      <a:srgbClr val="F8FAFC"/>
+                    </a:solidFill>
+                  </a:tcPr>
+                </a:tc>
+                <a:tc>
+                  <a:txBody>
+                    <a:bodyPr wrap="square"/>
+                    <a:lstStyle/>
+                    <a:p>
+                      <a:r>
+                        <a:rPr sz="1100" b="0" i="0">
+                          <a:solidFill>
+                            <a:srgbClr val="1E293B"/>
+                          </a:solidFill>
+                          <a:latin typeface="Calibri"/>
+                        </a:rPr>
+                        <a:t>Own deliveries only</a:t>
+                      </a:r>
+                    </a:p>
+                  </a:txBody>
+                  <a:tcPr marL="64008" marR="64008" marT="27432" marB="27432" anchor="ctr">
+                    <a:solidFill>
+                      <a:srgbClr val="F8FAFC"/>
+                    </a:solidFill>
+                  </a:tcPr>
+                </a:tc>
+              </a:tr>
+              <a:tr h="420624">
+                <a:tc>
+                  <a:txBody>
+                    <a:bodyPr wrap="square"/>
+                    <a:lstStyle/>
+                    <a:p>
+                      <a:r>
+                        <a:rPr sz="1100" b="1" i="0">
+                          <a:solidFill>
+                            <a:srgbClr val="1E293B"/>
+                          </a:solidFill>
+                          <a:latin typeface="Calibri"/>
+                        </a:rPr>
+                        <a:t>Customer</a:t>
+                      </a:r>
+                    </a:p>
+                  </a:txBody>
+                  <a:tcPr marL="64008" marR="64008" marT="27432" marB="27432" anchor="ctr">
+                    <a:solidFill>
+                      <a:srgbClr val="FFFFFF"/>
+                    </a:solidFill>
+                  </a:tcPr>
+                </a:tc>
+                <a:tc>
+                  <a:txBody>
+                    <a:bodyPr wrap="square"/>
+                    <a:lstStyle/>
+                    <a:p>
+                      <a:r>
+                        <a:rPr sz="1100" b="0" i="0">
+                          <a:solidFill>
+                            <a:srgbClr val="1E293B"/>
+                          </a:solidFill>
+                          <a:latin typeface="Calibri"/>
+                        </a:rPr>
+                        <a:t>Phone / web — Ordering site, tracking</a:t>
+                      </a:r>
+                    </a:p>
+                  </a:txBody>
+                  <a:tcPr marL="64008" marR="64008" marT="27432" marB="27432" anchor="ctr">
+                    <a:solidFill>
+                      <a:srgbClr val="FFFFFF"/>
+                    </a:solidFill>
+                  </a:tcPr>
+                </a:tc>
+                <a:tc>
+                  <a:txBody>
+                    <a:bodyPr wrap="square"/>
+                    <a:lstStyle/>
+                    <a:p>
+                      <a:r>
+                        <a:rPr sz="1100" b="0" i="0">
+                          <a:solidFill>
+                            <a:srgbClr val="1E293B"/>
+                          </a:solidFill>
+                          <a:latin typeface="Calibri"/>
+                        </a:rPr>
                         <a:t>Order, pay, track rider, rate order, earn points</a:t>
+                      </a:r>
+                    </a:p>
+                  </a:txBody>
+                  <a:tcPr marL="64008" marR="64008" marT="27432" marB="27432" anchor="ctr">
+                    <a:solidFill>
+                      <a:srgbClr val="FFFFFF"/>
+                    </a:solidFill>
+                  </a:tcPr>
+                </a:tc>
+                <a:tc>
+                  <a:txBody>
+                    <a:bodyPr wrap="square"/>
+                    <a:lstStyle/>
+                    <a:p>
+                      <a:r>
+                        <a:rPr sz="1100" b="0" i="0">
+                          <a:solidFill>
+                            <a:srgbClr val="1E293B"/>
+                          </a:solidFill>
+                          <a:latin typeface="Calibri"/>
+                        </a:rPr>
+                        <a:t>Public, rate limited</a:t>
+                      </a:r>
+                    </a:p>
+                  </a:txBody>
+                  <a:tcPr marL="64008" marR="64008" marT="27432" marB="27432" anchor="ctr">
+                    <a:solidFill>
+                      <a:srgbClr val="FFFFFF"/>
+                    </a:solidFill>
+                  </a:tcPr>
+                </a:tc>
+              </a:tr>
+              <a:tr h="420624">
+                <a:tc>
+                  <a:txBody>
+                    <a:bodyPr wrap="square"/>
+                    <a:lstStyle/>
+                    <a:p>
+                      <a:r>
+                        <a:rPr sz="1100" b="1" i="0">
+                          <a:solidFill>
+                            <a:srgbClr val="1E293B"/>
+                          </a:solidFill>
+                          <a:latin typeface="Calibri"/>
+                        </a:rPr>
+                        <a:t>Walk-in guest</a:t>
+                      </a:r>
+                    </a:p>
+                  </a:txBody>
+                  <a:tcPr marL="64008" marR="64008" marT="27432" marB="27432" anchor="ctr">
+                    <a:solidFill>
+                      <a:srgbClr val="F8FAFC"/>
+                    </a:solidFill>
+                  </a:tcPr>
+                </a:tc>
+                <a:tc>
+                  <a:txBody>
+                    <a:bodyPr wrap="square"/>
+                    <a:lstStyle/>
+                    <a:p>
+                      <a:r>
+                        <a:rPr sz="1100" b="0" i="0">
+                          <a:solidFill>
+                            <a:srgbClr val="1E293B"/>
+                          </a:solidFill>
+                          <a:latin typeface="Calibri"/>
+                        </a:rPr>
+                        <a:t>Tablet — Kiosk</a:t>
+                      </a:r>
+                    </a:p>
+                  </a:txBody>
+                  <a:tcPr marL="64008" marR="64008" marT="27432" marB="27432" anchor="ctr">
+                    <a:solidFill>
+                      <a:srgbClr val="F8FAFC"/>
+                    </a:solidFill>
+                  </a:tcPr>
+                </a:tc>
+                <a:tc>
+                  <a:txBody>
+                    <a:bodyPr wrap="square"/>
+                    <a:lstStyle/>
+                    <a:p>
+                      <a:r>
+                        <a:rPr sz="1100" b="0" i="0">
+                          <a:solidFill>
+                            <a:srgbClr val="1E293B"/>
+                          </a:solidFill>
+                          <a:latin typeface="Calibri"/>
+                        </a:rPr>
+                        <a:t>Self-order; pay at counter</a:t>
                       </a:r>
                     </a:p>
                   </a:txBody>
@@ -18272,7 +18486,7 @@
                   </a:tcPr>
                 </a:tc>
               </a:tr>
-              <a:tr h="457200">
+              <a:tr h="420624">
                 <a:tc>
                   <a:txBody>
                     <a:bodyPr wrap="square"/>
@@ -18285,7 +18499,7 @@
                           </a:solidFill>
                           <a:latin typeface="Calibri"/>
                         </a:rPr>
-                        <a:t>Walk-in guest</a:t>
+                        <a:t>Manager / owner</a:t>
                       </a:r>
                     </a:p>
                   </a:txBody>
@@ -18307,7 +18521,7 @@
                           </a:solidFill>
                           <a:latin typeface="Calibri"/>
                         </a:rPr>
-                        <a:t>Tablet — Kiosk</a:t>
+                        <a:t>Any — Dashboard, reports</a:t>
                       </a:r>
                     </a:p>
                   </a:txBody>
@@ -18329,7 +18543,7 @@
                           </a:solidFill>
                           <a:latin typeface="Calibri"/>
                         </a:rPr>
-                        <a:t>Self-order; pay at counter</a:t>
+                        <a:t>Approve big discounts &amp; returns, reviews, campaigns, settings</a:t>
                       </a:r>
                     </a:p>
                   </a:txBody>
@@ -18351,103 +18565,13 @@
                           </a:solidFill>
                           <a:latin typeface="Calibri"/>
                         </a:rPr>
-                        <a:t>Public, rate limited</a:t>
+                        <a:t>System / Sales / Accounts Manager</a:t>
                       </a:r>
                     </a:p>
                   </a:txBody>
                   <a:tcPr marL="64008" marR="64008" marT="27432" marB="27432" anchor="ctr">
                     <a:solidFill>
                       <a:srgbClr val="FFFFFF"/>
-                    </a:solidFill>
-                  </a:tcPr>
-                </a:tc>
-              </a:tr>
-              <a:tr h="457200">
-                <a:tc>
-                  <a:txBody>
-                    <a:bodyPr wrap="square"/>
-                    <a:lstStyle/>
-                    <a:p>
-                      <a:r>
-                        <a:rPr sz="1100" b="1" i="0">
-                          <a:solidFill>
-                            <a:srgbClr val="1E293B"/>
-                          </a:solidFill>
-                          <a:latin typeface="Calibri"/>
-                        </a:rPr>
-                        <a:t>Manager / owner</a:t>
-                      </a:r>
-                    </a:p>
-                  </a:txBody>
-                  <a:tcPr marL="64008" marR="64008" marT="27432" marB="27432" anchor="ctr">
-                    <a:solidFill>
-                      <a:srgbClr val="F8FAFC"/>
-                    </a:solidFill>
-                  </a:tcPr>
-                </a:tc>
-                <a:tc>
-                  <a:txBody>
-                    <a:bodyPr wrap="square"/>
-                    <a:lstStyle/>
-                    <a:p>
-                      <a:r>
-                        <a:rPr sz="1100" b="0" i="0">
-                          <a:solidFill>
-                            <a:srgbClr val="1E293B"/>
-                          </a:solidFill>
-                          <a:latin typeface="Calibri"/>
-                        </a:rPr>
-                        <a:t>Any — Dashboard, reports</a:t>
-                      </a:r>
-                    </a:p>
-                  </a:txBody>
-                  <a:tcPr marL="64008" marR="64008" marT="27432" marB="27432" anchor="ctr">
-                    <a:solidFill>
-                      <a:srgbClr val="F8FAFC"/>
-                    </a:solidFill>
-                  </a:tcPr>
-                </a:tc>
-                <a:tc>
-                  <a:txBody>
-                    <a:bodyPr wrap="square"/>
-                    <a:lstStyle/>
-                    <a:p>
-                      <a:r>
-                        <a:rPr sz="1100" b="0" i="0">
-                          <a:solidFill>
-                            <a:srgbClr val="1E293B"/>
-                          </a:solidFill>
-                          <a:latin typeface="Calibri"/>
-                        </a:rPr>
-                        <a:t>Approve big discounts &amp; returns, reviews, campaigns, settings</a:t>
-                      </a:r>
-                    </a:p>
-                  </a:txBody>
-                  <a:tcPr marL="64008" marR="64008" marT="27432" marB="27432" anchor="ctr">
-                    <a:solidFill>
-                      <a:srgbClr val="F8FAFC"/>
-                    </a:solidFill>
-                  </a:tcPr>
-                </a:tc>
-                <a:tc>
-                  <a:txBody>
-                    <a:bodyPr wrap="square"/>
-                    <a:lstStyle/>
-                    <a:p>
-                      <a:r>
-                        <a:rPr sz="1100" b="0" i="0">
-                          <a:solidFill>
-                            <a:srgbClr val="1E293B"/>
-                          </a:solidFill>
-                          <a:latin typeface="Calibri"/>
-                        </a:rPr>
-                        <a:t>System / Sales / Accounts Manager</a:t>
-                      </a:r>
-                    </a:p>
-                  </a:txBody>
-                  <a:tcPr marL="64008" marR="64008" marT="27432" marB="27432" anchor="ctr">
-                    <a:solidFill>
-                      <a:srgbClr val="F8FAFC"/>
                     </a:solidFill>
                   </a:tcPr>
                 </a:tc>
@@ -18761,7 +18885,7 @@
         <p:spPr>
           <a:xfrm>
             <a:off x="640080" y="1618488"/>
-            <a:ext cx="1264158" cy="530352"/>
+            <a:ext cx="1111504" cy="530352"/>
           </a:xfrm>
           <a:prstGeom prst="rect">
             <a:avLst/>
@@ -18800,8 +18924,8 @@
         </p:nvSpPr>
         <p:spPr>
           <a:xfrm>
-            <a:off x="2013966" y="1618488"/>
-            <a:ext cx="1264158" cy="530352"/>
+            <a:off x="1861312" y="1618488"/>
+            <a:ext cx="1111504" cy="530352"/>
           </a:xfrm>
           <a:prstGeom prst="rect">
             <a:avLst/>
@@ -18827,7 +18951,7 @@
                 </a:solidFill>
                 <a:latin typeface="Calibri"/>
               </a:rPr>
-              <a:t>Table map</a:t>
+              <a:t>Customer display</a:t>
             </a:r>
           </a:p>
         </p:txBody>
@@ -18840,8 +18964,8 @@
         </p:nvSpPr>
         <p:spPr>
           <a:xfrm>
-            <a:off x="3387852" y="1618488"/>
-            <a:ext cx="1264158" cy="530352"/>
+            <a:off x="3082544" y="1618488"/>
+            <a:ext cx="1111504" cy="530352"/>
           </a:xfrm>
           <a:prstGeom prst="rect">
             <a:avLst/>
@@ -18867,7 +18991,7 @@
                 </a:solidFill>
                 <a:latin typeface="Calibri"/>
               </a:rPr>
-              <a:t>KDS</a:t>
+              <a:t>Table map</a:t>
             </a:r>
           </a:p>
         </p:txBody>
@@ -18880,8 +19004,8 @@
         </p:nvSpPr>
         <p:spPr>
           <a:xfrm>
-            <a:off x="4761738" y="1618488"/>
-            <a:ext cx="1264158" cy="530352"/>
+            <a:off x="4303776" y="1618488"/>
+            <a:ext cx="1111504" cy="530352"/>
           </a:xfrm>
           <a:prstGeom prst="rect">
             <a:avLst/>
@@ -18907,7 +19031,7 @@
                 </a:solidFill>
                 <a:latin typeface="Calibri"/>
               </a:rPr>
-              <a:t>Dispatch</a:t>
+              <a:t>KDS</a:t>
             </a:r>
           </a:p>
         </p:txBody>
@@ -18920,8 +19044,8 @@
         </p:nvSpPr>
         <p:spPr>
           <a:xfrm>
-            <a:off x="6135624" y="1618488"/>
-            <a:ext cx="1264158" cy="530352"/>
+            <a:off x="5525008" y="1618488"/>
+            <a:ext cx="1111504" cy="530352"/>
           </a:xfrm>
           <a:prstGeom prst="rect">
             <a:avLst/>
@@ -18947,7 +19071,7 @@
                 </a:solidFill>
                 <a:latin typeface="Calibri"/>
               </a:rPr>
-              <a:t>Rider app</a:t>
+              <a:t>Dispatch</a:t>
             </a:r>
           </a:p>
         </p:txBody>
@@ -18960,8 +19084,8 @@
         </p:nvSpPr>
         <p:spPr>
           <a:xfrm>
-            <a:off x="7509510" y="1618488"/>
-            <a:ext cx="1264158" cy="530352"/>
+            <a:off x="6746240" y="1618488"/>
+            <a:ext cx="1111504" cy="530352"/>
           </a:xfrm>
           <a:prstGeom prst="rect">
             <a:avLst/>
@@ -18987,7 +19111,7 @@
                 </a:solidFill>
                 <a:latin typeface="Calibri"/>
               </a:rPr>
-              <a:t>Ordering site</a:t>
+              <a:t>Rider app</a:t>
             </a:r>
           </a:p>
         </p:txBody>
@@ -19000,8 +19124,8 @@
         </p:nvSpPr>
         <p:spPr>
           <a:xfrm>
-            <a:off x="8883396" y="1618488"/>
-            <a:ext cx="1264158" cy="530352"/>
+            <a:off x="7967472" y="1618488"/>
+            <a:ext cx="1111504" cy="530352"/>
           </a:xfrm>
           <a:prstGeom prst="rect">
             <a:avLst/>
@@ -19027,7 +19151,7 @@
                 </a:solidFill>
                 <a:latin typeface="Calibri"/>
               </a:rPr>
-              <a:t>Kiosk</a:t>
+              <a:t>Ordering site</a:t>
             </a:r>
           </a:p>
         </p:txBody>
@@ -19040,8 +19164,8 @@
         </p:nvSpPr>
         <p:spPr>
           <a:xfrm>
-            <a:off x="10257282" y="1618488"/>
-            <a:ext cx="1264158" cy="530352"/>
+            <a:off x="9188704" y="1618488"/>
+            <a:ext cx="1111504" cy="530352"/>
           </a:xfrm>
           <a:prstGeom prst="rect">
             <a:avLst/>
@@ -19067,6 +19191,46 @@
                 </a:solidFill>
                 <a:latin typeface="Calibri"/>
               </a:rPr>
+              <a:t>Kiosk</a:t>
+            </a:r>
+          </a:p>
+        </p:txBody>
+      </p:sp>
+      <p:sp>
+        <p:nvSpPr>
+          <p:cNvPr id="17" name="Rectangle 16"/>
+          <p:cNvSpPr/>
+          <p:nvPr/>
+        </p:nvSpPr>
+        <p:spPr>
+          <a:xfrm>
+            <a:off x="10409936" y="1618488"/>
+            <a:ext cx="1111504" cy="530352"/>
+          </a:xfrm>
+          <a:prstGeom prst="rect">
+            <a:avLst/>
+          </a:prstGeom>
+          <a:solidFill>
+            <a:srgbClr val="FFFFFF"/>
+          </a:solidFill>
+          <a:ln w="12700">
+            <a:solidFill>
+              <a:srgbClr val="2A78D6"/>
+            </a:solidFill>
+          </a:ln>
+        </p:spPr>
+        <p:txBody>
+          <a:bodyPr rtlCol="0" anchor="ctr" wrap="square" lIns="54864" rIns="54864" tIns="27432" bIns="27432"/>
+          <a:lstStyle/>
+          <a:p>
+            <a:pPr algn="ctr"/>
+            <a:r>
+              <a:rPr sz="1100" b="1" i="0">
+                <a:solidFill>
+                  <a:srgbClr val="1E293B"/>
+                </a:solidFill>
+                <a:latin typeface="Calibri"/>
+              </a:rPr>
               <a:t>Owner dashboard</a:t>
             </a:r>
           </a:p>
@@ -19074,7 +19238,7 @@
       </p:sp>
       <p:sp>
         <p:nvSpPr>
-          <p:cNvPr id="17" name="Rectangle 16"/>
+          <p:cNvPr id="18" name="Rectangle 17"/>
           <p:cNvSpPr/>
           <p:nvPr/>
         </p:nvSpPr>
@@ -19105,7 +19269,7 @@
       </p:sp>
       <p:sp>
         <p:nvSpPr>
-          <p:cNvPr id="18" name="TextBox 17"/>
+          <p:cNvPr id="19" name="TextBox 18"/>
           <p:cNvSpPr txBox="1"/>
           <p:nvPr/>
         </p:nvSpPr>
@@ -19140,7 +19304,7 @@
       </p:sp>
       <p:sp>
         <p:nvSpPr>
-          <p:cNvPr id="19" name="Rectangle 18"/>
+          <p:cNvPr id="20" name="Rectangle 19"/>
           <p:cNvSpPr/>
           <p:nvPr/>
         </p:nvSpPr>
@@ -19180,7 +19344,7 @@
       </p:sp>
       <p:sp>
         <p:nvSpPr>
-          <p:cNvPr id="20" name="Rectangle 19"/>
+          <p:cNvPr id="21" name="Rectangle 20"/>
           <p:cNvSpPr/>
           <p:nvPr/>
         </p:nvSpPr>
@@ -19220,7 +19384,7 @@
       </p:sp>
       <p:sp>
         <p:nvSpPr>
-          <p:cNvPr id="21" name="Rectangle 20"/>
+          <p:cNvPr id="22" name="Rectangle 21"/>
           <p:cNvSpPr/>
           <p:nvPr/>
         </p:nvSpPr>
@@ -19260,7 +19424,7 @@
       </p:sp>
       <p:sp>
         <p:nvSpPr>
-          <p:cNvPr id="22" name="Rectangle 21"/>
+          <p:cNvPr id="23" name="Rectangle 22"/>
           <p:cNvSpPr/>
           <p:nvPr/>
         </p:nvSpPr>
@@ -19300,7 +19464,7 @@
       </p:sp>
       <p:sp>
         <p:nvSpPr>
-          <p:cNvPr id="23" name="Rectangle 22"/>
+          <p:cNvPr id="24" name="Rectangle 23"/>
           <p:cNvSpPr/>
           <p:nvPr/>
         </p:nvSpPr>
@@ -19340,7 +19504,7 @@
       </p:sp>
       <p:sp>
         <p:nvSpPr>
-          <p:cNvPr id="24" name="Rectangle 23"/>
+          <p:cNvPr id="25" name="Rectangle 24"/>
           <p:cNvSpPr/>
           <p:nvPr/>
         </p:nvSpPr>
@@ -19380,7 +19544,7 @@
       </p:sp>
       <p:sp>
         <p:nvSpPr>
-          <p:cNvPr id="25" name="Rectangle 24"/>
+          <p:cNvPr id="26" name="Rectangle 25"/>
           <p:cNvSpPr/>
           <p:nvPr/>
         </p:nvSpPr>
@@ -19420,7 +19584,7 @@
       </p:sp>
       <p:sp>
         <p:nvSpPr>
-          <p:cNvPr id="26" name="Rectangle 25"/>
+          <p:cNvPr id="27" name="Rectangle 26"/>
           <p:cNvSpPr/>
           <p:nvPr/>
         </p:nvSpPr>
@@ -19460,7 +19624,7 @@
       </p:sp>
       <p:sp>
         <p:nvSpPr>
-          <p:cNvPr id="27" name="Rectangle 26"/>
+          <p:cNvPr id="28" name="Rectangle 27"/>
           <p:cNvSpPr/>
           <p:nvPr/>
         </p:nvSpPr>
@@ -19491,7 +19655,7 @@
       </p:sp>
       <p:sp>
         <p:nvSpPr>
-          <p:cNvPr id="28" name="TextBox 27"/>
+          <p:cNvPr id="29" name="TextBox 28"/>
           <p:cNvSpPr txBox="1"/>
           <p:nvPr/>
         </p:nvSpPr>
@@ -19526,7 +19690,7 @@
       </p:sp>
       <p:sp>
         <p:nvSpPr>
-          <p:cNvPr id="29" name="Rectangle 28"/>
+          <p:cNvPr id="30" name="Rectangle 29"/>
           <p:cNvSpPr/>
           <p:nvPr/>
         </p:nvSpPr>
@@ -19566,7 +19730,7 @@
       </p:sp>
       <p:sp>
         <p:nvSpPr>
-          <p:cNvPr id="30" name="Rectangle 29"/>
+          <p:cNvPr id="31" name="Rectangle 30"/>
           <p:cNvSpPr/>
           <p:nvPr/>
         </p:nvSpPr>
@@ -19606,7 +19770,7 @@
       </p:sp>
       <p:sp>
         <p:nvSpPr>
-          <p:cNvPr id="31" name="Rectangle 30"/>
+          <p:cNvPr id="32" name="Rectangle 31"/>
           <p:cNvSpPr/>
           <p:nvPr/>
         </p:nvSpPr>
@@ -19646,7 +19810,7 @@
       </p:sp>
       <p:sp>
         <p:nvSpPr>
-          <p:cNvPr id="32" name="Rectangle 31"/>
+          <p:cNvPr id="33" name="Rectangle 32"/>
           <p:cNvSpPr/>
           <p:nvPr/>
         </p:nvSpPr>
@@ -19686,7 +19850,7 @@
       </p:sp>
       <p:sp>
         <p:nvSpPr>
-          <p:cNvPr id="33" name="Rectangle 32"/>
+          <p:cNvPr id="34" name="Rectangle 33"/>
           <p:cNvSpPr/>
           <p:nvPr/>
         </p:nvSpPr>
@@ -19726,7 +19890,7 @@
       </p:sp>
       <p:sp>
         <p:nvSpPr>
-          <p:cNvPr id="34" name="Rectangle 33"/>
+          <p:cNvPr id="35" name="Rectangle 34"/>
           <p:cNvSpPr/>
           <p:nvPr/>
         </p:nvSpPr>
@@ -19766,7 +19930,7 @@
       </p:sp>
       <p:sp>
         <p:nvSpPr>
-          <p:cNvPr id="35" name="Rectangle 34"/>
+          <p:cNvPr id="36" name="Rectangle 35"/>
           <p:cNvSpPr/>
           <p:nvPr/>
         </p:nvSpPr>
@@ -19806,7 +19970,7 @@
       </p:sp>
       <p:sp>
         <p:nvSpPr>
-          <p:cNvPr id="36" name="Rectangle 35"/>
+          <p:cNvPr id="37" name="Rectangle 36"/>
           <p:cNvSpPr/>
           <p:nvPr/>
         </p:nvSpPr>
@@ -19846,7 +20010,7 @@
       </p:sp>
       <p:sp>
         <p:nvSpPr>
-          <p:cNvPr id="37" name="Rectangle 36"/>
+          <p:cNvPr id="38" name="Rectangle 37"/>
           <p:cNvSpPr/>
           <p:nvPr/>
         </p:nvSpPr>
@@ -19877,7 +20041,7 @@
       </p:sp>
       <p:sp>
         <p:nvSpPr>
-          <p:cNvPr id="38" name="TextBox 37"/>
+          <p:cNvPr id="39" name="TextBox 38"/>
           <p:cNvSpPr txBox="1"/>
           <p:nvPr/>
         </p:nvSpPr>
@@ -19912,7 +20076,7 @@
       </p:sp>
       <p:sp>
         <p:nvSpPr>
-          <p:cNvPr id="39" name="Rectangle 38"/>
+          <p:cNvPr id="40" name="Rectangle 39"/>
           <p:cNvSpPr/>
           <p:nvPr/>
         </p:nvSpPr>
@@ -19952,7 +20116,7 @@
       </p:sp>
       <p:sp>
         <p:nvSpPr>
-          <p:cNvPr id="40" name="Rectangle 39"/>
+          <p:cNvPr id="41" name="Rectangle 40"/>
           <p:cNvSpPr/>
           <p:nvPr/>
         </p:nvSpPr>
@@ -19992,7 +20156,7 @@
       </p:sp>
       <p:sp>
         <p:nvSpPr>
-          <p:cNvPr id="41" name="Rectangle 40"/>
+          <p:cNvPr id="42" name="Rectangle 41"/>
           <p:cNvSpPr/>
           <p:nvPr/>
         </p:nvSpPr>
@@ -20032,7 +20196,7 @@
       </p:sp>
       <p:sp>
         <p:nvSpPr>
-          <p:cNvPr id="42" name="Rectangle 41"/>
+          <p:cNvPr id="43" name="Rectangle 42"/>
           <p:cNvSpPr/>
           <p:nvPr/>
         </p:nvSpPr>
@@ -20072,7 +20236,7 @@
       </p:sp>
       <p:sp>
         <p:nvSpPr>
-          <p:cNvPr id="43" name="TextBox 42"/>
+          <p:cNvPr id="44" name="TextBox 43"/>
           <p:cNvSpPr txBox="1"/>
           <p:nvPr/>
         </p:nvSpPr>
@@ -24558,8 +24722,8 @@
         </p:nvSpPr>
         <p:spPr>
           <a:xfrm>
-            <a:off x="1892808" y="1046988"/>
-            <a:ext cx="457200" cy="219456"/>
+            <a:off x="1920240" y="1321308"/>
+            <a:ext cx="457200" cy="201168"/>
           </a:xfrm>
           <a:prstGeom prst="rect">
             <a:avLst/>
@@ -24569,12 +24733,12 @@
           </a:solidFill>
         </p:spPr>
         <p:txBody>
-          <a:bodyPr wrap="square" lIns="45720" rIns="45720" tIns="18288" bIns="18288" anchor="t">
+          <a:bodyPr wrap="none" lIns="45720" rIns="45720" tIns="18288" bIns="18288" anchor="t">
             <a:spAutoFit/>
           </a:bodyPr>
           <a:lstStyle/>
           <a:p>
-            <a:pPr algn="ctr"/>
+            <a:pPr algn="l"/>
             <a:r>
               <a:rPr sz="900" b="0" i="0">
                 <a:solidFill>
@@ -24618,7 +24782,7 @@
         <p:spPr>
           <a:xfrm>
             <a:off x="1828800" y="2007108"/>
-            <a:ext cx="731520" cy="219456"/>
+            <a:ext cx="731520" cy="201168"/>
           </a:xfrm>
           <a:prstGeom prst="rect">
             <a:avLst/>
@@ -24628,12 +24792,12 @@
           </a:solidFill>
         </p:spPr>
         <p:txBody>
-          <a:bodyPr wrap="square" lIns="45720" rIns="45720" tIns="18288" bIns="18288" anchor="t">
+          <a:bodyPr wrap="none" lIns="45720" rIns="45720" tIns="18288" bIns="18288" anchor="t">
             <a:spAutoFit/>
           </a:bodyPr>
           <a:lstStyle/>
           <a:p>
-            <a:pPr algn="ctr"/>
+            <a:pPr algn="l"/>
             <a:r>
               <a:rPr sz="900" b="0" i="0">
                 <a:solidFill>
@@ -24677,7 +24841,7 @@
         <p:spPr>
           <a:xfrm>
             <a:off x="1856232" y="2692908"/>
-            <a:ext cx="548640" cy="219456"/>
+            <a:ext cx="548640" cy="201168"/>
           </a:xfrm>
           <a:prstGeom prst="rect">
             <a:avLst/>
@@ -24687,12 +24851,12 @@
           </a:solidFill>
         </p:spPr>
         <p:txBody>
-          <a:bodyPr wrap="square" lIns="45720" rIns="45720" tIns="18288" bIns="18288" anchor="t">
+          <a:bodyPr wrap="none" lIns="45720" rIns="45720" tIns="18288" bIns="18288" anchor="t">
             <a:spAutoFit/>
           </a:bodyPr>
           <a:lstStyle/>
           <a:p>
-            <a:pPr algn="ctr"/>
+            <a:pPr algn="l"/>
             <a:r>
               <a:rPr sz="900" b="0" i="0">
                 <a:solidFill>
@@ -24736,7 +24900,7 @@
         <p:spPr>
           <a:xfrm>
             <a:off x="6903720" y="1051560"/>
-            <a:ext cx="822960" cy="219456"/>
+            <a:ext cx="822960" cy="201168"/>
           </a:xfrm>
           <a:prstGeom prst="rect">
             <a:avLst/>
@@ -24746,12 +24910,12 @@
           </a:solidFill>
         </p:spPr>
         <p:txBody>
-          <a:bodyPr wrap="square" lIns="45720" rIns="45720" tIns="18288" bIns="18288" anchor="t">
+          <a:bodyPr wrap="none" lIns="45720" rIns="45720" tIns="18288" bIns="18288" anchor="t">
             <a:spAutoFit/>
           </a:bodyPr>
           <a:lstStyle/>
           <a:p>
-            <a:pPr algn="ctr"/>
+            <a:pPr algn="l"/>
             <a:r>
               <a:rPr sz="900" b="0" i="0">
                 <a:solidFill>
@@ -24795,7 +24959,7 @@
         <p:spPr>
           <a:xfrm>
             <a:off x="2400299" y="2203704"/>
-            <a:ext cx="685800" cy="219456"/>
+            <a:ext cx="685800" cy="201168"/>
           </a:xfrm>
           <a:prstGeom prst="rect">
             <a:avLst/>
@@ -24805,12 +24969,12 @@
           </a:solidFill>
         </p:spPr>
         <p:txBody>
-          <a:bodyPr wrap="square" lIns="45720" rIns="45720" tIns="18288" bIns="18288" anchor="t">
+          <a:bodyPr wrap="none" lIns="45720" rIns="45720" tIns="18288" bIns="18288" anchor="t">
             <a:spAutoFit/>
           </a:bodyPr>
           <a:lstStyle/>
           <a:p>
-            <a:pPr algn="ctr"/>
+            <a:pPr algn="l"/>
             <a:r>
               <a:rPr sz="900" b="0" i="0">
                 <a:solidFill>
@@ -24854,7 +25018,7 @@
         <p:spPr>
           <a:xfrm>
             <a:off x="4480560" y="2185416"/>
-            <a:ext cx="457200" cy="219456"/>
+            <a:ext cx="457200" cy="201168"/>
           </a:xfrm>
           <a:prstGeom prst="rect">
             <a:avLst/>
@@ -24864,12 +25028,12 @@
           </a:solidFill>
         </p:spPr>
         <p:txBody>
-          <a:bodyPr wrap="square" lIns="45720" rIns="45720" tIns="18288" bIns="18288" anchor="t">
+          <a:bodyPr wrap="none" lIns="45720" rIns="45720" tIns="18288" bIns="18288" anchor="t">
             <a:spAutoFit/>
           </a:bodyPr>
           <a:lstStyle/>
           <a:p>
-            <a:pPr algn="ctr"/>
+            <a:pPr algn="l"/>
             <a:r>
               <a:rPr sz="900" b="0" i="0">
                 <a:solidFill>
@@ -24913,7 +25077,7 @@
         <p:spPr>
           <a:xfrm>
             <a:off x="4480559" y="1517904"/>
-            <a:ext cx="548640" cy="219456"/>
+            <a:ext cx="548640" cy="201168"/>
           </a:xfrm>
           <a:prstGeom prst="rect">
             <a:avLst/>
@@ -24923,12 +25087,12 @@
           </a:solidFill>
         </p:spPr>
         <p:txBody>
-          <a:bodyPr wrap="square" lIns="45720" rIns="45720" tIns="18288" bIns="18288" anchor="t">
+          <a:bodyPr wrap="none" lIns="45720" rIns="45720" tIns="18288" bIns="18288" anchor="t">
             <a:spAutoFit/>
           </a:bodyPr>
           <a:lstStyle/>
           <a:p>
-            <a:pPr algn="ctr"/>
+            <a:pPr algn="l"/>
             <a:r>
               <a:rPr sz="900" b="0" i="0">
                 <a:solidFill>
@@ -24973,7 +25137,7 @@
         <p:spPr>
           <a:xfrm>
             <a:off x="6195060" y="1024128"/>
-            <a:ext cx="1005840" cy="219456"/>
+            <a:ext cx="1005840" cy="201168"/>
           </a:xfrm>
           <a:prstGeom prst="rect">
             <a:avLst/>
@@ -24983,12 +25147,12 @@
           </a:solidFill>
         </p:spPr>
         <p:txBody>
-          <a:bodyPr wrap="square" lIns="45720" rIns="45720" tIns="18288" bIns="18288" anchor="t">
+          <a:bodyPr wrap="none" lIns="45720" rIns="45720" tIns="18288" bIns="18288" anchor="t">
             <a:spAutoFit/>
           </a:bodyPr>
           <a:lstStyle/>
           <a:p>
-            <a:pPr algn="ctr"/>
+            <a:pPr algn="l"/>
             <a:r>
               <a:rPr sz="900" b="0" i="0">
                 <a:solidFill>
@@ -25032,7 +25196,7 @@
         <p:spPr>
           <a:xfrm>
             <a:off x="4983480" y="2331720"/>
-            <a:ext cx="457200" cy="219456"/>
+            <a:ext cx="457200" cy="201168"/>
           </a:xfrm>
           <a:prstGeom prst="rect">
             <a:avLst/>
@@ -25042,12 +25206,12 @@
           </a:solidFill>
         </p:spPr>
         <p:txBody>
-          <a:bodyPr wrap="square" lIns="45720" rIns="45720" tIns="18288" bIns="18288" anchor="t">
+          <a:bodyPr wrap="none" lIns="45720" rIns="45720" tIns="18288" bIns="18288" anchor="t">
             <a:spAutoFit/>
           </a:bodyPr>
           <a:lstStyle/>
           <a:p>
-            <a:pPr algn="ctr"/>
+            <a:pPr algn="l"/>
             <a:r>
               <a:rPr sz="900" b="0" i="0">
                 <a:solidFill>
@@ -25091,7 +25255,7 @@
         <p:spPr>
           <a:xfrm>
             <a:off x="7178039" y="1517904"/>
-            <a:ext cx="868680" cy="219456"/>
+            <a:ext cx="868680" cy="201168"/>
           </a:xfrm>
           <a:prstGeom prst="rect">
             <a:avLst/>
@@ -25101,12 +25265,12 @@
           </a:solidFill>
         </p:spPr>
         <p:txBody>
-          <a:bodyPr wrap="square" lIns="45720" rIns="45720" tIns="18288" bIns="18288" anchor="t">
+          <a:bodyPr wrap="none" lIns="45720" rIns="45720" tIns="18288" bIns="18288" anchor="t">
             <a:spAutoFit/>
           </a:bodyPr>
           <a:lstStyle/>
           <a:p>
-            <a:pPr algn="ctr"/>
+            <a:pPr algn="l"/>
             <a:r>
               <a:rPr sz="900" b="0" i="0">
                 <a:solidFill>
@@ -25150,7 +25314,7 @@
         <p:spPr>
           <a:xfrm>
             <a:off x="9921239" y="1408176"/>
-            <a:ext cx="411480" cy="219456"/>
+            <a:ext cx="411480" cy="201168"/>
           </a:xfrm>
           <a:prstGeom prst="rect">
             <a:avLst/>
@@ -25160,12 +25324,12 @@
           </a:solidFill>
         </p:spPr>
         <p:txBody>
-          <a:bodyPr wrap="square" lIns="45720" rIns="45720" tIns="18288" bIns="18288" anchor="t">
+          <a:bodyPr wrap="none" lIns="45720" rIns="45720" tIns="18288" bIns="18288" anchor="t">
             <a:spAutoFit/>
           </a:bodyPr>
           <a:lstStyle/>
           <a:p>
-            <a:pPr algn="ctr"/>
+            <a:pPr algn="l"/>
             <a:r>
               <a:rPr sz="900" b="0" i="0">
                 <a:solidFill>
@@ -25209,7 +25373,7 @@
         <p:spPr>
           <a:xfrm>
             <a:off x="9829799" y="1920240"/>
-            <a:ext cx="914400" cy="219456"/>
+            <a:ext cx="914400" cy="201168"/>
           </a:xfrm>
           <a:prstGeom prst="rect">
             <a:avLst/>
@@ -25219,12 +25383,12 @@
           </a:solidFill>
         </p:spPr>
         <p:txBody>
-          <a:bodyPr wrap="square" lIns="45720" rIns="45720" tIns="18288" bIns="18288" anchor="t">
+          <a:bodyPr wrap="none" lIns="45720" rIns="45720" tIns="18288" bIns="18288" anchor="t">
             <a:spAutoFit/>
           </a:bodyPr>
           <a:lstStyle/>
           <a:p>
-            <a:pPr algn="ctr"/>
+            <a:pPr algn="l"/>
             <a:r>
               <a:rPr sz="900" b="0" i="0">
                 <a:solidFill>
@@ -25291,7 +25455,7 @@
         <p:spPr>
           <a:xfrm>
             <a:off x="3314699" y="2980944"/>
-            <a:ext cx="960120" cy="219456"/>
+            <a:ext cx="960120" cy="201168"/>
           </a:xfrm>
           <a:prstGeom prst="rect">
             <a:avLst/>
@@ -25301,12 +25465,12 @@
           </a:solidFill>
         </p:spPr>
         <p:txBody>
-          <a:bodyPr wrap="square" lIns="45720" rIns="45720" tIns="18288" bIns="18288" anchor="t">
+          <a:bodyPr wrap="none" lIns="45720" rIns="45720" tIns="18288" bIns="18288" anchor="t">
             <a:spAutoFit/>
           </a:bodyPr>
           <a:lstStyle/>
           <a:p>
-            <a:pPr algn="ctr"/>
+            <a:pPr algn="l"/>
             <a:r>
               <a:rPr sz="900" b="0" i="0">
                 <a:solidFill>
@@ -25350,7 +25514,7 @@
         <p:spPr>
           <a:xfrm>
             <a:off x="1892808" y="3150108"/>
-            <a:ext cx="685800" cy="219456"/>
+            <a:ext cx="685800" cy="201168"/>
           </a:xfrm>
           <a:prstGeom prst="rect">
             <a:avLst/>
@@ -25360,12 +25524,12 @@
           </a:solidFill>
         </p:spPr>
         <p:txBody>
-          <a:bodyPr wrap="square" lIns="45720" rIns="45720" tIns="18288" bIns="18288" anchor="t">
+          <a:bodyPr wrap="none" lIns="45720" rIns="45720" tIns="18288" bIns="18288" anchor="t">
             <a:spAutoFit/>
           </a:bodyPr>
           <a:lstStyle/>
           <a:p>
-            <a:pPr algn="ctr"/>
+            <a:pPr algn="l"/>
             <a:r>
               <a:rPr sz="900" b="0" i="0">
                 <a:solidFill>
@@ -25410,7 +25574,7 @@
         <p:spPr>
           <a:xfrm>
             <a:off x="1828800" y="4119372"/>
-            <a:ext cx="960120" cy="219456"/>
+            <a:ext cx="960120" cy="201168"/>
           </a:xfrm>
           <a:prstGeom prst="rect">
             <a:avLst/>
@@ -25420,12 +25584,12 @@
           </a:solidFill>
         </p:spPr>
         <p:txBody>
-          <a:bodyPr wrap="square" lIns="45720" rIns="45720" tIns="18288" bIns="18288" anchor="t">
+          <a:bodyPr wrap="none" lIns="45720" rIns="45720" tIns="18288" bIns="18288" anchor="t">
             <a:spAutoFit/>
           </a:bodyPr>
           <a:lstStyle/>
           <a:p>
-            <a:pPr algn="ctr"/>
+            <a:pPr algn="l"/>
             <a:r>
               <a:rPr sz="900" b="0" i="0">
                 <a:solidFill>
@@ -25469,7 +25633,7 @@
         <p:spPr>
           <a:xfrm>
             <a:off x="3314699" y="4133088"/>
-            <a:ext cx="960120" cy="219456"/>
+            <a:ext cx="960120" cy="201168"/>
           </a:xfrm>
           <a:prstGeom prst="rect">
             <a:avLst/>
@@ -25479,12 +25643,12 @@
           </a:solidFill>
         </p:spPr>
         <p:txBody>
-          <a:bodyPr wrap="square" lIns="45720" rIns="45720" tIns="18288" bIns="18288" anchor="t">
+          <a:bodyPr wrap="none" lIns="45720" rIns="45720" tIns="18288" bIns="18288" anchor="t">
             <a:spAutoFit/>
           </a:bodyPr>
           <a:lstStyle/>
           <a:p>
-            <a:pPr algn="ctr"/>
+            <a:pPr algn="l"/>
             <a:r>
               <a:rPr sz="900" b="0" i="0">
                 <a:solidFill>
@@ -25528,7 +25692,7 @@
         <p:spPr>
           <a:xfrm>
             <a:off x="4251959" y="3145536"/>
-            <a:ext cx="1005840" cy="219456"/>
+            <a:ext cx="1005840" cy="201168"/>
           </a:xfrm>
           <a:prstGeom prst="rect">
             <a:avLst/>
@@ -25538,12 +25702,12 @@
           </a:solidFill>
         </p:spPr>
         <p:txBody>
-          <a:bodyPr wrap="square" lIns="45720" rIns="45720" tIns="18288" bIns="18288" anchor="t">
+          <a:bodyPr wrap="none" lIns="45720" rIns="45720" tIns="18288" bIns="18288" anchor="t">
             <a:spAutoFit/>
           </a:bodyPr>
           <a:lstStyle/>
           <a:p>
-            <a:pPr algn="ctr"/>
+            <a:pPr algn="l"/>
             <a:r>
               <a:rPr sz="900" b="0" i="0">
                 <a:solidFill>
@@ -25587,7 +25751,7 @@
         <p:spPr>
           <a:xfrm>
             <a:off x="6149339" y="2944368"/>
-            <a:ext cx="457200" cy="219456"/>
+            <a:ext cx="457200" cy="201168"/>
           </a:xfrm>
           <a:prstGeom prst="rect">
             <a:avLst/>
@@ -25597,12 +25761,12 @@
           </a:solidFill>
         </p:spPr>
         <p:txBody>
-          <a:bodyPr wrap="square" lIns="45720" rIns="45720" tIns="18288" bIns="18288" anchor="t">
+          <a:bodyPr wrap="none" lIns="45720" rIns="45720" tIns="18288" bIns="18288" anchor="t">
             <a:spAutoFit/>
           </a:bodyPr>
           <a:lstStyle/>
           <a:p>
-            <a:pPr algn="ctr"/>
+            <a:pPr algn="l"/>
             <a:r>
               <a:rPr sz="900" b="0" i="0">
                 <a:solidFill>
@@ -25646,7 +25810,7 @@
         <p:spPr>
           <a:xfrm>
             <a:off x="6149339" y="4315968"/>
-            <a:ext cx="868680" cy="219456"/>
+            <a:ext cx="868680" cy="201168"/>
           </a:xfrm>
           <a:prstGeom prst="rect">
             <a:avLst/>
@@ -25656,12 +25820,12 @@
           </a:solidFill>
         </p:spPr>
         <p:txBody>
-          <a:bodyPr wrap="square" lIns="45720" rIns="45720" tIns="18288" bIns="18288" anchor="t">
+          <a:bodyPr wrap="none" lIns="45720" rIns="45720" tIns="18288" bIns="18288" anchor="t">
             <a:spAutoFit/>
           </a:bodyPr>
           <a:lstStyle/>
           <a:p>
-            <a:pPr algn="ctr"/>
+            <a:pPr algn="l"/>
             <a:r>
               <a:rPr sz="900" b="0" i="0">
                 <a:solidFill>
@@ -25705,7 +25869,7 @@
         <p:spPr>
           <a:xfrm>
             <a:off x="2057400" y="5166360"/>
-            <a:ext cx="960120" cy="219456"/>
+            <a:ext cx="960120" cy="201168"/>
           </a:xfrm>
           <a:prstGeom prst="rect">
             <a:avLst/>
@@ -25715,12 +25879,12 @@
           </a:solidFill>
         </p:spPr>
         <p:txBody>
-          <a:bodyPr wrap="square" lIns="45720" rIns="45720" tIns="18288" bIns="18288" anchor="t">
+          <a:bodyPr wrap="none" lIns="45720" rIns="45720" tIns="18288" bIns="18288" anchor="t">
             <a:spAutoFit/>
           </a:bodyPr>
           <a:lstStyle/>
           <a:p>
-            <a:pPr algn="ctr"/>
+            <a:pPr algn="l"/>
             <a:r>
               <a:rPr sz="900" b="0" i="0">
                 <a:solidFill>
@@ -25764,7 +25928,7 @@
         <p:spPr>
           <a:xfrm>
             <a:off x="7132320" y="4105656"/>
-            <a:ext cx="960120" cy="219456"/>
+            <a:ext cx="960120" cy="201168"/>
           </a:xfrm>
           <a:prstGeom prst="rect">
             <a:avLst/>
@@ -25774,12 +25938,12 @@
           </a:solidFill>
         </p:spPr>
         <p:txBody>
-          <a:bodyPr wrap="square" lIns="45720" rIns="45720" tIns="18288" bIns="18288" anchor="t">
+          <a:bodyPr wrap="none" lIns="45720" rIns="45720" tIns="18288" bIns="18288" anchor="t">
             <a:spAutoFit/>
           </a:bodyPr>
           <a:lstStyle/>
           <a:p>
-            <a:pPr algn="ctr"/>
+            <a:pPr algn="l"/>
             <a:r>
               <a:rPr sz="900" b="0" i="0">
                 <a:solidFill>
@@ -25846,7 +26010,7 @@
         <p:spPr>
           <a:xfrm>
             <a:off x="9921239" y="3227832"/>
-            <a:ext cx="731520" cy="219456"/>
+            <a:ext cx="731520" cy="201168"/>
           </a:xfrm>
           <a:prstGeom prst="rect">
             <a:avLst/>
@@ -25856,12 +26020,12 @@
           </a:solidFill>
         </p:spPr>
         <p:txBody>
-          <a:bodyPr wrap="square" lIns="45720" rIns="45720" tIns="18288" bIns="18288" anchor="t">
+          <a:bodyPr wrap="none" lIns="45720" rIns="45720" tIns="18288" bIns="18288" anchor="t">
             <a:spAutoFit/>
           </a:bodyPr>
           <a:lstStyle/>
           <a:p>
-            <a:pPr algn="ctr"/>
+            <a:pPr algn="l"/>
             <a:r>
               <a:rPr sz="900" b="0" i="0">
                 <a:solidFill>
@@ -25905,7 +26069,7 @@
         <p:spPr>
           <a:xfrm>
             <a:off x="10012679" y="3849624"/>
-            <a:ext cx="457200" cy="219456"/>
+            <a:ext cx="457200" cy="201168"/>
           </a:xfrm>
           <a:prstGeom prst="rect">
             <a:avLst/>
@@ -25915,12 +26079,12 @@
           </a:solidFill>
         </p:spPr>
         <p:txBody>
-          <a:bodyPr wrap="square" lIns="45720" rIns="45720" tIns="18288" bIns="18288" anchor="t">
+          <a:bodyPr wrap="none" lIns="45720" rIns="45720" tIns="18288" bIns="18288" anchor="t">
             <a:spAutoFit/>
           </a:bodyPr>
           <a:lstStyle/>
           <a:p>
-            <a:pPr algn="ctr"/>
+            <a:pPr algn="l"/>
             <a:r>
               <a:rPr sz="900" b="0" i="0">
                 <a:solidFill>
@@ -26030,7 +26194,7 @@
         <p:spPr>
           <a:xfrm>
             <a:off x="7132319" y="5980176"/>
-            <a:ext cx="1051560" cy="219456"/>
+            <a:ext cx="1051560" cy="201168"/>
           </a:xfrm>
           <a:prstGeom prst="rect">
             <a:avLst/>
@@ -26040,12 +26204,12 @@
           </a:solidFill>
         </p:spPr>
         <p:txBody>
-          <a:bodyPr wrap="square" lIns="45720" rIns="45720" tIns="18288" bIns="18288" anchor="t">
+          <a:bodyPr wrap="none" lIns="45720" rIns="45720" tIns="18288" bIns="18288" anchor="t">
             <a:spAutoFit/>
           </a:bodyPr>
           <a:lstStyle/>
           <a:p>
-            <a:pPr algn="ctr"/>
+            <a:pPr algn="l"/>
             <a:r>
               <a:rPr sz="900" b="0" i="0">
                 <a:solidFill>

--- a/docs/Restaurant_OS_FSD.pptx
+++ b/docs/Restaurant_OS_FSD.pptx
@@ -3833,7 +3833,7 @@
                 </a:solidFill>
                 <a:latin typeface="Calibri"/>
               </a:rPr>
-              <a:t>Demo company: Saffron Grill (SGR) · Main branch: Gulberg, Lahore</a:t>
+              <a:t>Demo company: Saffron Grill (SGR) · Main branch: Gulberg branch at D-Ground, Faisalabad</a:t>
             </a:r>
           </a:p>
         </p:txBody>
